--- a/docs/content/05-teaching-resources/slides/specialism/04-loads-environment-and-aerodynamics.pptx
+++ b/docs/content/05-teaching-resources/slides/specialism/04-loads-environment-and-aerodynamics.pptx
@@ -8,12 +8,16 @@
     <p:sldId id="256" r:id="rId7"/>
     <p:sldId id="257" r:id="rId8"/>
     <p:sldId id="258" r:id="rId9"/>
-    <p:sldId id="259" r:id="rId11"/>
+    <p:sldId id="259" r:id="rId10"/>
     <p:sldId id="260" r:id="rId12"/>
     <p:sldId id="261" r:id="rId13"/>
     <p:sldId id="262" r:id="rId14"/>
     <p:sldId id="263" r:id="rId15"/>
     <p:sldId id="264" r:id="rId16"/>
+    <p:sldId id="265" r:id="rId17"/>
+    <p:sldId id="266" r:id="rId18"/>
+    <p:sldId id="267" r:id="rId19"/>
+    <p:sldId id="268" r:id="rId20"/>
   </p:sldIdLst>
   <p:sldSz cx="12191695" cy="6858000" type="screen4x3"/>
   <p:notesSz cx="6858000" cy="9144000"/>
@@ -580,7 +584,22 @@
           <a:lstStyle/>
           <a:p>
             <a:r>
-              <a:t>Give students a few minutes to answer on mini whiteboards or paper, then reveal the answers on the next slide.</a:t>
+              <a:t>Answers:</a:t>
+            </a:r>
+          </a:p>
+          <a:p>
+            <a:r>
+              <a:t>1. A load spread evenly along a length.</a:t>
+            </a:r>
+          </a:p>
+          <a:p>
+            <a:r>
+              <a:t>2. Repeated cycles grow cracks.</a:t>
+            </a:r>
+          </a:p>
+          <a:p>
+            <a:r>
+              <a:t>3. Bends a member.</a:t>
             </a:r>
           </a:p>
         </p:txBody>
@@ -650,7 +669,22 @@
           <a:lstStyle/>
           <a:p>
             <a:r>
-              <a:t>Talk through any answers the class found difficult.</a:t>
+              <a:t>Answers:</a:t>
+            </a:r>
+          </a:p>
+          <a:p>
+            <a:r>
+              <a:t>1. Where flow leaves the surface.</a:t>
+            </a:r>
+          </a:p>
+          <a:p>
+            <a:r>
+              <a:t>2. At right angles to the flow.</a:t>
+            </a:r>
+          </a:p>
+          <a:p>
+            <a:r>
+              <a:t>3. Fluctuating loads cause vibration and fatigue.</a:t>
             </a:r>
           </a:p>
         </p:txBody>
@@ -676,6 +710,146 @@
 </file>
 
 <file path=ppt/notesSlides/notesSlide4.xml><?xml version="1.0" encoding="utf-8"?>
+<p:notes xmlns:a="http://schemas.openxmlformats.org/drawingml/2006/main" xmlns:p="http://schemas.openxmlformats.org/presentationml/2006/main" xmlns:r="http://schemas.openxmlformats.org/officeDocument/2006/relationships">
+  <p:cSld>
+    <p:spTree>
+      <p:nvGrpSpPr>
+        <p:cNvPr id="1" name=""/>
+        <p:cNvGrpSpPr/>
+        <p:nvPr/>
+      </p:nvGrpSpPr>
+      <p:grpSpPr>
+        <a:xfrm>
+          <a:off x="0" y="0"/>
+          <a:ext cx="0" cy="0"/>
+          <a:chOff x="0" y="0"/>
+          <a:chExt cx="0" cy="0"/>
+        </a:xfrm>
+      </p:grpSpPr>
+      <p:sp>
+        <p:nvSpPr>
+          <p:cNvPr id="2" name="Slide Image Placeholder 1"/>
+          <p:cNvSpPr>
+            <a:spLocks noGrp="1"/>
+          </p:cNvSpPr>
+          <p:nvPr>
+            <p:ph type="sldImg" idx="2"/>
+          </p:nvPr>
+        </p:nvSpPr>
+        <p:spPr/>
+      </p:sp>
+      <p:sp>
+        <p:nvSpPr>
+          <p:cNvPr id="3" name="Notes Placeholder 2"/>
+          <p:cNvSpPr>
+            <a:spLocks noGrp="1"/>
+          </p:cNvSpPr>
+          <p:nvPr>
+            <p:ph type="body" idx="3" sz="quarter"/>
+          </p:nvPr>
+        </p:nvSpPr>
+        <p:spPr/>
+        <p:txBody>
+          <a:bodyPr/>
+          <a:lstStyle/>
+          <a:p>
+            <a:r>
+              <a:t>Give students a few minutes to answer on mini whiteboards or paper, then reveal the answers on the next slide.</a:t>
+            </a:r>
+          </a:p>
+        </p:txBody>
+      </p:sp>
+      <p:sp>
+        <p:nvSpPr>
+          <p:cNvPr id="4" name="Slide Number Placeholder 3"/>
+          <p:cNvSpPr>
+            <a:spLocks noGrp="1"/>
+          </p:cNvSpPr>
+          <p:nvPr>
+            <p:ph type="sldNum" idx="5" sz="quarter"/>
+          </p:nvPr>
+        </p:nvSpPr>
+        <p:spPr/>
+      </p:sp>
+    </p:spTree>
+  </p:cSld>
+  <p:clrMapOvr>
+    <a:masterClrMapping/>
+  </p:clrMapOvr>
+</p:notes>
+</file>
+
+<file path=ppt/notesSlides/notesSlide5.xml><?xml version="1.0" encoding="utf-8"?>
+<p:notes xmlns:a="http://schemas.openxmlformats.org/drawingml/2006/main" xmlns:p="http://schemas.openxmlformats.org/presentationml/2006/main" xmlns:r="http://schemas.openxmlformats.org/officeDocument/2006/relationships">
+  <p:cSld>
+    <p:spTree>
+      <p:nvGrpSpPr>
+        <p:cNvPr id="1" name=""/>
+        <p:cNvGrpSpPr/>
+        <p:nvPr/>
+      </p:nvGrpSpPr>
+      <p:grpSpPr>
+        <a:xfrm>
+          <a:off x="0" y="0"/>
+          <a:ext cx="0" cy="0"/>
+          <a:chOff x="0" y="0"/>
+          <a:chExt cx="0" cy="0"/>
+        </a:xfrm>
+      </p:grpSpPr>
+      <p:sp>
+        <p:nvSpPr>
+          <p:cNvPr id="2" name="Slide Image Placeholder 1"/>
+          <p:cNvSpPr>
+            <a:spLocks noGrp="1"/>
+          </p:cNvSpPr>
+          <p:nvPr>
+            <p:ph type="sldImg" idx="2"/>
+          </p:nvPr>
+        </p:nvSpPr>
+        <p:spPr/>
+      </p:sp>
+      <p:sp>
+        <p:nvSpPr>
+          <p:cNvPr id="3" name="Notes Placeholder 2"/>
+          <p:cNvSpPr>
+            <a:spLocks noGrp="1"/>
+          </p:cNvSpPr>
+          <p:nvPr>
+            <p:ph type="body" idx="3" sz="quarter"/>
+          </p:nvPr>
+        </p:nvSpPr>
+        <p:spPr/>
+        <p:txBody>
+          <a:bodyPr/>
+          <a:lstStyle/>
+          <a:p>
+            <a:r>
+              <a:t>Talk through any answers the class found difficult.</a:t>
+            </a:r>
+          </a:p>
+        </p:txBody>
+      </p:sp>
+      <p:sp>
+        <p:nvSpPr>
+          <p:cNvPr id="4" name="Slide Number Placeholder 3"/>
+          <p:cNvSpPr>
+            <a:spLocks noGrp="1"/>
+          </p:cNvSpPr>
+          <p:nvPr>
+            <p:ph type="sldNum" idx="5" sz="quarter"/>
+          </p:nvPr>
+        </p:nvSpPr>
+        <p:spPr/>
+      </p:sp>
+    </p:spTree>
+  </p:cSld>
+  <p:clrMapOvr>
+    <a:masterClrMapping/>
+  </p:clrMapOvr>
+</p:notes>
+</file>
+
+<file path=ppt/notesSlides/notesSlide6.xml><?xml version="1.0" encoding="utf-8"?>
 <p:notes xmlns:a="http://schemas.openxmlformats.org/drawingml/2006/main" xmlns:p="http://schemas.openxmlformats.org/presentationml/2006/main" xmlns:r="http://schemas.openxmlformats.org/officeDocument/2006/relationships">
   <p:cSld>
     <p:spTree>
@@ -4045,6 +4219,2355 @@
 </p:sld>
 </file>
 
+<file path=ppt/slides/slide10.xml><?xml version="1.0" encoding="utf-8"?>
+<p:sld xmlns:a="http://schemas.openxmlformats.org/drawingml/2006/main" xmlns:p="http://schemas.openxmlformats.org/presentationml/2006/main" xmlns:r="http://schemas.openxmlformats.org/officeDocument/2006/relationships">
+  <p:cSld>
+    <p:bg>
+      <p:bgPr>
+        <a:solidFill>
+          <a:srgbClr val="FFFFFF"/>
+        </a:solidFill>
+        <a:effectLst/>
+      </p:bgPr>
+    </p:bg>
+    <p:spTree>
+      <p:nvGrpSpPr>
+        <p:cNvPr id="1" name=""/>
+        <p:cNvGrpSpPr/>
+        <p:nvPr/>
+      </p:nvGrpSpPr>
+      <p:grpSpPr/>
+      <p:sp>
+        <p:nvSpPr>
+          <p:cNvPr id="2" name="TextBox 1"/>
+          <p:cNvSpPr txBox="1"/>
+          <p:nvPr/>
+        </p:nvSpPr>
+        <p:spPr>
+          <a:xfrm>
+            <a:off x="548640" y="320040"/>
+            <a:ext cx="11094415" cy="274320"/>
+          </a:xfrm>
+          <a:prstGeom prst="rect">
+            <a:avLst/>
+          </a:prstGeom>
+          <a:noFill/>
+        </p:spPr>
+        <p:txBody>
+          <a:bodyPr wrap="square" anchor="t" lIns="0" rIns="0" tIns="0" bIns="0"/>
+          <a:lstStyle/>
+          <a:p>
+            <a:pPr algn="l"/>
+            <a:r>
+              <a:rPr sz="1100" b="1" i="0">
+                <a:solidFill>
+                  <a:srgbClr val="54595D"/>
+                </a:solidFill>
+                <a:latin typeface="Calibri"/>
+              </a:rPr>
+              <a:t>MECHANICAL ENGINEERING  ·  Mechanical: Knowledge criteria</a:t>
+            </a:r>
+          </a:p>
+        </p:txBody>
+      </p:sp>
+      <p:sp>
+        <p:nvSpPr>
+          <p:cNvPr id="3" name="TextBox 2"/>
+          <p:cNvSpPr txBox="1"/>
+          <p:nvPr/>
+        </p:nvSpPr>
+        <p:spPr>
+          <a:xfrm>
+            <a:off x="548640" y="566928"/>
+            <a:ext cx="11094415" cy="822960"/>
+          </a:xfrm>
+          <a:prstGeom prst="rect">
+            <a:avLst/>
+          </a:prstGeom>
+          <a:noFill/>
+        </p:spPr>
+        <p:txBody>
+          <a:bodyPr wrap="square" anchor="ctr" lIns="0" rIns="0" tIns="0" bIns="0"/>
+          <a:lstStyle/>
+          <a:p>
+            <a:pPr algn="l"/>
+            <a:r>
+              <a:rPr sz="3200" b="1" i="0">
+                <a:solidFill>
+                  <a:srgbClr val="03306E"/>
+                </a:solidFill>
+                <a:latin typeface="Cambria"/>
+              </a:rPr>
+              <a:t>Check your understanding</a:t>
+            </a:r>
+          </a:p>
+        </p:txBody>
+      </p:sp>
+      <p:sp>
+        <p:nvSpPr>
+          <p:cNvPr id="4" name="TextBox 3"/>
+          <p:cNvSpPr txBox="1"/>
+          <p:nvPr/>
+        </p:nvSpPr>
+        <p:spPr>
+          <a:xfrm>
+            <a:off x="548640" y="6446520"/>
+            <a:ext cx="8229600" cy="274320"/>
+          </a:xfrm>
+          <a:prstGeom prst="rect">
+            <a:avLst/>
+          </a:prstGeom>
+          <a:noFill/>
+        </p:spPr>
+        <p:txBody>
+          <a:bodyPr wrap="square" anchor="t" lIns="0" rIns="0" tIns="0" bIns="0"/>
+          <a:lstStyle/>
+          <a:p>
+            <a:pPr algn="l"/>
+            <a:r>
+              <a:rPr sz="1000" b="0" i="0">
+                <a:solidFill>
+                  <a:srgbClr val="54595D"/>
+                </a:solidFill>
+                <a:latin typeface="Calibri"/>
+              </a:rPr>
+              <a:t>Design and Development for Engineering and Manufacturing T Level  ·  Loads, Environment and Aerodynamics in Design</a:t>
+            </a:r>
+          </a:p>
+        </p:txBody>
+      </p:sp>
+      <p:sp>
+        <p:nvSpPr>
+          <p:cNvPr id="5" name="TextBox 4"/>
+          <p:cNvSpPr txBox="1"/>
+          <p:nvPr/>
+        </p:nvSpPr>
+        <p:spPr>
+          <a:xfrm>
+            <a:off x="10728655" y="6446520"/>
+            <a:ext cx="914400" cy="274320"/>
+          </a:xfrm>
+          <a:prstGeom prst="rect">
+            <a:avLst/>
+          </a:prstGeom>
+          <a:noFill/>
+        </p:spPr>
+        <p:txBody>
+          <a:bodyPr wrap="square" anchor="t" lIns="0" rIns="0" tIns="0" bIns="0"/>
+          <a:lstStyle/>
+          <a:p>
+            <a:pPr algn="r"/>
+            <a:r>
+              <a:rPr sz="1000" b="0" i="0">
+                <a:solidFill>
+                  <a:srgbClr val="54595D"/>
+                </a:solidFill>
+                <a:latin typeface="Calibri"/>
+              </a:rPr>
+              <a:t>10</a:t>
+            </a:r>
+          </a:p>
+        </p:txBody>
+      </p:sp>
+      <p:sp>
+        <p:nvSpPr>
+          <p:cNvPr id="6" name="Oval 5"/>
+          <p:cNvSpPr/>
+          <p:nvPr/>
+        </p:nvSpPr>
+        <p:spPr>
+          <a:xfrm>
+            <a:off x="548640" y="1618488"/>
+            <a:ext cx="411480" cy="411480"/>
+          </a:xfrm>
+          <a:prstGeom prst="ellipse">
+            <a:avLst/>
+          </a:prstGeom>
+          <a:solidFill>
+            <a:srgbClr val="E0463A"/>
+          </a:solidFill>
+          <a:ln>
+            <a:noFill/>
+          </a:ln>
+          <a:effectLst/>
+        </p:spPr>
+        <p:style>
+          <a:lnRef idx="1">
+            <a:schemeClr val="accent1"/>
+          </a:lnRef>
+          <a:fillRef idx="3">
+            <a:schemeClr val="accent1"/>
+          </a:fillRef>
+          <a:effectRef idx="2">
+            <a:schemeClr val="accent1"/>
+          </a:effectRef>
+          <a:fontRef idx="minor">
+            <a:schemeClr val="lt1"/>
+          </a:fontRef>
+        </p:style>
+        <p:txBody>
+          <a:bodyPr rtlCol="0" anchor="ctr" lIns="0" rIns="0" tIns="0" bIns="0"/>
+          <a:lstStyle/>
+          <a:p>
+            <a:pPr algn="ctr"/>
+            <a:r>
+              <a:rPr sz="1400" b="1">
+                <a:solidFill>
+                  <a:srgbClr val="FFFFFF"/>
+                </a:solidFill>
+                <a:latin typeface="Calibri"/>
+              </a:rPr>
+              <a:t>1</a:t>
+            </a:r>
+          </a:p>
+        </p:txBody>
+      </p:sp>
+      <p:sp>
+        <p:nvSpPr>
+          <p:cNvPr id="7" name="TextBox 6"/>
+          <p:cNvSpPr txBox="1"/>
+          <p:nvPr/>
+        </p:nvSpPr>
+        <p:spPr>
+          <a:xfrm>
+            <a:off x="1234440" y="1600200"/>
+            <a:ext cx="10408615" cy="1030986"/>
+          </a:xfrm>
+          <a:prstGeom prst="rect">
+            <a:avLst/>
+          </a:prstGeom>
+          <a:noFill/>
+        </p:spPr>
+        <p:txBody>
+          <a:bodyPr wrap="square" anchor="t" lIns="0" rIns="0" tIns="0" bIns="0"/>
+          <a:lstStyle/>
+          <a:p>
+            <a:pPr algn="l"/>
+            <a:r>
+              <a:rPr sz="2200" b="0" i="0">
+                <a:solidFill>
+                  <a:srgbClr val="202122"/>
+                </a:solidFill>
+                <a:latin typeface="Calibri"/>
+              </a:rPr>
+              <a:t>What is a uniformly distributed load?</a:t>
+            </a:r>
+          </a:p>
+        </p:txBody>
+      </p:sp>
+      <p:sp>
+        <p:nvSpPr>
+          <p:cNvPr id="8" name="Oval 7"/>
+          <p:cNvSpPr/>
+          <p:nvPr/>
+        </p:nvSpPr>
+        <p:spPr>
+          <a:xfrm>
+            <a:off x="548640" y="2814066"/>
+            <a:ext cx="411480" cy="411480"/>
+          </a:xfrm>
+          <a:prstGeom prst="ellipse">
+            <a:avLst/>
+          </a:prstGeom>
+          <a:solidFill>
+            <a:srgbClr val="E0463A"/>
+          </a:solidFill>
+          <a:ln>
+            <a:noFill/>
+          </a:ln>
+          <a:effectLst/>
+        </p:spPr>
+        <p:style>
+          <a:lnRef idx="1">
+            <a:schemeClr val="accent1"/>
+          </a:lnRef>
+          <a:fillRef idx="3">
+            <a:schemeClr val="accent1"/>
+          </a:fillRef>
+          <a:effectRef idx="2">
+            <a:schemeClr val="accent1"/>
+          </a:effectRef>
+          <a:fontRef idx="minor">
+            <a:schemeClr val="lt1"/>
+          </a:fontRef>
+        </p:style>
+        <p:txBody>
+          <a:bodyPr rtlCol="0" anchor="ctr" lIns="0" rIns="0" tIns="0" bIns="0"/>
+          <a:lstStyle/>
+          <a:p>
+            <a:pPr algn="ctr"/>
+            <a:r>
+              <a:rPr sz="1400" b="1">
+                <a:solidFill>
+                  <a:srgbClr val="FFFFFF"/>
+                </a:solidFill>
+                <a:latin typeface="Calibri"/>
+              </a:rPr>
+              <a:t>2</a:t>
+            </a:r>
+          </a:p>
+        </p:txBody>
+      </p:sp>
+      <p:sp>
+        <p:nvSpPr>
+          <p:cNvPr id="9" name="TextBox 8"/>
+          <p:cNvSpPr txBox="1"/>
+          <p:nvPr/>
+        </p:nvSpPr>
+        <p:spPr>
+          <a:xfrm>
+            <a:off x="1234440" y="2795778"/>
+            <a:ext cx="10408615" cy="1030986"/>
+          </a:xfrm>
+          <a:prstGeom prst="rect">
+            <a:avLst/>
+          </a:prstGeom>
+          <a:noFill/>
+        </p:spPr>
+        <p:txBody>
+          <a:bodyPr wrap="square" anchor="t" lIns="0" rIns="0" tIns="0" bIns="0"/>
+          <a:lstStyle/>
+          <a:p>
+            <a:pPr algn="l"/>
+            <a:r>
+              <a:rPr sz="2200" b="0" i="0">
+                <a:solidFill>
+                  <a:srgbClr val="202122"/>
+                </a:solidFill>
+                <a:latin typeface="Calibri"/>
+              </a:rPr>
+              <a:t>What causes fatigue?</a:t>
+            </a:r>
+          </a:p>
+        </p:txBody>
+      </p:sp>
+      <p:sp>
+        <p:nvSpPr>
+          <p:cNvPr id="10" name="Oval 9"/>
+          <p:cNvSpPr/>
+          <p:nvPr/>
+        </p:nvSpPr>
+        <p:spPr>
+          <a:xfrm>
+            <a:off x="548640" y="4009644"/>
+            <a:ext cx="411480" cy="411480"/>
+          </a:xfrm>
+          <a:prstGeom prst="ellipse">
+            <a:avLst/>
+          </a:prstGeom>
+          <a:solidFill>
+            <a:srgbClr val="E0463A"/>
+          </a:solidFill>
+          <a:ln>
+            <a:noFill/>
+          </a:ln>
+          <a:effectLst/>
+        </p:spPr>
+        <p:style>
+          <a:lnRef idx="1">
+            <a:schemeClr val="accent1"/>
+          </a:lnRef>
+          <a:fillRef idx="3">
+            <a:schemeClr val="accent1"/>
+          </a:fillRef>
+          <a:effectRef idx="2">
+            <a:schemeClr val="accent1"/>
+          </a:effectRef>
+          <a:fontRef idx="minor">
+            <a:schemeClr val="lt1"/>
+          </a:fontRef>
+        </p:style>
+        <p:txBody>
+          <a:bodyPr rtlCol="0" anchor="ctr" lIns="0" rIns="0" tIns="0" bIns="0"/>
+          <a:lstStyle/>
+          <a:p>
+            <a:pPr algn="ctr"/>
+            <a:r>
+              <a:rPr sz="1400" b="1">
+                <a:solidFill>
+                  <a:srgbClr val="FFFFFF"/>
+                </a:solidFill>
+                <a:latin typeface="Calibri"/>
+              </a:rPr>
+              <a:t>3</a:t>
+            </a:r>
+          </a:p>
+        </p:txBody>
+      </p:sp>
+      <p:sp>
+        <p:nvSpPr>
+          <p:cNvPr id="11" name="TextBox 10"/>
+          <p:cNvSpPr txBox="1"/>
+          <p:nvPr/>
+        </p:nvSpPr>
+        <p:spPr>
+          <a:xfrm>
+            <a:off x="1234440" y="3991356"/>
+            <a:ext cx="10408615" cy="1030986"/>
+          </a:xfrm>
+          <a:prstGeom prst="rect">
+            <a:avLst/>
+          </a:prstGeom>
+          <a:noFill/>
+        </p:spPr>
+        <p:txBody>
+          <a:bodyPr wrap="square" anchor="t" lIns="0" rIns="0" tIns="0" bIns="0"/>
+          <a:lstStyle/>
+          <a:p>
+            <a:pPr algn="l"/>
+            <a:r>
+              <a:rPr sz="2200" b="0" i="0">
+                <a:solidFill>
+                  <a:srgbClr val="202122"/>
+                </a:solidFill>
+                <a:latin typeface="Calibri"/>
+              </a:rPr>
+              <a:t>Where does turbulent flow usually start on a blunt object?</a:t>
+            </a:r>
+          </a:p>
+        </p:txBody>
+      </p:sp>
+      <p:sp>
+        <p:nvSpPr>
+          <p:cNvPr id="12" name="Oval 11"/>
+          <p:cNvSpPr/>
+          <p:nvPr/>
+        </p:nvSpPr>
+        <p:spPr>
+          <a:xfrm>
+            <a:off x="548640" y="5205221"/>
+            <a:ext cx="411480" cy="411480"/>
+          </a:xfrm>
+          <a:prstGeom prst="ellipse">
+            <a:avLst/>
+          </a:prstGeom>
+          <a:solidFill>
+            <a:srgbClr val="E0463A"/>
+          </a:solidFill>
+          <a:ln>
+            <a:noFill/>
+          </a:ln>
+          <a:effectLst/>
+        </p:spPr>
+        <p:style>
+          <a:lnRef idx="1">
+            <a:schemeClr val="accent1"/>
+          </a:lnRef>
+          <a:fillRef idx="3">
+            <a:schemeClr val="accent1"/>
+          </a:fillRef>
+          <a:effectRef idx="2">
+            <a:schemeClr val="accent1"/>
+          </a:effectRef>
+          <a:fontRef idx="minor">
+            <a:schemeClr val="lt1"/>
+          </a:fontRef>
+        </p:style>
+        <p:txBody>
+          <a:bodyPr rtlCol="0" anchor="ctr" lIns="0" rIns="0" tIns="0" bIns="0"/>
+          <a:lstStyle/>
+          <a:p>
+            <a:pPr algn="ctr"/>
+            <a:r>
+              <a:rPr sz="1400" b="1">
+                <a:solidFill>
+                  <a:srgbClr val="FFFFFF"/>
+                </a:solidFill>
+                <a:latin typeface="Calibri"/>
+              </a:rPr>
+              <a:t>4</a:t>
+            </a:r>
+          </a:p>
+        </p:txBody>
+      </p:sp>
+      <p:sp>
+        <p:nvSpPr>
+          <p:cNvPr id="13" name="TextBox 12"/>
+          <p:cNvSpPr txBox="1"/>
+          <p:nvPr/>
+        </p:nvSpPr>
+        <p:spPr>
+          <a:xfrm>
+            <a:off x="1234440" y="5186933"/>
+            <a:ext cx="10408615" cy="1030986"/>
+          </a:xfrm>
+          <a:prstGeom prst="rect">
+            <a:avLst/>
+          </a:prstGeom>
+          <a:noFill/>
+        </p:spPr>
+        <p:txBody>
+          <a:bodyPr wrap="square" anchor="t" lIns="0" rIns="0" tIns="0" bIns="0"/>
+          <a:lstStyle/>
+          <a:p>
+            <a:pPr algn="l"/>
+            <a:r>
+              <a:rPr sz="2200" b="0" i="0">
+                <a:solidFill>
+                  <a:srgbClr val="202122"/>
+                </a:solidFill>
+                <a:latin typeface="Calibri"/>
+              </a:rPr>
+              <a:t>Why can vortices damage structures?</a:t>
+            </a:r>
+          </a:p>
+        </p:txBody>
+      </p:sp>
+    </p:spTree>
+  </p:cSld>
+  <p:clrMapOvr>
+    <a:masterClrMapping/>
+  </p:clrMapOvr>
+</p:sld>
+</file>
+
+<file path=ppt/slides/slide11.xml><?xml version="1.0" encoding="utf-8"?>
+<p:sld xmlns:a="http://schemas.openxmlformats.org/drawingml/2006/main" xmlns:p="http://schemas.openxmlformats.org/presentationml/2006/main" xmlns:r="http://schemas.openxmlformats.org/officeDocument/2006/relationships">
+  <p:cSld>
+    <p:bg>
+      <p:bgPr>
+        <a:solidFill>
+          <a:srgbClr val="FFFFFF"/>
+        </a:solidFill>
+        <a:effectLst/>
+      </p:bgPr>
+    </p:bg>
+    <p:spTree>
+      <p:nvGrpSpPr>
+        <p:cNvPr id="1" name=""/>
+        <p:cNvGrpSpPr/>
+        <p:nvPr/>
+      </p:nvGrpSpPr>
+      <p:grpSpPr/>
+      <p:sp>
+        <p:nvSpPr>
+          <p:cNvPr id="2" name="TextBox 1"/>
+          <p:cNvSpPr txBox="1"/>
+          <p:nvPr/>
+        </p:nvSpPr>
+        <p:spPr>
+          <a:xfrm>
+            <a:off x="548640" y="320040"/>
+            <a:ext cx="11094415" cy="274320"/>
+          </a:xfrm>
+          <a:prstGeom prst="rect">
+            <a:avLst/>
+          </a:prstGeom>
+          <a:noFill/>
+        </p:spPr>
+        <p:txBody>
+          <a:bodyPr wrap="square" anchor="t" lIns="0" rIns="0" tIns="0" bIns="0"/>
+          <a:lstStyle/>
+          <a:p>
+            <a:pPr algn="l"/>
+            <a:r>
+              <a:rPr sz="1100" b="1" i="0">
+                <a:solidFill>
+                  <a:srgbClr val="54595D"/>
+                </a:solidFill>
+                <a:latin typeface="Calibri"/>
+              </a:rPr>
+              <a:t>MECHANICAL ENGINEERING  ·  Mechanical: Knowledge criteria</a:t>
+            </a:r>
+          </a:p>
+        </p:txBody>
+      </p:sp>
+      <p:sp>
+        <p:nvSpPr>
+          <p:cNvPr id="3" name="TextBox 2"/>
+          <p:cNvSpPr txBox="1"/>
+          <p:nvPr/>
+        </p:nvSpPr>
+        <p:spPr>
+          <a:xfrm>
+            <a:off x="548640" y="566928"/>
+            <a:ext cx="11094415" cy="822960"/>
+          </a:xfrm>
+          <a:prstGeom prst="rect">
+            <a:avLst/>
+          </a:prstGeom>
+          <a:noFill/>
+        </p:spPr>
+        <p:txBody>
+          <a:bodyPr wrap="square" anchor="ctr" lIns="0" rIns="0" tIns="0" bIns="0"/>
+          <a:lstStyle/>
+          <a:p>
+            <a:pPr algn="l"/>
+            <a:r>
+              <a:rPr sz="3200" b="1" i="0">
+                <a:solidFill>
+                  <a:srgbClr val="03306E"/>
+                </a:solidFill>
+                <a:latin typeface="Cambria"/>
+              </a:rPr>
+              <a:t>Answers</a:t>
+            </a:r>
+          </a:p>
+        </p:txBody>
+      </p:sp>
+      <p:sp>
+        <p:nvSpPr>
+          <p:cNvPr id="4" name="TextBox 3"/>
+          <p:cNvSpPr txBox="1"/>
+          <p:nvPr/>
+        </p:nvSpPr>
+        <p:spPr>
+          <a:xfrm>
+            <a:off x="548640" y="6446520"/>
+            <a:ext cx="8229600" cy="274320"/>
+          </a:xfrm>
+          <a:prstGeom prst="rect">
+            <a:avLst/>
+          </a:prstGeom>
+          <a:noFill/>
+        </p:spPr>
+        <p:txBody>
+          <a:bodyPr wrap="square" anchor="t" lIns="0" rIns="0" tIns="0" bIns="0"/>
+          <a:lstStyle/>
+          <a:p>
+            <a:pPr algn="l"/>
+            <a:r>
+              <a:rPr sz="1000" b="0" i="0">
+                <a:solidFill>
+                  <a:srgbClr val="54595D"/>
+                </a:solidFill>
+                <a:latin typeface="Calibri"/>
+              </a:rPr>
+              <a:t>Design and Development for Engineering and Manufacturing T Level  ·  Loads, Environment and Aerodynamics in Design</a:t>
+            </a:r>
+          </a:p>
+        </p:txBody>
+      </p:sp>
+      <p:sp>
+        <p:nvSpPr>
+          <p:cNvPr id="5" name="TextBox 4"/>
+          <p:cNvSpPr txBox="1"/>
+          <p:nvPr/>
+        </p:nvSpPr>
+        <p:spPr>
+          <a:xfrm>
+            <a:off x="10728655" y="6446520"/>
+            <a:ext cx="914400" cy="274320"/>
+          </a:xfrm>
+          <a:prstGeom prst="rect">
+            <a:avLst/>
+          </a:prstGeom>
+          <a:noFill/>
+        </p:spPr>
+        <p:txBody>
+          <a:bodyPr wrap="square" anchor="t" lIns="0" rIns="0" tIns="0" bIns="0"/>
+          <a:lstStyle/>
+          <a:p>
+            <a:pPr algn="r"/>
+            <a:r>
+              <a:rPr sz="1000" b="0" i="0">
+                <a:solidFill>
+                  <a:srgbClr val="54595D"/>
+                </a:solidFill>
+                <a:latin typeface="Calibri"/>
+              </a:rPr>
+              <a:t>11</a:t>
+            </a:r>
+          </a:p>
+        </p:txBody>
+      </p:sp>
+      <p:sp>
+        <p:nvSpPr>
+          <p:cNvPr id="6" name="Oval 5"/>
+          <p:cNvSpPr/>
+          <p:nvPr/>
+        </p:nvSpPr>
+        <p:spPr>
+          <a:xfrm>
+            <a:off x="548640" y="1618488"/>
+            <a:ext cx="411480" cy="411480"/>
+          </a:xfrm>
+          <a:prstGeom prst="ellipse">
+            <a:avLst/>
+          </a:prstGeom>
+          <a:solidFill>
+            <a:srgbClr val="E0463A"/>
+          </a:solidFill>
+          <a:ln>
+            <a:noFill/>
+          </a:ln>
+          <a:effectLst/>
+        </p:spPr>
+        <p:style>
+          <a:lnRef idx="1">
+            <a:schemeClr val="accent1"/>
+          </a:lnRef>
+          <a:fillRef idx="3">
+            <a:schemeClr val="accent1"/>
+          </a:fillRef>
+          <a:effectRef idx="2">
+            <a:schemeClr val="accent1"/>
+          </a:effectRef>
+          <a:fontRef idx="minor">
+            <a:schemeClr val="lt1"/>
+          </a:fontRef>
+        </p:style>
+        <p:txBody>
+          <a:bodyPr rtlCol="0" anchor="ctr" lIns="0" rIns="0" tIns="0" bIns="0"/>
+          <a:lstStyle/>
+          <a:p>
+            <a:pPr algn="ctr"/>
+            <a:r>
+              <a:rPr sz="1400" b="1">
+                <a:solidFill>
+                  <a:srgbClr val="FFFFFF"/>
+                </a:solidFill>
+                <a:latin typeface="Calibri"/>
+              </a:rPr>
+              <a:t>1</a:t>
+            </a:r>
+          </a:p>
+        </p:txBody>
+      </p:sp>
+      <p:sp>
+        <p:nvSpPr>
+          <p:cNvPr id="7" name="TextBox 6"/>
+          <p:cNvSpPr txBox="1"/>
+          <p:nvPr/>
+        </p:nvSpPr>
+        <p:spPr>
+          <a:xfrm>
+            <a:off x="1234440" y="1600200"/>
+            <a:ext cx="10408615" cy="1030986"/>
+          </a:xfrm>
+          <a:prstGeom prst="rect">
+            <a:avLst/>
+          </a:prstGeom>
+          <a:noFill/>
+        </p:spPr>
+        <p:txBody>
+          <a:bodyPr wrap="square" anchor="t" lIns="0" rIns="0" tIns="0" bIns="0"/>
+          <a:lstStyle/>
+          <a:p>
+            <a:pPr algn="l"/>
+            <a:r>
+              <a:rPr sz="1800" b="0" i="0">
+                <a:solidFill>
+                  <a:srgbClr val="54595D"/>
+                </a:solidFill>
+                <a:latin typeface="Calibri"/>
+              </a:rPr>
+              <a:t>What is a uniformly distributed load?</a:t>
+            </a:r>
+          </a:p>
+          <a:p>
+            <a:r>
+              <a:rPr sz="1800" b="1">
+                <a:solidFill>
+                  <a:srgbClr val="03306E"/>
+                </a:solidFill>
+                <a:latin typeface="Calibri"/>
+              </a:rPr>
+              <a:t>A load spread evenly along a length.</a:t>
+            </a:r>
+          </a:p>
+        </p:txBody>
+      </p:sp>
+      <p:sp>
+        <p:nvSpPr>
+          <p:cNvPr id="8" name="Oval 7"/>
+          <p:cNvSpPr/>
+          <p:nvPr/>
+        </p:nvSpPr>
+        <p:spPr>
+          <a:xfrm>
+            <a:off x="548640" y="2814066"/>
+            <a:ext cx="411480" cy="411480"/>
+          </a:xfrm>
+          <a:prstGeom prst="ellipse">
+            <a:avLst/>
+          </a:prstGeom>
+          <a:solidFill>
+            <a:srgbClr val="E0463A"/>
+          </a:solidFill>
+          <a:ln>
+            <a:noFill/>
+          </a:ln>
+          <a:effectLst/>
+        </p:spPr>
+        <p:style>
+          <a:lnRef idx="1">
+            <a:schemeClr val="accent1"/>
+          </a:lnRef>
+          <a:fillRef idx="3">
+            <a:schemeClr val="accent1"/>
+          </a:fillRef>
+          <a:effectRef idx="2">
+            <a:schemeClr val="accent1"/>
+          </a:effectRef>
+          <a:fontRef idx="minor">
+            <a:schemeClr val="lt1"/>
+          </a:fontRef>
+        </p:style>
+        <p:txBody>
+          <a:bodyPr rtlCol="0" anchor="ctr" lIns="0" rIns="0" tIns="0" bIns="0"/>
+          <a:lstStyle/>
+          <a:p>
+            <a:pPr algn="ctr"/>
+            <a:r>
+              <a:rPr sz="1400" b="1">
+                <a:solidFill>
+                  <a:srgbClr val="FFFFFF"/>
+                </a:solidFill>
+                <a:latin typeface="Calibri"/>
+              </a:rPr>
+              <a:t>2</a:t>
+            </a:r>
+          </a:p>
+        </p:txBody>
+      </p:sp>
+      <p:sp>
+        <p:nvSpPr>
+          <p:cNvPr id="9" name="TextBox 8"/>
+          <p:cNvSpPr txBox="1"/>
+          <p:nvPr/>
+        </p:nvSpPr>
+        <p:spPr>
+          <a:xfrm>
+            <a:off x="1234440" y="2795778"/>
+            <a:ext cx="10408615" cy="1030986"/>
+          </a:xfrm>
+          <a:prstGeom prst="rect">
+            <a:avLst/>
+          </a:prstGeom>
+          <a:noFill/>
+        </p:spPr>
+        <p:txBody>
+          <a:bodyPr wrap="square" anchor="t" lIns="0" rIns="0" tIns="0" bIns="0"/>
+          <a:lstStyle/>
+          <a:p>
+            <a:pPr algn="l"/>
+            <a:r>
+              <a:rPr sz="1800" b="0" i="0">
+                <a:solidFill>
+                  <a:srgbClr val="54595D"/>
+                </a:solidFill>
+                <a:latin typeface="Calibri"/>
+              </a:rPr>
+              <a:t>What causes fatigue?</a:t>
+            </a:r>
+          </a:p>
+          <a:p>
+            <a:r>
+              <a:rPr sz="1800" b="1">
+                <a:solidFill>
+                  <a:srgbClr val="03306E"/>
+                </a:solidFill>
+                <a:latin typeface="Calibri"/>
+              </a:rPr>
+              <a:t>Repeated or cyclic loading.</a:t>
+            </a:r>
+          </a:p>
+        </p:txBody>
+      </p:sp>
+      <p:sp>
+        <p:nvSpPr>
+          <p:cNvPr id="10" name="Oval 9"/>
+          <p:cNvSpPr/>
+          <p:nvPr/>
+        </p:nvSpPr>
+        <p:spPr>
+          <a:xfrm>
+            <a:off x="548640" y="4009644"/>
+            <a:ext cx="411480" cy="411480"/>
+          </a:xfrm>
+          <a:prstGeom prst="ellipse">
+            <a:avLst/>
+          </a:prstGeom>
+          <a:solidFill>
+            <a:srgbClr val="E0463A"/>
+          </a:solidFill>
+          <a:ln>
+            <a:noFill/>
+          </a:ln>
+          <a:effectLst/>
+        </p:spPr>
+        <p:style>
+          <a:lnRef idx="1">
+            <a:schemeClr val="accent1"/>
+          </a:lnRef>
+          <a:fillRef idx="3">
+            <a:schemeClr val="accent1"/>
+          </a:fillRef>
+          <a:effectRef idx="2">
+            <a:schemeClr val="accent1"/>
+          </a:effectRef>
+          <a:fontRef idx="minor">
+            <a:schemeClr val="lt1"/>
+          </a:fontRef>
+        </p:style>
+        <p:txBody>
+          <a:bodyPr rtlCol="0" anchor="ctr" lIns="0" rIns="0" tIns="0" bIns="0"/>
+          <a:lstStyle/>
+          <a:p>
+            <a:pPr algn="ctr"/>
+            <a:r>
+              <a:rPr sz="1400" b="1">
+                <a:solidFill>
+                  <a:srgbClr val="FFFFFF"/>
+                </a:solidFill>
+                <a:latin typeface="Calibri"/>
+              </a:rPr>
+              <a:t>3</a:t>
+            </a:r>
+          </a:p>
+        </p:txBody>
+      </p:sp>
+      <p:sp>
+        <p:nvSpPr>
+          <p:cNvPr id="11" name="TextBox 10"/>
+          <p:cNvSpPr txBox="1"/>
+          <p:nvPr/>
+        </p:nvSpPr>
+        <p:spPr>
+          <a:xfrm>
+            <a:off x="1234440" y="3991356"/>
+            <a:ext cx="10408615" cy="1030986"/>
+          </a:xfrm>
+          <a:prstGeom prst="rect">
+            <a:avLst/>
+          </a:prstGeom>
+          <a:noFill/>
+        </p:spPr>
+        <p:txBody>
+          <a:bodyPr wrap="square" anchor="t" lIns="0" rIns="0" tIns="0" bIns="0"/>
+          <a:lstStyle/>
+          <a:p>
+            <a:pPr algn="l"/>
+            <a:r>
+              <a:rPr sz="1800" b="0" i="0">
+                <a:solidFill>
+                  <a:srgbClr val="54595D"/>
+                </a:solidFill>
+                <a:latin typeface="Calibri"/>
+              </a:rPr>
+              <a:t>Where does turbulent flow usually start on a blunt object?</a:t>
+            </a:r>
+          </a:p>
+          <a:p>
+            <a:r>
+              <a:rPr sz="1800" b="1">
+                <a:solidFill>
+                  <a:srgbClr val="03306E"/>
+                </a:solidFill>
+                <a:latin typeface="Calibri"/>
+              </a:rPr>
+              <a:t>At the separation point.</a:t>
+            </a:r>
+          </a:p>
+        </p:txBody>
+      </p:sp>
+      <p:sp>
+        <p:nvSpPr>
+          <p:cNvPr id="12" name="Oval 11"/>
+          <p:cNvSpPr/>
+          <p:nvPr/>
+        </p:nvSpPr>
+        <p:spPr>
+          <a:xfrm>
+            <a:off x="548640" y="5205221"/>
+            <a:ext cx="411480" cy="411480"/>
+          </a:xfrm>
+          <a:prstGeom prst="ellipse">
+            <a:avLst/>
+          </a:prstGeom>
+          <a:solidFill>
+            <a:srgbClr val="E0463A"/>
+          </a:solidFill>
+          <a:ln>
+            <a:noFill/>
+          </a:ln>
+          <a:effectLst/>
+        </p:spPr>
+        <p:style>
+          <a:lnRef idx="1">
+            <a:schemeClr val="accent1"/>
+          </a:lnRef>
+          <a:fillRef idx="3">
+            <a:schemeClr val="accent1"/>
+          </a:fillRef>
+          <a:effectRef idx="2">
+            <a:schemeClr val="accent1"/>
+          </a:effectRef>
+          <a:fontRef idx="minor">
+            <a:schemeClr val="lt1"/>
+          </a:fontRef>
+        </p:style>
+        <p:txBody>
+          <a:bodyPr rtlCol="0" anchor="ctr" lIns="0" rIns="0" tIns="0" bIns="0"/>
+          <a:lstStyle/>
+          <a:p>
+            <a:pPr algn="ctr"/>
+            <a:r>
+              <a:rPr sz="1400" b="1">
+                <a:solidFill>
+                  <a:srgbClr val="FFFFFF"/>
+                </a:solidFill>
+                <a:latin typeface="Calibri"/>
+              </a:rPr>
+              <a:t>4</a:t>
+            </a:r>
+          </a:p>
+        </p:txBody>
+      </p:sp>
+      <p:sp>
+        <p:nvSpPr>
+          <p:cNvPr id="13" name="TextBox 12"/>
+          <p:cNvSpPr txBox="1"/>
+          <p:nvPr/>
+        </p:nvSpPr>
+        <p:spPr>
+          <a:xfrm>
+            <a:off x="1234440" y="5186933"/>
+            <a:ext cx="10408615" cy="1030986"/>
+          </a:xfrm>
+          <a:prstGeom prst="rect">
+            <a:avLst/>
+          </a:prstGeom>
+          <a:noFill/>
+        </p:spPr>
+        <p:txBody>
+          <a:bodyPr wrap="square" anchor="t" lIns="0" rIns="0" tIns="0" bIns="0"/>
+          <a:lstStyle/>
+          <a:p>
+            <a:pPr algn="l"/>
+            <a:r>
+              <a:rPr sz="1800" b="0" i="0">
+                <a:solidFill>
+                  <a:srgbClr val="54595D"/>
+                </a:solidFill>
+                <a:latin typeface="Calibri"/>
+              </a:rPr>
+              <a:t>Why can vortices damage structures?</a:t>
+            </a:r>
+          </a:p>
+          <a:p>
+            <a:r>
+              <a:rPr sz="1800" b="1">
+                <a:solidFill>
+                  <a:srgbClr val="03306E"/>
+                </a:solidFill>
+                <a:latin typeface="Calibri"/>
+              </a:rPr>
+              <a:t>They create fluctuating forces that cause vibration and fatigue.</a:t>
+            </a:r>
+          </a:p>
+        </p:txBody>
+      </p:sp>
+    </p:spTree>
+  </p:cSld>
+  <p:clrMapOvr>
+    <a:masterClrMapping/>
+  </p:clrMapOvr>
+</p:sld>
+</file>
+
+<file path=ppt/slides/slide12.xml><?xml version="1.0" encoding="utf-8"?>
+<p:sld xmlns:a="http://schemas.openxmlformats.org/drawingml/2006/main" xmlns:p="http://schemas.openxmlformats.org/presentationml/2006/main" xmlns:r="http://schemas.openxmlformats.org/officeDocument/2006/relationships">
+  <p:cSld>
+    <p:bg>
+      <p:bgPr>
+        <a:solidFill>
+          <a:srgbClr val="FFFFFF"/>
+        </a:solidFill>
+        <a:effectLst/>
+      </p:bgPr>
+    </p:bg>
+    <p:spTree>
+      <p:nvGrpSpPr>
+        <p:cNvPr id="1" name=""/>
+        <p:cNvGrpSpPr/>
+        <p:nvPr/>
+      </p:nvGrpSpPr>
+      <p:grpSpPr/>
+      <p:sp>
+        <p:nvSpPr>
+          <p:cNvPr id="2" name="TextBox 1"/>
+          <p:cNvSpPr txBox="1"/>
+          <p:nvPr/>
+        </p:nvSpPr>
+        <p:spPr>
+          <a:xfrm>
+            <a:off x="548640" y="320040"/>
+            <a:ext cx="11094415" cy="274320"/>
+          </a:xfrm>
+          <a:prstGeom prst="rect">
+            <a:avLst/>
+          </a:prstGeom>
+          <a:noFill/>
+        </p:spPr>
+        <p:txBody>
+          <a:bodyPr wrap="square" anchor="t" lIns="0" rIns="0" tIns="0" bIns="0"/>
+          <a:lstStyle/>
+          <a:p>
+            <a:pPr algn="l"/>
+            <a:r>
+              <a:rPr sz="1100" b="1" i="0">
+                <a:solidFill>
+                  <a:srgbClr val="54595D"/>
+                </a:solidFill>
+                <a:latin typeface="Calibri"/>
+              </a:rPr>
+              <a:t>MECHANICAL ENGINEERING  ·  Mechanical: Knowledge criteria</a:t>
+            </a:r>
+          </a:p>
+        </p:txBody>
+      </p:sp>
+      <p:sp>
+        <p:nvSpPr>
+          <p:cNvPr id="3" name="TextBox 2"/>
+          <p:cNvSpPr txBox="1"/>
+          <p:nvPr/>
+        </p:nvSpPr>
+        <p:spPr>
+          <a:xfrm>
+            <a:off x="548640" y="566928"/>
+            <a:ext cx="11094415" cy="822960"/>
+          </a:xfrm>
+          <a:prstGeom prst="rect">
+            <a:avLst/>
+          </a:prstGeom>
+          <a:noFill/>
+        </p:spPr>
+        <p:txBody>
+          <a:bodyPr wrap="square" anchor="ctr" lIns="0" rIns="0" tIns="0" bIns="0"/>
+          <a:lstStyle/>
+          <a:p>
+            <a:pPr algn="l"/>
+            <a:r>
+              <a:rPr sz="3200" b="1" i="0">
+                <a:solidFill>
+                  <a:srgbClr val="03306E"/>
+                </a:solidFill>
+                <a:latin typeface="Cambria"/>
+              </a:rPr>
+              <a:t>Activity: Load a sign post</a:t>
+            </a:r>
+          </a:p>
+        </p:txBody>
+      </p:sp>
+      <p:sp>
+        <p:nvSpPr>
+          <p:cNvPr id="4" name="TextBox 3"/>
+          <p:cNvSpPr txBox="1"/>
+          <p:nvPr/>
+        </p:nvSpPr>
+        <p:spPr>
+          <a:xfrm>
+            <a:off x="548640" y="6446520"/>
+            <a:ext cx="8229600" cy="274320"/>
+          </a:xfrm>
+          <a:prstGeom prst="rect">
+            <a:avLst/>
+          </a:prstGeom>
+          <a:noFill/>
+        </p:spPr>
+        <p:txBody>
+          <a:bodyPr wrap="square" anchor="t" lIns="0" rIns="0" tIns="0" bIns="0"/>
+          <a:lstStyle/>
+          <a:p>
+            <a:pPr algn="l"/>
+            <a:r>
+              <a:rPr sz="1000" b="0" i="0">
+                <a:solidFill>
+                  <a:srgbClr val="54595D"/>
+                </a:solidFill>
+                <a:latin typeface="Calibri"/>
+              </a:rPr>
+              <a:t>Design and Development for Engineering and Manufacturing T Level  ·  Loads, Environment and Aerodynamics in Design</a:t>
+            </a:r>
+          </a:p>
+        </p:txBody>
+      </p:sp>
+      <p:sp>
+        <p:nvSpPr>
+          <p:cNvPr id="5" name="TextBox 4"/>
+          <p:cNvSpPr txBox="1"/>
+          <p:nvPr/>
+        </p:nvSpPr>
+        <p:spPr>
+          <a:xfrm>
+            <a:off x="10728655" y="6446520"/>
+            <a:ext cx="914400" cy="274320"/>
+          </a:xfrm>
+          <a:prstGeom prst="rect">
+            <a:avLst/>
+          </a:prstGeom>
+          <a:noFill/>
+        </p:spPr>
+        <p:txBody>
+          <a:bodyPr wrap="square" anchor="t" lIns="0" rIns="0" tIns="0" bIns="0"/>
+          <a:lstStyle/>
+          <a:p>
+            <a:pPr algn="r"/>
+            <a:r>
+              <a:rPr sz="1000" b="0" i="0">
+                <a:solidFill>
+                  <a:srgbClr val="54595D"/>
+                </a:solidFill>
+                <a:latin typeface="Calibri"/>
+              </a:rPr>
+              <a:t>12</a:t>
+            </a:r>
+          </a:p>
+        </p:txBody>
+      </p:sp>
+      <p:sp>
+        <p:nvSpPr>
+          <p:cNvPr id="6" name="Rounded Rectangle 5"/>
+          <p:cNvSpPr/>
+          <p:nvPr/>
+        </p:nvSpPr>
+        <p:spPr>
+          <a:xfrm>
+            <a:off x="548640" y="1508760"/>
+            <a:ext cx="2011680" cy="457200"/>
+          </a:xfrm>
+          <a:prstGeom prst="roundRect">
+            <a:avLst>
+              <a:gd name="adj" fmla="val 50000"/>
+            </a:avLst>
+          </a:prstGeom>
+          <a:solidFill>
+            <a:srgbClr val="E0463A"/>
+          </a:solidFill>
+          <a:ln>
+            <a:noFill/>
+          </a:ln>
+          <a:effectLst/>
+        </p:spPr>
+        <p:style>
+          <a:lnRef idx="1">
+            <a:schemeClr val="accent1"/>
+          </a:lnRef>
+          <a:fillRef idx="3">
+            <a:schemeClr val="accent1"/>
+          </a:fillRef>
+          <a:effectRef idx="2">
+            <a:schemeClr val="accent1"/>
+          </a:effectRef>
+          <a:fontRef idx="minor">
+            <a:schemeClr val="lt1"/>
+          </a:fontRef>
+        </p:style>
+        <p:txBody>
+          <a:bodyPr rtlCol="0" anchor="ctr"/>
+          <a:lstStyle/>
+          <a:p/>
+        </p:txBody>
+      </p:sp>
+      <p:sp>
+        <p:nvSpPr>
+          <p:cNvPr id="7" name="TextBox 6"/>
+          <p:cNvSpPr txBox="1"/>
+          <p:nvPr/>
+        </p:nvSpPr>
+        <p:spPr>
+          <a:xfrm>
+            <a:off x="548640" y="1508760"/>
+            <a:ext cx="2011680" cy="457200"/>
+          </a:xfrm>
+          <a:prstGeom prst="rect">
+            <a:avLst/>
+          </a:prstGeom>
+          <a:noFill/>
+        </p:spPr>
+        <p:txBody>
+          <a:bodyPr wrap="square" anchor="ctr" lIns="0" rIns="0" tIns="0" bIns="0"/>
+          <a:lstStyle/>
+          <a:p>
+            <a:pPr algn="ctr"/>
+            <a:r>
+              <a:rPr sz="1400" b="1" i="0">
+                <a:solidFill>
+                  <a:srgbClr val="FFFFFF"/>
+                </a:solidFill>
+                <a:latin typeface="Calibri"/>
+              </a:rPr>
+              <a:t>25 minutes</a:t>
+            </a:r>
+          </a:p>
+        </p:txBody>
+      </p:sp>
+      <p:sp>
+        <p:nvSpPr>
+          <p:cNvPr id="8" name="TextBox 7"/>
+          <p:cNvSpPr txBox="1"/>
+          <p:nvPr/>
+        </p:nvSpPr>
+        <p:spPr>
+          <a:xfrm>
+            <a:off x="2743200" y="1508760"/>
+            <a:ext cx="4754880" cy="457200"/>
+          </a:xfrm>
+          <a:prstGeom prst="rect">
+            <a:avLst/>
+          </a:prstGeom>
+          <a:noFill/>
+        </p:spPr>
+        <p:txBody>
+          <a:bodyPr wrap="square" anchor="ctr" lIns="0" rIns="0" tIns="0" bIns="0"/>
+          <a:lstStyle/>
+          <a:p>
+            <a:pPr algn="l"/>
+            <a:r>
+              <a:rPr sz="1400" b="0" i="1">
+                <a:solidFill>
+                  <a:srgbClr val="54595D"/>
+                </a:solidFill>
+                <a:latin typeface="Calibri"/>
+              </a:rPr>
+              <a:t>Pairs</a:t>
+            </a:r>
+          </a:p>
+        </p:txBody>
+      </p:sp>
+      <p:sp>
+        <p:nvSpPr>
+          <p:cNvPr id="9" name="Oval 8"/>
+          <p:cNvSpPr/>
+          <p:nvPr/>
+        </p:nvSpPr>
+        <p:spPr>
+          <a:xfrm>
+            <a:off x="548640" y="2482596"/>
+            <a:ext cx="384048" cy="384048"/>
+          </a:xfrm>
+          <a:prstGeom prst="ellipse">
+            <a:avLst/>
+          </a:prstGeom>
+          <a:solidFill>
+            <a:srgbClr val="0645AD"/>
+          </a:solidFill>
+          <a:ln>
+            <a:noFill/>
+          </a:ln>
+          <a:effectLst/>
+        </p:spPr>
+        <p:style>
+          <a:lnRef idx="1">
+            <a:schemeClr val="accent1"/>
+          </a:lnRef>
+          <a:fillRef idx="3">
+            <a:schemeClr val="accent1"/>
+          </a:fillRef>
+          <a:effectRef idx="2">
+            <a:schemeClr val="accent1"/>
+          </a:effectRef>
+          <a:fontRef idx="minor">
+            <a:schemeClr val="lt1"/>
+          </a:fontRef>
+        </p:style>
+        <p:txBody>
+          <a:bodyPr rtlCol="0" anchor="ctr" lIns="0" rIns="0" tIns="0" bIns="0"/>
+          <a:lstStyle/>
+          <a:p>
+            <a:pPr algn="ctr"/>
+            <a:r>
+              <a:rPr sz="1300" b="1">
+                <a:solidFill>
+                  <a:srgbClr val="FFFFFF"/>
+                </a:solidFill>
+                <a:latin typeface="Calibri"/>
+              </a:rPr>
+              <a:t>1</a:t>
+            </a:r>
+          </a:p>
+        </p:txBody>
+      </p:sp>
+      <p:sp>
+        <p:nvSpPr>
+          <p:cNvPr id="10" name="TextBox 9"/>
+          <p:cNvSpPr txBox="1"/>
+          <p:nvPr/>
+        </p:nvSpPr>
+        <p:spPr>
+          <a:xfrm>
+            <a:off x="1143000" y="2240280"/>
+            <a:ext cx="5943600" cy="868680"/>
+          </a:xfrm>
+          <a:prstGeom prst="rect">
+            <a:avLst/>
+          </a:prstGeom>
+          <a:noFill/>
+        </p:spPr>
+        <p:txBody>
+          <a:bodyPr wrap="square" anchor="ctr" lIns="0" rIns="0" tIns="0" bIns="0"/>
+          <a:lstStyle/>
+          <a:p>
+            <a:pPr algn="l"/>
+            <a:r>
+              <a:rPr sz="1700" b="0" i="0">
+                <a:solidFill>
+                  <a:srgbClr val="202122"/>
+                </a:solidFill>
+                <a:latin typeface="Calibri"/>
+              </a:rPr>
+              <a:t>A road sign on a post faces strong winds by the sea.</a:t>
+            </a:r>
+          </a:p>
+        </p:txBody>
+      </p:sp>
+      <p:sp>
+        <p:nvSpPr>
+          <p:cNvPr id="11" name="Oval 10"/>
+          <p:cNvSpPr/>
+          <p:nvPr/>
+        </p:nvSpPr>
+        <p:spPr>
+          <a:xfrm>
+            <a:off x="548640" y="3461004"/>
+            <a:ext cx="384048" cy="384048"/>
+          </a:xfrm>
+          <a:prstGeom prst="ellipse">
+            <a:avLst/>
+          </a:prstGeom>
+          <a:solidFill>
+            <a:srgbClr val="0645AD"/>
+          </a:solidFill>
+          <a:ln>
+            <a:noFill/>
+          </a:ln>
+          <a:effectLst/>
+        </p:spPr>
+        <p:style>
+          <a:lnRef idx="1">
+            <a:schemeClr val="accent1"/>
+          </a:lnRef>
+          <a:fillRef idx="3">
+            <a:schemeClr val="accent1"/>
+          </a:fillRef>
+          <a:effectRef idx="2">
+            <a:schemeClr val="accent1"/>
+          </a:effectRef>
+          <a:fontRef idx="minor">
+            <a:schemeClr val="lt1"/>
+          </a:fontRef>
+        </p:style>
+        <p:txBody>
+          <a:bodyPr rtlCol="0" anchor="ctr" lIns="0" rIns="0" tIns="0" bIns="0"/>
+          <a:lstStyle/>
+          <a:p>
+            <a:pPr algn="ctr"/>
+            <a:r>
+              <a:rPr sz="1300" b="1">
+                <a:solidFill>
+                  <a:srgbClr val="FFFFFF"/>
+                </a:solidFill>
+                <a:latin typeface="Calibri"/>
+              </a:rPr>
+              <a:t>2</a:t>
+            </a:r>
+          </a:p>
+        </p:txBody>
+      </p:sp>
+      <p:sp>
+        <p:nvSpPr>
+          <p:cNvPr id="12" name="TextBox 11"/>
+          <p:cNvSpPr txBox="1"/>
+          <p:nvPr/>
+        </p:nvSpPr>
+        <p:spPr>
+          <a:xfrm>
+            <a:off x="1143000" y="3218688"/>
+            <a:ext cx="5943600" cy="868680"/>
+          </a:xfrm>
+          <a:prstGeom prst="rect">
+            <a:avLst/>
+          </a:prstGeom>
+          <a:noFill/>
+        </p:spPr>
+        <p:txBody>
+          <a:bodyPr wrap="square" anchor="ctr" lIns="0" rIns="0" tIns="0" bIns="0"/>
+          <a:lstStyle/>
+          <a:p>
+            <a:pPr algn="l"/>
+            <a:r>
+              <a:rPr sz="1700" b="0" i="0">
+                <a:solidFill>
+                  <a:srgbClr val="202122"/>
+                </a:solidFill>
+                <a:latin typeface="Calibri"/>
+              </a:rPr>
+              <a:t>Identify every load acting on it.</a:t>
+            </a:r>
+          </a:p>
+        </p:txBody>
+      </p:sp>
+      <p:sp>
+        <p:nvSpPr>
+          <p:cNvPr id="13" name="Oval 12"/>
+          <p:cNvSpPr/>
+          <p:nvPr/>
+        </p:nvSpPr>
+        <p:spPr>
+          <a:xfrm>
+            <a:off x="548640" y="4439412"/>
+            <a:ext cx="384048" cy="384048"/>
+          </a:xfrm>
+          <a:prstGeom prst="ellipse">
+            <a:avLst/>
+          </a:prstGeom>
+          <a:solidFill>
+            <a:srgbClr val="0645AD"/>
+          </a:solidFill>
+          <a:ln>
+            <a:noFill/>
+          </a:ln>
+          <a:effectLst/>
+        </p:spPr>
+        <p:style>
+          <a:lnRef idx="1">
+            <a:schemeClr val="accent1"/>
+          </a:lnRef>
+          <a:fillRef idx="3">
+            <a:schemeClr val="accent1"/>
+          </a:fillRef>
+          <a:effectRef idx="2">
+            <a:schemeClr val="accent1"/>
+          </a:effectRef>
+          <a:fontRef idx="minor">
+            <a:schemeClr val="lt1"/>
+          </a:fontRef>
+        </p:style>
+        <p:txBody>
+          <a:bodyPr rtlCol="0" anchor="ctr" lIns="0" rIns="0" tIns="0" bIns="0"/>
+          <a:lstStyle/>
+          <a:p>
+            <a:pPr algn="ctr"/>
+            <a:r>
+              <a:rPr sz="1300" b="1">
+                <a:solidFill>
+                  <a:srgbClr val="FFFFFF"/>
+                </a:solidFill>
+                <a:latin typeface="Calibri"/>
+              </a:rPr>
+              <a:t>3</a:t>
+            </a:r>
+          </a:p>
+        </p:txBody>
+      </p:sp>
+      <p:sp>
+        <p:nvSpPr>
+          <p:cNvPr id="14" name="TextBox 13"/>
+          <p:cNvSpPr txBox="1"/>
+          <p:nvPr/>
+        </p:nvSpPr>
+        <p:spPr>
+          <a:xfrm>
+            <a:off x="1143000" y="4197096"/>
+            <a:ext cx="5943600" cy="868680"/>
+          </a:xfrm>
+          <a:prstGeom prst="rect">
+            <a:avLst/>
+          </a:prstGeom>
+          <a:noFill/>
+        </p:spPr>
+        <p:txBody>
+          <a:bodyPr wrap="square" anchor="ctr" lIns="0" rIns="0" tIns="0" bIns="0"/>
+          <a:lstStyle/>
+          <a:p>
+            <a:pPr algn="l"/>
+            <a:r>
+              <a:rPr sz="1700" b="0" i="0">
+                <a:solidFill>
+                  <a:srgbClr val="202122"/>
+                </a:solidFill>
+                <a:latin typeface="Calibri"/>
+              </a:rPr>
+              <a:t>Identify the environmental conditions and their effects.</a:t>
+            </a:r>
+          </a:p>
+        </p:txBody>
+      </p:sp>
+      <p:sp>
+        <p:nvSpPr>
+          <p:cNvPr id="15" name="Oval 14"/>
+          <p:cNvSpPr/>
+          <p:nvPr/>
+        </p:nvSpPr>
+        <p:spPr>
+          <a:xfrm>
+            <a:off x="548640" y="5417820"/>
+            <a:ext cx="384048" cy="384048"/>
+          </a:xfrm>
+          <a:prstGeom prst="ellipse">
+            <a:avLst/>
+          </a:prstGeom>
+          <a:solidFill>
+            <a:srgbClr val="0645AD"/>
+          </a:solidFill>
+          <a:ln>
+            <a:noFill/>
+          </a:ln>
+          <a:effectLst/>
+        </p:spPr>
+        <p:style>
+          <a:lnRef idx="1">
+            <a:schemeClr val="accent1"/>
+          </a:lnRef>
+          <a:fillRef idx="3">
+            <a:schemeClr val="accent1"/>
+          </a:fillRef>
+          <a:effectRef idx="2">
+            <a:schemeClr val="accent1"/>
+          </a:effectRef>
+          <a:fontRef idx="minor">
+            <a:schemeClr val="lt1"/>
+          </a:fontRef>
+        </p:style>
+        <p:txBody>
+          <a:bodyPr rtlCol="0" anchor="ctr" lIns="0" rIns="0" tIns="0" bIns="0"/>
+          <a:lstStyle/>
+          <a:p>
+            <a:pPr algn="ctr"/>
+            <a:r>
+              <a:rPr sz="1300" b="1">
+                <a:solidFill>
+                  <a:srgbClr val="FFFFFF"/>
+                </a:solidFill>
+                <a:latin typeface="Calibri"/>
+              </a:rPr>
+              <a:t>4</a:t>
+            </a:r>
+          </a:p>
+        </p:txBody>
+      </p:sp>
+      <p:sp>
+        <p:nvSpPr>
+          <p:cNvPr id="16" name="TextBox 15"/>
+          <p:cNvSpPr txBox="1"/>
+          <p:nvPr/>
+        </p:nvSpPr>
+        <p:spPr>
+          <a:xfrm>
+            <a:off x="1143000" y="5175504"/>
+            <a:ext cx="5943600" cy="868680"/>
+          </a:xfrm>
+          <a:prstGeom prst="rect">
+            <a:avLst/>
+          </a:prstGeom>
+          <a:noFill/>
+        </p:spPr>
+        <p:txBody>
+          <a:bodyPr wrap="square" anchor="ctr" lIns="0" rIns="0" tIns="0" bIns="0"/>
+          <a:lstStyle/>
+          <a:p>
+            <a:pPr algn="l"/>
+            <a:r>
+              <a:rPr sz="1700" b="0" i="0">
+                <a:solidFill>
+                  <a:srgbClr val="202122"/>
+                </a:solidFill>
+                <a:latin typeface="Calibri"/>
+              </a:rPr>
+              <a:t>Suggest two design changes to cope.</a:t>
+            </a:r>
+          </a:p>
+        </p:txBody>
+      </p:sp>
+      <p:sp>
+        <p:nvSpPr>
+          <p:cNvPr id="17" name="Rounded Rectangle 16"/>
+          <p:cNvSpPr/>
+          <p:nvPr/>
+        </p:nvSpPr>
+        <p:spPr>
+          <a:xfrm>
+            <a:off x="7772400" y="1508760"/>
+            <a:ext cx="3867912" cy="4572000"/>
+          </a:xfrm>
+          <a:prstGeom prst="roundRect">
+            <a:avLst>
+              <a:gd name="adj" fmla="val 8000"/>
+            </a:avLst>
+          </a:prstGeom>
+          <a:solidFill>
+            <a:srgbClr val="EAF3FF"/>
+          </a:solidFill>
+          <a:ln>
+            <a:noFill/>
+          </a:ln>
+          <a:effectLst/>
+        </p:spPr>
+        <p:style>
+          <a:lnRef idx="1">
+            <a:schemeClr val="accent1"/>
+          </a:lnRef>
+          <a:fillRef idx="3">
+            <a:schemeClr val="accent1"/>
+          </a:fillRef>
+          <a:effectRef idx="2">
+            <a:schemeClr val="accent1"/>
+          </a:effectRef>
+          <a:fontRef idx="minor">
+            <a:schemeClr val="lt1"/>
+          </a:fontRef>
+        </p:style>
+        <p:txBody>
+          <a:bodyPr rtlCol="0" anchor="ctr"/>
+          <a:lstStyle/>
+          <a:p/>
+        </p:txBody>
+      </p:sp>
+      <p:sp>
+        <p:nvSpPr>
+          <p:cNvPr id="18" name="TextBox 17"/>
+          <p:cNvSpPr txBox="1"/>
+          <p:nvPr/>
+        </p:nvSpPr>
+        <p:spPr>
+          <a:xfrm>
+            <a:off x="8046720" y="1737360"/>
+            <a:ext cx="3291840" cy="365760"/>
+          </a:xfrm>
+          <a:prstGeom prst="rect">
+            <a:avLst/>
+          </a:prstGeom>
+          <a:noFill/>
+        </p:spPr>
+        <p:txBody>
+          <a:bodyPr wrap="square" anchor="t" lIns="0" rIns="0" tIns="0" bIns="0"/>
+          <a:lstStyle/>
+          <a:p>
+            <a:pPr algn="l"/>
+            <a:r>
+              <a:rPr sz="1300" b="1" i="0">
+                <a:solidFill>
+                  <a:srgbClr val="0645AD"/>
+                </a:solidFill>
+                <a:latin typeface="Calibri"/>
+              </a:rPr>
+              <a:t>SUCCESS CRITERIA</a:t>
+            </a:r>
+          </a:p>
+        </p:txBody>
+      </p:sp>
+      <p:sp>
+        <p:nvSpPr>
+          <p:cNvPr id="19" name="TextBox 18"/>
+          <p:cNvSpPr txBox="1"/>
+          <p:nvPr/>
+        </p:nvSpPr>
+        <p:spPr>
+          <a:xfrm>
+            <a:off x="8046720" y="2240280"/>
+            <a:ext cx="3337560" cy="3657600"/>
+          </a:xfrm>
+          <a:prstGeom prst="rect">
+            <a:avLst/>
+          </a:prstGeom>
+          <a:noFill/>
+        </p:spPr>
+        <p:txBody>
+          <a:bodyPr wrap="square" lIns="0" rIns="0" tIns="0" bIns="0">
+            <a:spAutoFit/>
+          </a:bodyPr>
+          <a:lstStyle/>
+          <a:p>
+            <a:pPr marL="274320" indent="-274320">
+              <a:spcAft>
+                <a:spcPts val="810"/>
+              </a:spcAft>
+              <a:buClr>
+                <a:srgbClr val="0645AD"/>
+              </a:buClr>
+              <a:buFont typeface="Arial"/>
+              <a:buChar char="•"/>
+            </a:pPr>
+            <a:r>
+              <a:rPr sz="1800" b="0">
+                <a:solidFill>
+                  <a:srgbClr val="202122"/>
+                </a:solidFill>
+                <a:latin typeface="Calibri"/>
+              </a:rPr>
+              <a:t>Wind, weight and fatigue loads identified</a:t>
+            </a:r>
+          </a:p>
+          <a:p>
+            <a:pPr marL="274320" indent="-274320">
+              <a:spcAft>
+                <a:spcPts val="810"/>
+              </a:spcAft>
+              <a:buClr>
+                <a:srgbClr val="0645AD"/>
+              </a:buClr>
+              <a:buFont typeface="Arial"/>
+              <a:buChar char="•"/>
+            </a:pPr>
+            <a:r>
+              <a:rPr sz="1800" b="0">
+                <a:solidFill>
+                  <a:srgbClr val="202122"/>
+                </a:solidFill>
+                <a:latin typeface="Calibri"/>
+              </a:rPr>
+              <a:t>Corrosion considered</a:t>
+            </a:r>
+          </a:p>
+          <a:p>
+            <a:pPr marL="274320" indent="-274320">
+              <a:spcAft>
+                <a:spcPts val="810"/>
+              </a:spcAft>
+              <a:buClr>
+                <a:srgbClr val="0645AD"/>
+              </a:buClr>
+              <a:buFont typeface="Arial"/>
+              <a:buChar char="•"/>
+            </a:pPr>
+            <a:r>
+              <a:rPr sz="1800" b="0">
+                <a:solidFill>
+                  <a:srgbClr val="202122"/>
+                </a:solidFill>
+                <a:latin typeface="Calibri"/>
+              </a:rPr>
+              <a:t>Changes justified</a:t>
+            </a:r>
+          </a:p>
+        </p:txBody>
+      </p:sp>
+    </p:spTree>
+  </p:cSld>
+  <p:clrMapOvr>
+    <a:masterClrMapping/>
+  </p:clrMapOvr>
+</p:sld>
+</file>
+
+<file path=ppt/slides/slide13.xml><?xml version="1.0" encoding="utf-8"?>
+<p:sld xmlns:a="http://schemas.openxmlformats.org/drawingml/2006/main" xmlns:p="http://schemas.openxmlformats.org/presentationml/2006/main" xmlns:r="http://schemas.openxmlformats.org/officeDocument/2006/relationships">
+  <p:cSld>
+    <p:bg>
+      <p:bgPr>
+        <a:solidFill>
+          <a:srgbClr val="03306E"/>
+        </a:solidFill>
+        <a:effectLst/>
+      </p:bgPr>
+    </p:bg>
+    <p:spTree>
+      <p:nvGrpSpPr>
+        <p:cNvPr id="1" name=""/>
+        <p:cNvGrpSpPr/>
+        <p:nvPr/>
+      </p:nvGrpSpPr>
+      <p:grpSpPr/>
+      <p:sp>
+        <p:nvSpPr>
+          <p:cNvPr id="2" name="TextBox 1"/>
+          <p:cNvSpPr txBox="1"/>
+          <p:nvPr/>
+        </p:nvSpPr>
+        <p:spPr>
+          <a:xfrm>
+            <a:off x="548640" y="320040"/>
+            <a:ext cx="11094415" cy="274320"/>
+          </a:xfrm>
+          <a:prstGeom prst="rect">
+            <a:avLst/>
+          </a:prstGeom>
+          <a:noFill/>
+        </p:spPr>
+        <p:txBody>
+          <a:bodyPr wrap="square" anchor="t" lIns="0" rIns="0" tIns="0" bIns="0"/>
+          <a:lstStyle/>
+          <a:p>
+            <a:pPr algn="l"/>
+            <a:r>
+              <a:rPr sz="1100" b="1" i="0">
+                <a:solidFill>
+                  <a:srgbClr val="A9C8F0"/>
+                </a:solidFill>
+                <a:latin typeface="Calibri"/>
+              </a:rPr>
+              <a:t>MECHANICAL ENGINEERING  ·  Mechanical: Knowledge criteria</a:t>
+            </a:r>
+          </a:p>
+        </p:txBody>
+      </p:sp>
+      <p:sp>
+        <p:nvSpPr>
+          <p:cNvPr id="3" name="TextBox 2"/>
+          <p:cNvSpPr txBox="1"/>
+          <p:nvPr/>
+        </p:nvSpPr>
+        <p:spPr>
+          <a:xfrm>
+            <a:off x="548640" y="566928"/>
+            <a:ext cx="11094415" cy="822960"/>
+          </a:xfrm>
+          <a:prstGeom prst="rect">
+            <a:avLst/>
+          </a:prstGeom>
+          <a:noFill/>
+        </p:spPr>
+        <p:txBody>
+          <a:bodyPr wrap="square" anchor="ctr" lIns="0" rIns="0" tIns="0" bIns="0"/>
+          <a:lstStyle/>
+          <a:p>
+            <a:pPr algn="l"/>
+            <a:r>
+              <a:rPr sz="3200" b="1" i="0">
+                <a:solidFill>
+                  <a:srgbClr val="FFFFFF"/>
+                </a:solidFill>
+                <a:latin typeface="Cambria"/>
+              </a:rPr>
+              <a:t>Exit ticket</a:t>
+            </a:r>
+          </a:p>
+        </p:txBody>
+      </p:sp>
+      <p:sp>
+        <p:nvSpPr>
+          <p:cNvPr id="4" name="Oval 3"/>
+          <p:cNvSpPr/>
+          <p:nvPr/>
+        </p:nvSpPr>
+        <p:spPr>
+          <a:xfrm>
+            <a:off x="548640" y="1737360"/>
+            <a:ext cx="502920" cy="502920"/>
+          </a:xfrm>
+          <a:prstGeom prst="ellipse">
+            <a:avLst/>
+          </a:prstGeom>
+          <a:solidFill>
+            <a:srgbClr val="E0463A"/>
+          </a:solidFill>
+          <a:ln>
+            <a:noFill/>
+          </a:ln>
+          <a:effectLst/>
+        </p:spPr>
+        <p:style>
+          <a:lnRef idx="1">
+            <a:schemeClr val="accent1"/>
+          </a:lnRef>
+          <a:fillRef idx="3">
+            <a:schemeClr val="accent1"/>
+          </a:fillRef>
+          <a:effectRef idx="2">
+            <a:schemeClr val="accent1"/>
+          </a:effectRef>
+          <a:fontRef idx="minor">
+            <a:schemeClr val="lt1"/>
+          </a:fontRef>
+        </p:style>
+        <p:txBody>
+          <a:bodyPr rtlCol="0" anchor="ctr" lIns="0" rIns="0" tIns="0" bIns="0"/>
+          <a:lstStyle/>
+          <a:p>
+            <a:pPr algn="ctr"/>
+            <a:r>
+              <a:rPr sz="1700" b="1">
+                <a:solidFill>
+                  <a:srgbClr val="FFFFFF"/>
+                </a:solidFill>
+                <a:latin typeface="Calibri"/>
+              </a:rPr>
+              <a:t>1</a:t>
+            </a:r>
+          </a:p>
+        </p:txBody>
+      </p:sp>
+      <p:sp>
+        <p:nvSpPr>
+          <p:cNvPr id="5" name="TextBox 4"/>
+          <p:cNvSpPr txBox="1"/>
+          <p:nvPr/>
+        </p:nvSpPr>
+        <p:spPr>
+          <a:xfrm>
+            <a:off x="1325880" y="1645920"/>
+            <a:ext cx="6583680" cy="822960"/>
+          </a:xfrm>
+          <a:prstGeom prst="rect">
+            <a:avLst/>
+          </a:prstGeom>
+          <a:noFill/>
+        </p:spPr>
+        <p:txBody>
+          <a:bodyPr wrap="square" anchor="ctr" lIns="0" rIns="0" tIns="0" bIns="0"/>
+          <a:lstStyle/>
+          <a:p>
+            <a:pPr algn="l"/>
+            <a:r>
+              <a:rPr sz="2000" b="0" i="0">
+                <a:solidFill>
+                  <a:srgbClr val="FFFFFF"/>
+                </a:solidFill>
+                <a:latin typeface="Calibri"/>
+              </a:rPr>
+              <a:t>Give an example of a dynamic load.</a:t>
+            </a:r>
+          </a:p>
+        </p:txBody>
+      </p:sp>
+      <p:sp>
+        <p:nvSpPr>
+          <p:cNvPr id="6" name="Oval 5"/>
+          <p:cNvSpPr/>
+          <p:nvPr/>
+        </p:nvSpPr>
+        <p:spPr>
+          <a:xfrm>
+            <a:off x="548640" y="2697480"/>
+            <a:ext cx="502920" cy="502920"/>
+          </a:xfrm>
+          <a:prstGeom prst="ellipse">
+            <a:avLst/>
+          </a:prstGeom>
+          <a:solidFill>
+            <a:srgbClr val="E0463A"/>
+          </a:solidFill>
+          <a:ln>
+            <a:noFill/>
+          </a:ln>
+          <a:effectLst/>
+        </p:spPr>
+        <p:style>
+          <a:lnRef idx="1">
+            <a:schemeClr val="accent1"/>
+          </a:lnRef>
+          <a:fillRef idx="3">
+            <a:schemeClr val="accent1"/>
+          </a:fillRef>
+          <a:effectRef idx="2">
+            <a:schemeClr val="accent1"/>
+          </a:effectRef>
+          <a:fontRef idx="minor">
+            <a:schemeClr val="lt1"/>
+          </a:fontRef>
+        </p:style>
+        <p:txBody>
+          <a:bodyPr rtlCol="0" anchor="ctr" lIns="0" rIns="0" tIns="0" bIns="0"/>
+          <a:lstStyle/>
+          <a:p>
+            <a:pPr algn="ctr"/>
+            <a:r>
+              <a:rPr sz="1700" b="1">
+                <a:solidFill>
+                  <a:srgbClr val="FFFFFF"/>
+                </a:solidFill>
+                <a:latin typeface="Calibri"/>
+              </a:rPr>
+              <a:t>2</a:t>
+            </a:r>
+          </a:p>
+        </p:txBody>
+      </p:sp>
+      <p:sp>
+        <p:nvSpPr>
+          <p:cNvPr id="7" name="TextBox 6"/>
+          <p:cNvSpPr txBox="1"/>
+          <p:nvPr/>
+        </p:nvSpPr>
+        <p:spPr>
+          <a:xfrm>
+            <a:off x="1325880" y="2606040"/>
+            <a:ext cx="6583680" cy="822960"/>
+          </a:xfrm>
+          <a:prstGeom prst="rect">
+            <a:avLst/>
+          </a:prstGeom>
+          <a:noFill/>
+        </p:spPr>
+        <p:txBody>
+          <a:bodyPr wrap="square" anchor="ctr" lIns="0" rIns="0" tIns="0" bIns="0"/>
+          <a:lstStyle/>
+          <a:p>
+            <a:pPr algn="l"/>
+            <a:r>
+              <a:rPr sz="2000" b="0" i="0">
+                <a:solidFill>
+                  <a:srgbClr val="FFFFFF"/>
+                </a:solidFill>
+                <a:latin typeface="Calibri"/>
+              </a:rPr>
+              <a:t>How does temperature affect a polymer?</a:t>
+            </a:r>
+          </a:p>
+        </p:txBody>
+      </p:sp>
+      <p:sp>
+        <p:nvSpPr>
+          <p:cNvPr id="8" name="Oval 7"/>
+          <p:cNvSpPr/>
+          <p:nvPr/>
+        </p:nvSpPr>
+        <p:spPr>
+          <a:xfrm>
+            <a:off x="548640" y="3657600"/>
+            <a:ext cx="502920" cy="502920"/>
+          </a:xfrm>
+          <a:prstGeom prst="ellipse">
+            <a:avLst/>
+          </a:prstGeom>
+          <a:solidFill>
+            <a:srgbClr val="E0463A"/>
+          </a:solidFill>
+          <a:ln>
+            <a:noFill/>
+          </a:ln>
+          <a:effectLst/>
+        </p:spPr>
+        <p:style>
+          <a:lnRef idx="1">
+            <a:schemeClr val="accent1"/>
+          </a:lnRef>
+          <a:fillRef idx="3">
+            <a:schemeClr val="accent1"/>
+          </a:fillRef>
+          <a:effectRef idx="2">
+            <a:schemeClr val="accent1"/>
+          </a:effectRef>
+          <a:fontRef idx="minor">
+            <a:schemeClr val="lt1"/>
+          </a:fontRef>
+        </p:style>
+        <p:txBody>
+          <a:bodyPr rtlCol="0" anchor="ctr" lIns="0" rIns="0" tIns="0" bIns="0"/>
+          <a:lstStyle/>
+          <a:p>
+            <a:pPr algn="ctr"/>
+            <a:r>
+              <a:rPr sz="1700" b="1">
+                <a:solidFill>
+                  <a:srgbClr val="FFFFFF"/>
+                </a:solidFill>
+                <a:latin typeface="Calibri"/>
+              </a:rPr>
+              <a:t>3</a:t>
+            </a:r>
+          </a:p>
+        </p:txBody>
+      </p:sp>
+      <p:sp>
+        <p:nvSpPr>
+          <p:cNvPr id="9" name="TextBox 8"/>
+          <p:cNvSpPr txBox="1"/>
+          <p:nvPr/>
+        </p:nvSpPr>
+        <p:spPr>
+          <a:xfrm>
+            <a:off x="1325880" y="3566160"/>
+            <a:ext cx="6583680" cy="822960"/>
+          </a:xfrm>
+          <a:prstGeom prst="rect">
+            <a:avLst/>
+          </a:prstGeom>
+          <a:noFill/>
+        </p:spPr>
+        <p:txBody>
+          <a:bodyPr wrap="square" anchor="ctr" lIns="0" rIns="0" tIns="0" bIns="0"/>
+          <a:lstStyle/>
+          <a:p>
+            <a:pPr algn="l"/>
+            <a:r>
+              <a:rPr sz="2000" b="0" i="0">
+                <a:solidFill>
+                  <a:srgbClr val="FFFFFF"/>
+                </a:solidFill>
+                <a:latin typeface="Calibri"/>
+              </a:rPr>
+              <a:t>Why do racing cars have wings?</a:t>
+            </a:r>
+          </a:p>
+        </p:txBody>
+      </p:sp>
+      <p:sp>
+        <p:nvSpPr>
+          <p:cNvPr id="10" name="Rounded Rectangle 9"/>
+          <p:cNvSpPr/>
+          <p:nvPr/>
+        </p:nvSpPr>
+        <p:spPr>
+          <a:xfrm>
+            <a:off x="8229600" y="1645920"/>
+            <a:ext cx="3410712" cy="2926080"/>
+          </a:xfrm>
+          <a:prstGeom prst="roundRect">
+            <a:avLst>
+              <a:gd name="adj" fmla="val 8000"/>
+            </a:avLst>
+          </a:prstGeom>
+          <a:solidFill>
+            <a:srgbClr val="0645AD"/>
+          </a:solidFill>
+          <a:ln>
+            <a:noFill/>
+          </a:ln>
+          <a:effectLst/>
+        </p:spPr>
+        <p:style>
+          <a:lnRef idx="1">
+            <a:schemeClr val="accent1"/>
+          </a:lnRef>
+          <a:fillRef idx="3">
+            <a:schemeClr val="accent1"/>
+          </a:fillRef>
+          <a:effectRef idx="2">
+            <a:schemeClr val="accent1"/>
+          </a:effectRef>
+          <a:fontRef idx="minor">
+            <a:schemeClr val="lt1"/>
+          </a:fontRef>
+        </p:style>
+        <p:txBody>
+          <a:bodyPr rtlCol="0" anchor="ctr"/>
+          <a:lstStyle/>
+          <a:p/>
+        </p:txBody>
+      </p:sp>
+      <p:sp>
+        <p:nvSpPr>
+          <p:cNvPr id="11" name="TextBox 10"/>
+          <p:cNvSpPr txBox="1"/>
+          <p:nvPr/>
+        </p:nvSpPr>
+        <p:spPr>
+          <a:xfrm>
+            <a:off x="8503920" y="1874519"/>
+            <a:ext cx="2926080" cy="365760"/>
+          </a:xfrm>
+          <a:prstGeom prst="rect">
+            <a:avLst/>
+          </a:prstGeom>
+          <a:noFill/>
+        </p:spPr>
+        <p:txBody>
+          <a:bodyPr wrap="square" anchor="t" lIns="0" rIns="0" tIns="0" bIns="0"/>
+          <a:lstStyle/>
+          <a:p>
+            <a:pPr algn="l"/>
+            <a:r>
+              <a:rPr sz="1300" b="1" i="0">
+                <a:solidFill>
+                  <a:srgbClr val="A9C8F0"/>
+                </a:solidFill>
+                <a:latin typeface="Calibri"/>
+              </a:rPr>
+              <a:t>REVISE THIS TOPIC</a:t>
+            </a:r>
+          </a:p>
+        </p:txBody>
+      </p:sp>
+      <p:sp>
+        <p:nvSpPr>
+          <p:cNvPr id="12" name="TextBox 11"/>
+          <p:cNvSpPr txBox="1"/>
+          <p:nvPr/>
+        </p:nvSpPr>
+        <p:spPr>
+          <a:xfrm>
+            <a:off x="8503920" y="2286000"/>
+            <a:ext cx="2926080" cy="548640"/>
+          </a:xfrm>
+          <a:prstGeom prst="rect">
+            <a:avLst/>
+          </a:prstGeom>
+          <a:noFill/>
+        </p:spPr>
+        <p:txBody>
+          <a:bodyPr wrap="square" anchor="t" lIns="0" rIns="0" tIns="0" bIns="0"/>
+          <a:lstStyle/>
+          <a:p>
+            <a:pPr algn="l"/>
+            <a:r>
+              <a:rPr sz="1400" b="0" i="0">
+                <a:solidFill>
+                  <a:srgbClr val="FFFFFF"/>
+                </a:solidFill>
+                <a:latin typeface="Calibri"/>
+              </a:rPr>
+              <a:t>Revision notes for this lesson are on the study wiki:</a:t>
+            </a:r>
+          </a:p>
+        </p:txBody>
+      </p:sp>
+      <p:sp>
+        <p:nvSpPr>
+          <p:cNvPr id="13" name="TextBox 12"/>
+          <p:cNvSpPr txBox="1"/>
+          <p:nvPr/>
+        </p:nvSpPr>
+        <p:spPr>
+          <a:xfrm>
+            <a:off x="8503920" y="2926080"/>
+            <a:ext cx="2926080" cy="1463040"/>
+          </a:xfrm>
+          <a:prstGeom prst="rect">
+            <a:avLst/>
+          </a:prstGeom>
+          <a:noFill/>
+        </p:spPr>
+        <p:txBody>
+          <a:bodyPr wrap="square" anchor="t" lIns="0" rIns="0" tIns="0" bIns="0"/>
+          <a:lstStyle/>
+          <a:p>
+            <a:pPr algn="l"/>
+            <a:r>
+              <a:rPr sz="2000" b="1" i="0">
+                <a:solidFill>
+                  <a:srgbClr val="FFFFFF"/>
+                </a:solidFill>
+                <a:latin typeface="Cambria"/>
+              </a:rPr>
+              <a:t>Knowledge Criteria</a:t>
+            </a:r>
+          </a:p>
+        </p:txBody>
+      </p:sp>
+      <p:sp>
+        <p:nvSpPr>
+          <p:cNvPr id="14" name="TextBox 13"/>
+          <p:cNvSpPr txBox="1"/>
+          <p:nvPr/>
+        </p:nvSpPr>
+        <p:spPr>
+          <a:xfrm>
+            <a:off x="548640" y="5669280"/>
+            <a:ext cx="11094415" cy="548640"/>
+          </a:xfrm>
+          <a:prstGeom prst="rect">
+            <a:avLst/>
+          </a:prstGeom>
+          <a:noFill/>
+        </p:spPr>
+        <p:txBody>
+          <a:bodyPr wrap="square" anchor="t" lIns="0" rIns="0" tIns="0" bIns="0"/>
+          <a:lstStyle/>
+          <a:p>
+            <a:pPr algn="l"/>
+            <a:r>
+              <a:rPr sz="1200" b="0" i="0">
+                <a:solidFill>
+                  <a:srgbClr val="A9C8F0"/>
+                </a:solidFill>
+                <a:latin typeface="Calibri"/>
+              </a:rPr>
+              <a:t>https://lana6478.github.io/T-level-Design-Development-Engineering-Manufacturing/#/02-occupational-specialism/01-knowledge-criteria.md</a:t>
+            </a:r>
+          </a:p>
+        </p:txBody>
+      </p:sp>
+    </p:spTree>
+  </p:cSld>
+  <p:clrMapOvr>
+    <a:masterClrMapping/>
+  </p:clrMapOvr>
+</p:sld>
+</file>
+
 <file path=ppt/slides/slide2.xml><?xml version="1.0" encoding="utf-8"?>
 <p:sld xmlns:a="http://schemas.openxmlformats.org/drawingml/2006/main" xmlns:p="http://schemas.openxmlformats.org/presentationml/2006/main" xmlns:r="http://schemas.openxmlformats.org/officeDocument/2006/relationships">
   <p:cSld>
@@ -4842,22 +7365,109 @@
       </p:sp>
       <p:sp>
         <p:nvSpPr>
-          <p:cNvPr id="6" name="Rounded Rectangle 5"/>
+          <p:cNvPr id="6" name="TextBox 5"/>
+          <p:cNvSpPr txBox="1"/>
+          <p:nvPr/>
+        </p:nvSpPr>
+        <p:spPr>
+          <a:xfrm>
+            <a:off x="548640" y="1554480"/>
+            <a:ext cx="6720840" cy="4617720"/>
+          </a:xfrm>
+          <a:prstGeom prst="rect">
+            <a:avLst/>
+          </a:prstGeom>
+          <a:noFill/>
+        </p:spPr>
+        <p:txBody>
+          <a:bodyPr wrap="square" lIns="0" rIns="0" tIns="0" bIns="0">
+            <a:spAutoFit/>
+          </a:bodyPr>
+          <a:lstStyle/>
+          <a:p>
+            <a:pPr>
+              <a:spcAft>
+                <a:spcPts val="1320"/>
+              </a:spcAft>
+            </a:pPr>
+            <a:r>
+              <a:rPr sz="2200" b="0">
+                <a:solidFill>
+                  <a:srgbClr val="202122"/>
+                </a:solidFill>
+                <a:latin typeface="Calibri"/>
+              </a:rPr>
+              <a:t>Loads can be static (steady, like a shelf's weight) or dynamic (changing, like a vibrating engine). A point load acts at one spot; a uniformly distributed load spreads evenly along a length.</a:t>
+            </a:r>
+          </a:p>
+          <a:p>
+            <a:pPr>
+              <a:spcAft>
+                <a:spcPts val="1320"/>
+              </a:spcAft>
+            </a:pPr>
+            <a:r>
+              <a:rPr sz="2200" b="0">
+                <a:solidFill>
+                  <a:srgbClr val="202122"/>
+                </a:solidFill>
+                <a:latin typeface="Calibri"/>
+              </a:rPr>
+              <a:t>Torque twists; shear forces make layers slide; bending moments bend a member. Fluid loading comes from wind or water.</a:t>
+            </a:r>
+          </a:p>
+          <a:p>
+            <a:pPr>
+              <a:spcAft>
+                <a:spcPts val="1320"/>
+              </a:spcAft>
+            </a:pPr>
+            <a:r>
+              <a:rPr sz="2200" b="0">
+                <a:solidFill>
+                  <a:srgbClr val="202122"/>
+                </a:solidFill>
+                <a:latin typeface="Calibri"/>
+              </a:rPr>
+              <a:t>Fatigue is the danger of dynamic loads: repeated cycles grow cracks until failure, even at loads well below the material's strength.</a:t>
+            </a:r>
+          </a:p>
+          <a:p>
+            <a:pPr>
+              <a:spcAft>
+                <a:spcPts val="1320"/>
+              </a:spcAft>
+            </a:pPr>
+            <a:r>
+              <a:rPr sz="2200" b="0">
+                <a:solidFill>
+                  <a:srgbClr val="202122"/>
+                </a:solidFill>
+                <a:latin typeface="Calibri"/>
+              </a:rPr>
+              <a:t>The type of load decides which material properties matter most.</a:t>
+            </a:r>
+          </a:p>
+        </p:txBody>
+      </p:sp>
+      <p:sp>
+        <p:nvSpPr>
+          <p:cNvPr id="7" name="Rounded Rectangle 6"/>
           <p:cNvSpPr/>
           <p:nvPr/>
         </p:nvSpPr>
         <p:spPr>
           <a:xfrm>
-            <a:off x="548640" y="1600200"/>
-            <a:ext cx="3515258" cy="2148840"/>
+            <a:off x="7772400" y="1554480"/>
+            <a:ext cx="3867912" cy="4526280"/>
           </a:xfrm>
           <a:prstGeom prst="roundRect">
             <a:avLst>
-              <a:gd name="adj" fmla="val 6000"/>
+              <a:gd name="adj" fmla="val 8000"/>
             </a:avLst>
           </a:prstGeom>
           <a:solidFill>
-            <a:srgbClr val="EAF3FF"/>
+            <a:srgbClr val="03306E"/>
           </a:solidFill>
           <a:ln>
             <a:noFill/>
@@ -4886,14 +7496,14 @@
       </p:sp>
       <p:sp>
         <p:nvSpPr>
-          <p:cNvPr id="7" name="Oval 6"/>
+          <p:cNvPr id="8" name="Oval 7"/>
           <p:cNvSpPr/>
           <p:nvPr/>
         </p:nvSpPr>
         <p:spPr>
           <a:xfrm>
-            <a:off x="777240" y="1828800"/>
-            <a:ext cx="457200" cy="457200"/>
+            <a:off x="8046720" y="1828800"/>
+            <a:ext cx="548640" cy="548640"/>
           </a:xfrm>
           <a:prstGeom prst="ellipse">
             <a:avLst/>
@@ -4926,46 +7536,13 @@
           <a:p>
             <a:pPr algn="ctr"/>
             <a:r>
-              <a:rPr sz="1500" b="1">
+              <a:rPr sz="1300" b="1">
                 <a:solidFill>
                   <a:srgbClr val="FFFFFF"/>
                 </a:solidFill>
                 <a:latin typeface="Calibri"/>
               </a:rPr>
-              <a:t>1</a:t>
-            </a:r>
-          </a:p>
-        </p:txBody>
-      </p:sp>
-      <p:sp>
-        <p:nvSpPr>
-          <p:cNvPr id="8" name="TextBox 7"/>
-          <p:cNvSpPr txBox="1"/>
-          <p:nvPr/>
-        </p:nvSpPr>
-        <p:spPr>
-          <a:xfrm>
-            <a:off x="1371600" y="1801368"/>
-            <a:ext cx="2509418" cy="512064"/>
-          </a:xfrm>
-          <a:prstGeom prst="rect">
-            <a:avLst/>
-          </a:prstGeom>
-          <a:noFill/>
-        </p:spPr>
-        <p:txBody>
-          <a:bodyPr wrap="square" anchor="ctr" lIns="0" rIns="0" tIns="0" bIns="0"/>
-          <a:lstStyle/>
-          <a:p>
-            <a:pPr algn="l"/>
-            <a:r>
-              <a:rPr sz="1900" b="1" i="0">
-                <a:solidFill>
-                  <a:srgbClr val="03306E"/>
-                </a:solidFill>
-                <a:latin typeface="Calibri"/>
-              </a:rPr>
-              <a:t>Static and dynamic</a:t>
+              <a:t>e.g.</a:t>
             </a:r>
           </a:p>
         </p:txBody>
@@ -4978,8 +7555,8 @@
         </p:nvSpPr>
         <p:spPr>
           <a:xfrm>
-            <a:off x="777240" y="2468880"/>
-            <a:ext cx="3058058" cy="1143000"/>
+            <a:off x="8046720" y="2560320"/>
+            <a:ext cx="3291840" cy="365760"/>
           </a:xfrm>
           <a:prstGeom prst="rect">
             <a:avLst/>
@@ -4992,665 +7569,46 @@
           <a:p>
             <a:pPr algn="l"/>
             <a:r>
-              <a:rPr sz="2000" b="0" i="0">
-                <a:solidFill>
-                  <a:srgbClr val="202122"/>
-                </a:solidFill>
-                <a:latin typeface="Calibri"/>
-              </a:rPr>
-              <a:t>Steady loads versus changing or moving loads.</a:t>
-            </a:r>
-          </a:p>
-        </p:txBody>
-      </p:sp>
-      <p:sp>
-        <p:nvSpPr>
-          <p:cNvPr id="10" name="Rounded Rectangle 9"/>
-          <p:cNvSpPr/>
-          <p:nvPr/>
-        </p:nvSpPr>
-        <p:spPr>
-          <a:xfrm>
-            <a:off x="4338218" y="1600200"/>
-            <a:ext cx="3515258" cy="2148840"/>
-          </a:xfrm>
-          <a:prstGeom prst="roundRect">
-            <a:avLst>
-              <a:gd name="adj" fmla="val 6000"/>
-            </a:avLst>
-          </a:prstGeom>
-          <a:solidFill>
-            <a:srgbClr val="EAF3FF"/>
-          </a:solidFill>
-          <a:ln>
-            <a:noFill/>
-          </a:ln>
-          <a:effectLst/>
-        </p:spPr>
-        <p:style>
-          <a:lnRef idx="1">
-            <a:schemeClr val="accent1"/>
-          </a:lnRef>
-          <a:fillRef idx="3">
-            <a:schemeClr val="accent1"/>
-          </a:fillRef>
-          <a:effectRef idx="2">
-            <a:schemeClr val="accent1"/>
-          </a:effectRef>
-          <a:fontRef idx="minor">
-            <a:schemeClr val="lt1"/>
-          </a:fontRef>
-        </p:style>
-        <p:txBody>
-          <a:bodyPr rtlCol="0" anchor="ctr"/>
-          <a:lstStyle/>
-          <a:p/>
-        </p:txBody>
-      </p:sp>
-      <p:sp>
-        <p:nvSpPr>
-          <p:cNvPr id="11" name="Oval 10"/>
-          <p:cNvSpPr/>
-          <p:nvPr/>
-        </p:nvSpPr>
-        <p:spPr>
-          <a:xfrm>
-            <a:off x="4566818" y="1828800"/>
-            <a:ext cx="457200" cy="457200"/>
-          </a:xfrm>
-          <a:prstGeom prst="ellipse">
-            <a:avLst/>
-          </a:prstGeom>
-          <a:solidFill>
-            <a:srgbClr val="E0463A"/>
-          </a:solidFill>
-          <a:ln>
-            <a:noFill/>
-          </a:ln>
-          <a:effectLst/>
-        </p:spPr>
-        <p:style>
-          <a:lnRef idx="1">
-            <a:schemeClr val="accent1"/>
-          </a:lnRef>
-          <a:fillRef idx="3">
-            <a:schemeClr val="accent1"/>
-          </a:fillRef>
-          <a:effectRef idx="2">
-            <a:schemeClr val="accent1"/>
-          </a:effectRef>
-          <a:fontRef idx="minor">
-            <a:schemeClr val="lt1"/>
-          </a:fontRef>
-        </p:style>
-        <p:txBody>
-          <a:bodyPr rtlCol="0" anchor="ctr" lIns="0" rIns="0" tIns="0" bIns="0"/>
-          <a:lstStyle/>
-          <a:p>
-            <a:pPr algn="ctr"/>
-            <a:r>
-              <a:rPr sz="1500" b="1">
+              <a:rPr sz="1300" b="1" i="0">
+                <a:solidFill>
+                  <a:srgbClr val="A9C8F0"/>
+                </a:solidFill>
+                <a:latin typeface="Calibri"/>
+              </a:rPr>
+              <a:t>EXAMPLE</a:t>
+            </a:r>
+          </a:p>
+        </p:txBody>
+      </p:sp>
+      <p:sp>
+        <p:nvSpPr>
+          <p:cNvPr id="10" name="TextBox 9"/>
+          <p:cNvSpPr txBox="1"/>
+          <p:nvPr/>
+        </p:nvSpPr>
+        <p:spPr>
+          <a:xfrm>
+            <a:off x="8046720" y="2971800"/>
+            <a:ext cx="3291840" cy="2971800"/>
+          </a:xfrm>
+          <a:prstGeom prst="rect">
+            <a:avLst/>
+          </a:prstGeom>
+          <a:noFill/>
+        </p:spPr>
+        <p:txBody>
+          <a:bodyPr wrap="square" anchor="t" lIns="0" rIns="0" tIns="0" bIns="0"/>
+          <a:lstStyle/>
+          <a:p>
+            <a:pPr algn="l"/>
+            <a:r>
+              <a:rPr sz="1900" b="0" i="0">
                 <a:solidFill>
                   <a:srgbClr val="FFFFFF"/>
                 </a:solidFill>
-                <a:latin typeface="Calibri"/>
-              </a:rPr>
-              <a:t>2</a:t>
-            </a:r>
-          </a:p>
-        </p:txBody>
-      </p:sp>
-      <p:sp>
-        <p:nvSpPr>
-          <p:cNvPr id="12" name="TextBox 11"/>
-          <p:cNvSpPr txBox="1"/>
-          <p:nvPr/>
-        </p:nvSpPr>
-        <p:spPr>
-          <a:xfrm>
-            <a:off x="5161178" y="1801368"/>
-            <a:ext cx="2509418" cy="512064"/>
-          </a:xfrm>
-          <a:prstGeom prst="rect">
-            <a:avLst/>
-          </a:prstGeom>
-          <a:noFill/>
-        </p:spPr>
-        <p:txBody>
-          <a:bodyPr wrap="square" anchor="ctr" lIns="0" rIns="0" tIns="0" bIns="0"/>
-          <a:lstStyle/>
-          <a:p>
-            <a:pPr algn="l"/>
-            <a:r>
-              <a:rPr sz="1900" b="1" i="0">
-                <a:solidFill>
-                  <a:srgbClr val="03306E"/>
-                </a:solidFill>
-                <a:latin typeface="Calibri"/>
-              </a:rPr>
-              <a:t>Point and uniform</a:t>
-            </a:r>
-          </a:p>
-        </p:txBody>
-      </p:sp>
-      <p:sp>
-        <p:nvSpPr>
-          <p:cNvPr id="13" name="TextBox 12"/>
-          <p:cNvSpPr txBox="1"/>
-          <p:nvPr/>
-        </p:nvSpPr>
-        <p:spPr>
-          <a:xfrm>
-            <a:off x="4566818" y="2468880"/>
-            <a:ext cx="3058058" cy="1143000"/>
-          </a:xfrm>
-          <a:prstGeom prst="rect">
-            <a:avLst/>
-          </a:prstGeom>
-          <a:noFill/>
-        </p:spPr>
-        <p:txBody>
-          <a:bodyPr wrap="square" anchor="t" lIns="0" rIns="0" tIns="0" bIns="0"/>
-          <a:lstStyle/>
-          <a:p>
-            <a:pPr algn="l"/>
-            <a:r>
-              <a:rPr sz="2000" b="0" i="0">
-                <a:solidFill>
-                  <a:srgbClr val="202122"/>
-                </a:solidFill>
-                <a:latin typeface="Calibri"/>
-              </a:rPr>
-              <a:t>Load at one spot versus spread along a length.</a:t>
-            </a:r>
-          </a:p>
-        </p:txBody>
-      </p:sp>
-      <p:sp>
-        <p:nvSpPr>
-          <p:cNvPr id="14" name="Rounded Rectangle 13"/>
-          <p:cNvSpPr/>
-          <p:nvPr/>
-        </p:nvSpPr>
-        <p:spPr>
-          <a:xfrm>
-            <a:off x="8127796" y="1600200"/>
-            <a:ext cx="3515258" cy="2148840"/>
-          </a:xfrm>
-          <a:prstGeom prst="roundRect">
-            <a:avLst>
-              <a:gd name="adj" fmla="val 6000"/>
-            </a:avLst>
-          </a:prstGeom>
-          <a:solidFill>
-            <a:srgbClr val="EAF3FF"/>
-          </a:solidFill>
-          <a:ln>
-            <a:noFill/>
-          </a:ln>
-          <a:effectLst/>
-        </p:spPr>
-        <p:style>
-          <a:lnRef idx="1">
-            <a:schemeClr val="accent1"/>
-          </a:lnRef>
-          <a:fillRef idx="3">
-            <a:schemeClr val="accent1"/>
-          </a:fillRef>
-          <a:effectRef idx="2">
-            <a:schemeClr val="accent1"/>
-          </a:effectRef>
-          <a:fontRef idx="minor">
-            <a:schemeClr val="lt1"/>
-          </a:fontRef>
-        </p:style>
-        <p:txBody>
-          <a:bodyPr rtlCol="0" anchor="ctr"/>
-          <a:lstStyle/>
-          <a:p/>
-        </p:txBody>
-      </p:sp>
-      <p:sp>
-        <p:nvSpPr>
-          <p:cNvPr id="15" name="Oval 14"/>
-          <p:cNvSpPr/>
-          <p:nvPr/>
-        </p:nvSpPr>
-        <p:spPr>
-          <a:xfrm>
-            <a:off x="8356396" y="1828800"/>
-            <a:ext cx="457200" cy="457200"/>
-          </a:xfrm>
-          <a:prstGeom prst="ellipse">
-            <a:avLst/>
-          </a:prstGeom>
-          <a:solidFill>
-            <a:srgbClr val="E0463A"/>
-          </a:solidFill>
-          <a:ln>
-            <a:noFill/>
-          </a:ln>
-          <a:effectLst/>
-        </p:spPr>
-        <p:style>
-          <a:lnRef idx="1">
-            <a:schemeClr val="accent1"/>
-          </a:lnRef>
-          <a:fillRef idx="3">
-            <a:schemeClr val="accent1"/>
-          </a:fillRef>
-          <a:effectRef idx="2">
-            <a:schemeClr val="accent1"/>
-          </a:effectRef>
-          <a:fontRef idx="minor">
-            <a:schemeClr val="lt1"/>
-          </a:fontRef>
-        </p:style>
-        <p:txBody>
-          <a:bodyPr rtlCol="0" anchor="ctr" lIns="0" rIns="0" tIns="0" bIns="0"/>
-          <a:lstStyle/>
-          <a:p>
-            <a:pPr algn="ctr"/>
-            <a:r>
-              <a:rPr sz="1500" b="1">
-                <a:solidFill>
-                  <a:srgbClr val="FFFFFF"/>
-                </a:solidFill>
-                <a:latin typeface="Calibri"/>
-              </a:rPr>
-              <a:t>3</a:t>
-            </a:r>
-          </a:p>
-        </p:txBody>
-      </p:sp>
-      <p:sp>
-        <p:nvSpPr>
-          <p:cNvPr id="16" name="TextBox 15"/>
-          <p:cNvSpPr txBox="1"/>
-          <p:nvPr/>
-        </p:nvSpPr>
-        <p:spPr>
-          <a:xfrm>
-            <a:off x="8950756" y="1801368"/>
-            <a:ext cx="2509418" cy="512064"/>
-          </a:xfrm>
-          <a:prstGeom prst="rect">
-            <a:avLst/>
-          </a:prstGeom>
-          <a:noFill/>
-        </p:spPr>
-        <p:txBody>
-          <a:bodyPr wrap="square" anchor="ctr" lIns="0" rIns="0" tIns="0" bIns="0"/>
-          <a:lstStyle/>
-          <a:p>
-            <a:pPr algn="l"/>
-            <a:r>
-              <a:rPr sz="1900" b="1" i="0">
-                <a:solidFill>
-                  <a:srgbClr val="03306E"/>
-                </a:solidFill>
-                <a:latin typeface="Calibri"/>
-              </a:rPr>
-              <a:t>Torque and shear</a:t>
-            </a:r>
-          </a:p>
-        </p:txBody>
-      </p:sp>
-      <p:sp>
-        <p:nvSpPr>
-          <p:cNvPr id="17" name="TextBox 16"/>
-          <p:cNvSpPr txBox="1"/>
-          <p:nvPr/>
-        </p:nvSpPr>
-        <p:spPr>
-          <a:xfrm>
-            <a:off x="8356396" y="2468880"/>
-            <a:ext cx="3058058" cy="1143000"/>
-          </a:xfrm>
-          <a:prstGeom prst="rect">
-            <a:avLst/>
-          </a:prstGeom>
-          <a:noFill/>
-        </p:spPr>
-        <p:txBody>
-          <a:bodyPr wrap="square" anchor="t" lIns="0" rIns="0" tIns="0" bIns="0"/>
-          <a:lstStyle/>
-          <a:p>
-            <a:pPr algn="l"/>
-            <a:r>
-              <a:rPr sz="2000" b="0" i="0">
-                <a:solidFill>
-                  <a:srgbClr val="202122"/>
-                </a:solidFill>
-                <a:latin typeface="Calibri"/>
-              </a:rPr>
-              <a:t>Twisting and sliding forces.</a:t>
-            </a:r>
-          </a:p>
-        </p:txBody>
-      </p:sp>
-      <p:sp>
-        <p:nvSpPr>
-          <p:cNvPr id="18" name="Rounded Rectangle 17"/>
-          <p:cNvSpPr/>
-          <p:nvPr/>
-        </p:nvSpPr>
-        <p:spPr>
-          <a:xfrm>
-            <a:off x="548640" y="4023360"/>
-            <a:ext cx="3515258" cy="2148840"/>
-          </a:xfrm>
-          <a:prstGeom prst="roundRect">
-            <a:avLst>
-              <a:gd name="adj" fmla="val 6000"/>
-            </a:avLst>
-          </a:prstGeom>
-          <a:solidFill>
-            <a:srgbClr val="EAF3FF"/>
-          </a:solidFill>
-          <a:ln>
-            <a:noFill/>
-          </a:ln>
-          <a:effectLst/>
-        </p:spPr>
-        <p:style>
-          <a:lnRef idx="1">
-            <a:schemeClr val="accent1"/>
-          </a:lnRef>
-          <a:fillRef idx="3">
-            <a:schemeClr val="accent1"/>
-          </a:fillRef>
-          <a:effectRef idx="2">
-            <a:schemeClr val="accent1"/>
-          </a:effectRef>
-          <a:fontRef idx="minor">
-            <a:schemeClr val="lt1"/>
-          </a:fontRef>
-        </p:style>
-        <p:txBody>
-          <a:bodyPr rtlCol="0" anchor="ctr"/>
-          <a:lstStyle/>
-          <a:p/>
-        </p:txBody>
-      </p:sp>
-      <p:sp>
-        <p:nvSpPr>
-          <p:cNvPr id="19" name="Oval 18"/>
-          <p:cNvSpPr/>
-          <p:nvPr/>
-        </p:nvSpPr>
-        <p:spPr>
-          <a:xfrm>
-            <a:off x="777240" y="4251960"/>
-            <a:ext cx="457200" cy="457200"/>
-          </a:xfrm>
-          <a:prstGeom prst="ellipse">
-            <a:avLst/>
-          </a:prstGeom>
-          <a:solidFill>
-            <a:srgbClr val="E0463A"/>
-          </a:solidFill>
-          <a:ln>
-            <a:noFill/>
-          </a:ln>
-          <a:effectLst/>
-        </p:spPr>
-        <p:style>
-          <a:lnRef idx="1">
-            <a:schemeClr val="accent1"/>
-          </a:lnRef>
-          <a:fillRef idx="3">
-            <a:schemeClr val="accent1"/>
-          </a:fillRef>
-          <a:effectRef idx="2">
-            <a:schemeClr val="accent1"/>
-          </a:effectRef>
-          <a:fontRef idx="minor">
-            <a:schemeClr val="lt1"/>
-          </a:fontRef>
-        </p:style>
-        <p:txBody>
-          <a:bodyPr rtlCol="0" anchor="ctr" lIns="0" rIns="0" tIns="0" bIns="0"/>
-          <a:lstStyle/>
-          <a:p>
-            <a:pPr algn="ctr"/>
-            <a:r>
-              <a:rPr sz="1500" b="1">
-                <a:solidFill>
-                  <a:srgbClr val="FFFFFF"/>
-                </a:solidFill>
-                <a:latin typeface="Calibri"/>
-              </a:rPr>
-              <a:t>4</a:t>
-            </a:r>
-          </a:p>
-        </p:txBody>
-      </p:sp>
-      <p:sp>
-        <p:nvSpPr>
-          <p:cNvPr id="20" name="TextBox 19"/>
-          <p:cNvSpPr txBox="1"/>
-          <p:nvPr/>
-        </p:nvSpPr>
-        <p:spPr>
-          <a:xfrm>
-            <a:off x="1371600" y="4224528"/>
-            <a:ext cx="2509418" cy="512064"/>
-          </a:xfrm>
-          <a:prstGeom prst="rect">
-            <a:avLst/>
-          </a:prstGeom>
-          <a:noFill/>
-        </p:spPr>
-        <p:txBody>
-          <a:bodyPr wrap="square" anchor="ctr" lIns="0" rIns="0" tIns="0" bIns="0"/>
-          <a:lstStyle/>
-          <a:p>
-            <a:pPr algn="l"/>
-            <a:r>
-              <a:rPr sz="1900" b="1" i="0">
-                <a:solidFill>
-                  <a:srgbClr val="03306E"/>
-                </a:solidFill>
-                <a:latin typeface="Calibri"/>
-              </a:rPr>
-              <a:t>Bending moments</a:t>
-            </a:r>
-          </a:p>
-        </p:txBody>
-      </p:sp>
-      <p:sp>
-        <p:nvSpPr>
-          <p:cNvPr id="21" name="TextBox 20"/>
-          <p:cNvSpPr txBox="1"/>
-          <p:nvPr/>
-        </p:nvSpPr>
-        <p:spPr>
-          <a:xfrm>
-            <a:off x="777240" y="4892040"/>
-            <a:ext cx="3058058" cy="1143000"/>
-          </a:xfrm>
-          <a:prstGeom prst="rect">
-            <a:avLst/>
-          </a:prstGeom>
-          <a:noFill/>
-        </p:spPr>
-        <p:txBody>
-          <a:bodyPr wrap="square" anchor="t" lIns="0" rIns="0" tIns="0" bIns="0"/>
-          <a:lstStyle/>
-          <a:p>
-            <a:pPr algn="l"/>
-            <a:r>
-              <a:rPr sz="2000" b="0" i="0">
-                <a:solidFill>
-                  <a:srgbClr val="202122"/>
-                </a:solidFill>
-                <a:latin typeface="Calibri"/>
-              </a:rPr>
-              <a:t>Loads that bend a member.</a:t>
-            </a:r>
-          </a:p>
-        </p:txBody>
-      </p:sp>
-      <p:sp>
-        <p:nvSpPr>
-          <p:cNvPr id="22" name="Rounded Rectangle 21"/>
-          <p:cNvSpPr/>
-          <p:nvPr/>
-        </p:nvSpPr>
-        <p:spPr>
-          <a:xfrm>
-            <a:off x="4338218" y="4023360"/>
-            <a:ext cx="3515258" cy="2148840"/>
-          </a:xfrm>
-          <a:prstGeom prst="roundRect">
-            <a:avLst>
-              <a:gd name="adj" fmla="val 6000"/>
-            </a:avLst>
-          </a:prstGeom>
-          <a:solidFill>
-            <a:srgbClr val="EAF3FF"/>
-          </a:solidFill>
-          <a:ln>
-            <a:noFill/>
-          </a:ln>
-          <a:effectLst/>
-        </p:spPr>
-        <p:style>
-          <a:lnRef idx="1">
-            <a:schemeClr val="accent1"/>
-          </a:lnRef>
-          <a:fillRef idx="3">
-            <a:schemeClr val="accent1"/>
-          </a:fillRef>
-          <a:effectRef idx="2">
-            <a:schemeClr val="accent1"/>
-          </a:effectRef>
-          <a:fontRef idx="minor">
-            <a:schemeClr val="lt1"/>
-          </a:fontRef>
-        </p:style>
-        <p:txBody>
-          <a:bodyPr rtlCol="0" anchor="ctr"/>
-          <a:lstStyle/>
-          <a:p/>
-        </p:txBody>
-      </p:sp>
-      <p:sp>
-        <p:nvSpPr>
-          <p:cNvPr id="23" name="Oval 22"/>
-          <p:cNvSpPr/>
-          <p:nvPr/>
-        </p:nvSpPr>
-        <p:spPr>
-          <a:xfrm>
-            <a:off x="4566818" y="4251960"/>
-            <a:ext cx="457200" cy="457200"/>
-          </a:xfrm>
-          <a:prstGeom prst="ellipse">
-            <a:avLst/>
-          </a:prstGeom>
-          <a:solidFill>
-            <a:srgbClr val="E0463A"/>
-          </a:solidFill>
-          <a:ln>
-            <a:noFill/>
-          </a:ln>
-          <a:effectLst/>
-        </p:spPr>
-        <p:style>
-          <a:lnRef idx="1">
-            <a:schemeClr val="accent1"/>
-          </a:lnRef>
-          <a:fillRef idx="3">
-            <a:schemeClr val="accent1"/>
-          </a:fillRef>
-          <a:effectRef idx="2">
-            <a:schemeClr val="accent1"/>
-          </a:effectRef>
-          <a:fontRef idx="minor">
-            <a:schemeClr val="lt1"/>
-          </a:fontRef>
-        </p:style>
-        <p:txBody>
-          <a:bodyPr rtlCol="0" anchor="ctr" lIns="0" rIns="0" tIns="0" bIns="0"/>
-          <a:lstStyle/>
-          <a:p>
-            <a:pPr algn="ctr"/>
-            <a:r>
-              <a:rPr sz="1500" b="1">
-                <a:solidFill>
-                  <a:srgbClr val="FFFFFF"/>
-                </a:solidFill>
-                <a:latin typeface="Calibri"/>
-              </a:rPr>
-              <a:t>5</a:t>
-            </a:r>
-          </a:p>
-        </p:txBody>
-      </p:sp>
-      <p:sp>
-        <p:nvSpPr>
-          <p:cNvPr id="24" name="TextBox 23"/>
-          <p:cNvSpPr txBox="1"/>
-          <p:nvPr/>
-        </p:nvSpPr>
-        <p:spPr>
-          <a:xfrm>
-            <a:off x="5161178" y="4224528"/>
-            <a:ext cx="2509418" cy="512064"/>
-          </a:xfrm>
-          <a:prstGeom prst="rect">
-            <a:avLst/>
-          </a:prstGeom>
-          <a:noFill/>
-        </p:spPr>
-        <p:txBody>
-          <a:bodyPr wrap="square" anchor="ctr" lIns="0" rIns="0" tIns="0" bIns="0"/>
-          <a:lstStyle/>
-          <a:p>
-            <a:pPr algn="l"/>
-            <a:r>
-              <a:rPr sz="1900" b="1" i="0">
-                <a:solidFill>
-                  <a:srgbClr val="03306E"/>
-                </a:solidFill>
-                <a:latin typeface="Calibri"/>
-              </a:rPr>
-              <a:t>Fatigue</a:t>
-            </a:r>
-          </a:p>
-        </p:txBody>
-      </p:sp>
-      <p:sp>
-        <p:nvSpPr>
-          <p:cNvPr id="25" name="TextBox 24"/>
-          <p:cNvSpPr txBox="1"/>
-          <p:nvPr/>
-        </p:nvSpPr>
-        <p:spPr>
-          <a:xfrm>
-            <a:off x="4566818" y="4892040"/>
-            <a:ext cx="3058058" cy="1143000"/>
-          </a:xfrm>
-          <a:prstGeom prst="rect">
-            <a:avLst/>
-          </a:prstGeom>
-          <a:noFill/>
-        </p:spPr>
-        <p:txBody>
-          <a:bodyPr wrap="square" anchor="t" lIns="0" rIns="0" tIns="0" bIns="0"/>
-          <a:lstStyle/>
-          <a:p>
-            <a:pPr algn="l"/>
-            <a:r>
-              <a:rPr sz="2000" b="0" i="0">
-                <a:solidFill>
-                  <a:srgbClr val="202122"/>
-                </a:solidFill>
-                <a:latin typeface="Calibri"/>
-              </a:rPr>
-              <a:t>Repeated loading that causes cracking over time.</a:t>
+                <a:latin typeface="Cambria"/>
+              </a:rPr>
+              <a:t>A crane hook carries a static load when holding and a dynamic load when the load swings or is dropped suddenly, which can be far higher.</a:t>
             </a:r>
           </a:p>
         </p:txBody>
@@ -5742,7 +7700,7 @@
                 </a:solidFill>
                 <a:latin typeface="Cambria"/>
               </a:rPr>
-              <a:t>Service and environmental conditions</a:t>
+              <a:t>Mechanical loads</a:t>
             </a:r>
           </a:p>
         </p:txBody>
@@ -5822,7 +7780,7 @@
         <p:spPr>
           <a:xfrm>
             <a:off x="548640" y="1600200"/>
-            <a:ext cx="5410047" cy="2148840"/>
+            <a:ext cx="3515258" cy="2148840"/>
           </a:xfrm>
           <a:prstGeom prst="roundRect">
             <a:avLst>
@@ -5919,7 +7877,7 @@
         <p:spPr>
           <a:xfrm>
             <a:off x="1371600" y="1801368"/>
-            <a:ext cx="4404207" cy="512064"/>
+            <a:ext cx="2509418" cy="512064"/>
           </a:xfrm>
           <a:prstGeom prst="rect">
             <a:avLst/>
@@ -5938,7 +7896,7 @@
                 </a:solidFill>
                 <a:latin typeface="Calibri"/>
               </a:rPr>
-              <a:t>Chemical attack</a:t>
+              <a:t>Static and dynamic</a:t>
             </a:r>
           </a:p>
         </p:txBody>
@@ -5952,7 +7910,7 @@
         <p:spPr>
           <a:xfrm>
             <a:off x="777240" y="2468880"/>
-            <a:ext cx="4952847" cy="1143000"/>
+            <a:ext cx="3058058" cy="1143000"/>
           </a:xfrm>
           <a:prstGeom prst="rect">
             <a:avLst/>
@@ -5971,7 +7929,7 @@
                 </a:solidFill>
                 <a:latin typeface="Calibri"/>
               </a:rPr>
-              <a:t>Corrosion reduces strength over time.</a:t>
+              <a:t>Steady loads versus changing or moving loads.</a:t>
             </a:r>
           </a:p>
         </p:txBody>
@@ -5984,8 +7942,8 @@
         </p:nvSpPr>
         <p:spPr>
           <a:xfrm>
-            <a:off x="6233007" y="1600200"/>
-            <a:ext cx="5410047" cy="2148840"/>
+            <a:off x="4338218" y="1600200"/>
+            <a:ext cx="3515258" cy="2148840"/>
           </a:xfrm>
           <a:prstGeom prst="roundRect">
             <a:avLst>
@@ -6028,7 +7986,7 @@
         </p:nvSpPr>
         <p:spPr>
           <a:xfrm>
-            <a:off x="6461607" y="1828800"/>
+            <a:off x="4566818" y="1828800"/>
             <a:ext cx="457200" cy="457200"/>
           </a:xfrm>
           <a:prstGeom prst="ellipse">
@@ -6081,8 +8039,8 @@
         </p:nvSpPr>
         <p:spPr>
           <a:xfrm>
-            <a:off x="7055967" y="1801368"/>
-            <a:ext cx="4404207" cy="512064"/>
+            <a:off x="5161178" y="1801368"/>
+            <a:ext cx="2509418" cy="512064"/>
           </a:xfrm>
           <a:prstGeom prst="rect">
             <a:avLst/>
@@ -6101,7 +8059,7 @@
                 </a:solidFill>
                 <a:latin typeface="Calibri"/>
               </a:rPr>
-              <a:t>Temperature</a:t>
+              <a:t>Point and uniform</a:t>
             </a:r>
           </a:p>
         </p:txBody>
@@ -6114,8 +8072,8 @@
         </p:nvSpPr>
         <p:spPr>
           <a:xfrm>
-            <a:off x="6461607" y="2468880"/>
-            <a:ext cx="4952847" cy="1143000"/>
+            <a:off x="4566818" y="2468880"/>
+            <a:ext cx="3058058" cy="1143000"/>
           </a:xfrm>
           <a:prstGeom prst="rect">
             <a:avLst/>
@@ -6134,7 +8092,7 @@
                 </a:solidFill>
                 <a:latin typeface="Calibri"/>
               </a:rPr>
-              <a:t>Heat softens and expands; cold makes some materials brittle.</a:t>
+              <a:t>Load at one spot versus spread along a length.</a:t>
             </a:r>
           </a:p>
         </p:txBody>
@@ -6147,8 +8105,8 @@
         </p:nvSpPr>
         <p:spPr>
           <a:xfrm>
-            <a:off x="548640" y="4023360"/>
-            <a:ext cx="5410047" cy="2148840"/>
+            <a:off x="8127796" y="1600200"/>
+            <a:ext cx="3515258" cy="2148840"/>
           </a:xfrm>
           <a:prstGeom prst="roundRect">
             <a:avLst>
@@ -6191,7 +8149,7 @@
         </p:nvSpPr>
         <p:spPr>
           <a:xfrm>
-            <a:off x="777240" y="4251960"/>
+            <a:off x="8356396" y="1828800"/>
             <a:ext cx="457200" cy="457200"/>
           </a:xfrm>
           <a:prstGeom prst="ellipse">
@@ -6244,8 +8202,8 @@
         </p:nvSpPr>
         <p:spPr>
           <a:xfrm>
-            <a:off x="1371600" y="4224528"/>
-            <a:ext cx="4404207" cy="512064"/>
+            <a:off x="8950756" y="1801368"/>
+            <a:ext cx="2509418" cy="512064"/>
           </a:xfrm>
           <a:prstGeom prst="rect">
             <a:avLst/>
@@ -6264,7 +8222,7 @@
                 </a:solidFill>
                 <a:latin typeface="Calibri"/>
               </a:rPr>
-              <a:t>Functional properties</a:t>
+              <a:t>Torque and shear</a:t>
             </a:r>
           </a:p>
         </p:txBody>
@@ -6277,8 +8235,8 @@
         </p:nvSpPr>
         <p:spPr>
           <a:xfrm>
-            <a:off x="777240" y="4892040"/>
-            <a:ext cx="4952847" cy="1143000"/>
+            <a:off x="8356396" y="2468880"/>
+            <a:ext cx="3058058" cy="1143000"/>
           </a:xfrm>
           <a:prstGeom prst="rect">
             <a:avLst/>
@@ -6297,7 +8255,7 @@
                 </a:solidFill>
                 <a:latin typeface="Calibri"/>
               </a:rPr>
-              <a:t>The design must keep working in its environment.</a:t>
+              <a:t>Twisting and sliding forces.</a:t>
             </a:r>
           </a:p>
         </p:txBody>
@@ -6310,8 +8268,8 @@
         </p:nvSpPr>
         <p:spPr>
           <a:xfrm>
-            <a:off x="6233007" y="4023360"/>
-            <a:ext cx="5410047" cy="2148840"/>
+            <a:off x="548640" y="4023360"/>
+            <a:ext cx="3515258" cy="2148840"/>
           </a:xfrm>
           <a:prstGeom prst="roundRect">
             <a:avLst>
@@ -6354,7 +8312,7 @@
         </p:nvSpPr>
         <p:spPr>
           <a:xfrm>
-            <a:off x="6461607" y="4251960"/>
+            <a:off x="777240" y="4251960"/>
             <a:ext cx="457200" cy="457200"/>
           </a:xfrm>
           <a:prstGeom prst="ellipse">
@@ -6407,8 +8365,8 @@
         </p:nvSpPr>
         <p:spPr>
           <a:xfrm>
-            <a:off x="7055967" y="4224528"/>
-            <a:ext cx="4404207" cy="512064"/>
+            <a:off x="1371600" y="4224528"/>
+            <a:ext cx="2509418" cy="512064"/>
           </a:xfrm>
           <a:prstGeom prst="rect">
             <a:avLst/>
@@ -6427,7 +8385,7 @@
                 </a:solidFill>
                 <a:latin typeface="Calibri"/>
               </a:rPr>
-              <a:t>Other factors</a:t>
+              <a:t>Bending moments</a:t>
             </a:r>
           </a:p>
         </p:txBody>
@@ -6440,8 +8398,8 @@
         </p:nvSpPr>
         <p:spPr>
           <a:xfrm>
-            <a:off x="6461607" y="4892040"/>
-            <a:ext cx="4952847" cy="1143000"/>
+            <a:off x="777240" y="4892040"/>
+            <a:ext cx="3058058" cy="1143000"/>
           </a:xfrm>
           <a:prstGeom prst="rect">
             <a:avLst/>
@@ -6460,7 +8418,170 @@
                 </a:solidFill>
                 <a:latin typeface="Calibri"/>
               </a:rPr>
-              <a:t>Manufacturing method and material choice shape the outcome.</a:t>
+              <a:t>Loads that bend a member.</a:t>
+            </a:r>
+          </a:p>
+        </p:txBody>
+      </p:sp>
+      <p:sp>
+        <p:nvSpPr>
+          <p:cNvPr id="22" name="Rounded Rectangle 21"/>
+          <p:cNvSpPr/>
+          <p:nvPr/>
+        </p:nvSpPr>
+        <p:spPr>
+          <a:xfrm>
+            <a:off x="4338218" y="4023360"/>
+            <a:ext cx="3515258" cy="2148840"/>
+          </a:xfrm>
+          <a:prstGeom prst="roundRect">
+            <a:avLst>
+              <a:gd name="adj" fmla="val 6000"/>
+            </a:avLst>
+          </a:prstGeom>
+          <a:solidFill>
+            <a:srgbClr val="EAF3FF"/>
+          </a:solidFill>
+          <a:ln>
+            <a:noFill/>
+          </a:ln>
+          <a:effectLst/>
+        </p:spPr>
+        <p:style>
+          <a:lnRef idx="1">
+            <a:schemeClr val="accent1"/>
+          </a:lnRef>
+          <a:fillRef idx="3">
+            <a:schemeClr val="accent1"/>
+          </a:fillRef>
+          <a:effectRef idx="2">
+            <a:schemeClr val="accent1"/>
+          </a:effectRef>
+          <a:fontRef idx="minor">
+            <a:schemeClr val="lt1"/>
+          </a:fontRef>
+        </p:style>
+        <p:txBody>
+          <a:bodyPr rtlCol="0" anchor="ctr"/>
+          <a:lstStyle/>
+          <a:p/>
+        </p:txBody>
+      </p:sp>
+      <p:sp>
+        <p:nvSpPr>
+          <p:cNvPr id="23" name="Oval 22"/>
+          <p:cNvSpPr/>
+          <p:nvPr/>
+        </p:nvSpPr>
+        <p:spPr>
+          <a:xfrm>
+            <a:off x="4566818" y="4251960"/>
+            <a:ext cx="457200" cy="457200"/>
+          </a:xfrm>
+          <a:prstGeom prst="ellipse">
+            <a:avLst/>
+          </a:prstGeom>
+          <a:solidFill>
+            <a:srgbClr val="E0463A"/>
+          </a:solidFill>
+          <a:ln>
+            <a:noFill/>
+          </a:ln>
+          <a:effectLst/>
+        </p:spPr>
+        <p:style>
+          <a:lnRef idx="1">
+            <a:schemeClr val="accent1"/>
+          </a:lnRef>
+          <a:fillRef idx="3">
+            <a:schemeClr val="accent1"/>
+          </a:fillRef>
+          <a:effectRef idx="2">
+            <a:schemeClr val="accent1"/>
+          </a:effectRef>
+          <a:fontRef idx="minor">
+            <a:schemeClr val="lt1"/>
+          </a:fontRef>
+        </p:style>
+        <p:txBody>
+          <a:bodyPr rtlCol="0" anchor="ctr" lIns="0" rIns="0" tIns="0" bIns="0"/>
+          <a:lstStyle/>
+          <a:p>
+            <a:pPr algn="ctr"/>
+            <a:r>
+              <a:rPr sz="1500" b="1">
+                <a:solidFill>
+                  <a:srgbClr val="FFFFFF"/>
+                </a:solidFill>
+                <a:latin typeface="Calibri"/>
+              </a:rPr>
+              <a:t>5</a:t>
+            </a:r>
+          </a:p>
+        </p:txBody>
+      </p:sp>
+      <p:sp>
+        <p:nvSpPr>
+          <p:cNvPr id="24" name="TextBox 23"/>
+          <p:cNvSpPr txBox="1"/>
+          <p:nvPr/>
+        </p:nvSpPr>
+        <p:spPr>
+          <a:xfrm>
+            <a:off x="5161178" y="4224528"/>
+            <a:ext cx="2509418" cy="512064"/>
+          </a:xfrm>
+          <a:prstGeom prst="rect">
+            <a:avLst/>
+          </a:prstGeom>
+          <a:noFill/>
+        </p:spPr>
+        <p:txBody>
+          <a:bodyPr wrap="square" anchor="ctr" lIns="0" rIns="0" tIns="0" bIns="0"/>
+          <a:lstStyle/>
+          <a:p>
+            <a:pPr algn="l"/>
+            <a:r>
+              <a:rPr sz="1900" b="1" i="0">
+                <a:solidFill>
+                  <a:srgbClr val="03306E"/>
+                </a:solidFill>
+                <a:latin typeface="Calibri"/>
+              </a:rPr>
+              <a:t>Fatigue</a:t>
+            </a:r>
+          </a:p>
+        </p:txBody>
+      </p:sp>
+      <p:sp>
+        <p:nvSpPr>
+          <p:cNvPr id="25" name="TextBox 24"/>
+          <p:cNvSpPr txBox="1"/>
+          <p:nvPr/>
+        </p:nvSpPr>
+        <p:spPr>
+          <a:xfrm>
+            <a:off x="4566818" y="4892040"/>
+            <a:ext cx="3058058" cy="1143000"/>
+          </a:xfrm>
+          <a:prstGeom prst="rect">
+            <a:avLst/>
+          </a:prstGeom>
+          <a:noFill/>
+        </p:spPr>
+        <p:txBody>
+          <a:bodyPr wrap="square" anchor="t" lIns="0" rIns="0" tIns="0" bIns="0"/>
+          <a:lstStyle/>
+          <a:p>
+            <a:pPr algn="l"/>
+            <a:r>
+              <a:rPr sz="2000" b="0" i="0">
+                <a:solidFill>
+                  <a:srgbClr val="202122"/>
+                </a:solidFill>
+                <a:latin typeface="Calibri"/>
+              </a:rPr>
+              <a:t>Repeated loading that causes cracking over time.</a:t>
             </a:r>
           </a:p>
         </p:txBody>
@@ -6552,7 +8673,7 @@
                 </a:solidFill>
                 <a:latin typeface="Cambria"/>
               </a:rPr>
-              <a:t>Aerodynamics</a:t>
+              <a:t>Quick check: Mechanical loads</a:t>
             </a:r>
           </a:p>
         </p:txBody>
@@ -6625,22 +8746,20 @@
       </p:sp>
       <p:sp>
         <p:nvSpPr>
-          <p:cNvPr id="6" name="Rounded Rectangle 5"/>
+          <p:cNvPr id="6" name="Oval 5"/>
           <p:cNvSpPr/>
           <p:nvPr/>
         </p:nvSpPr>
         <p:spPr>
           <a:xfrm>
-            <a:off x="548640" y="1600200"/>
-            <a:ext cx="5364327" cy="640080"/>
-          </a:xfrm>
-          <a:prstGeom prst="roundRect">
-            <a:avLst>
-              <a:gd name="adj" fmla="val 15000"/>
-            </a:avLst>
+            <a:off x="548640" y="1691640"/>
+            <a:ext cx="502920" cy="502920"/>
+          </a:xfrm>
+          <a:prstGeom prst="ellipse">
+            <a:avLst/>
           </a:prstGeom>
           <a:solidFill>
-            <a:srgbClr val="03306E"/>
+            <a:srgbClr val="E0463A"/>
           </a:solidFill>
           <a:ln>
             <a:noFill/>
@@ -6662,9 +8781,20 @@
           </a:fontRef>
         </p:style>
         <p:txBody>
-          <a:bodyPr rtlCol="0" anchor="ctr"/>
-          <a:lstStyle/>
-          <a:p/>
+          <a:bodyPr rtlCol="0" anchor="ctr" lIns="0" rIns="0" tIns="0" bIns="0"/>
+          <a:lstStyle/>
+          <a:p>
+            <a:pPr algn="ctr"/>
+            <a:r>
+              <a:rPr sz="1600" b="1">
+                <a:solidFill>
+                  <a:srgbClr val="FFFFFF"/>
+                </a:solidFill>
+                <a:latin typeface="Calibri"/>
+              </a:rPr>
+              <a:t>1</a:t>
+            </a:r>
+          </a:p>
         </p:txBody>
       </p:sp>
       <p:sp>
@@ -6675,8 +8805,8 @@
         </p:nvSpPr>
         <p:spPr>
           <a:xfrm>
-            <a:off x="777240" y="1600200"/>
-            <a:ext cx="4907127" cy="640080"/>
+            <a:off x="1371600" y="1645920"/>
+            <a:ext cx="10271455" cy="1188720"/>
           </a:xfrm>
           <a:prstGeom prst="rect">
             <a:avLst/>
@@ -6684,40 +8814,38 @@
           <a:noFill/>
         </p:spPr>
         <p:txBody>
-          <a:bodyPr wrap="square" anchor="ctr" lIns="0" rIns="0" tIns="0" bIns="0"/>
+          <a:bodyPr wrap="square" anchor="t" lIns="0" rIns="0" tIns="0" bIns="0"/>
           <a:lstStyle/>
           <a:p>
             <a:pPr algn="l"/>
             <a:r>
-              <a:rPr sz="2000" b="1" i="0">
-                <a:solidFill>
-                  <a:srgbClr val="FFFFFF"/>
-                </a:solidFill>
-                <a:latin typeface="Calibri"/>
-              </a:rPr>
-              <a:t>Fluid flow</a:t>
-            </a:r>
-          </a:p>
-        </p:txBody>
-      </p:sp>
-      <p:sp>
-        <p:nvSpPr>
-          <p:cNvPr id="8" name="Rounded Rectangle 7"/>
+              <a:rPr sz="2400" b="0" i="0">
+                <a:solidFill>
+                  <a:srgbClr val="202122"/>
+                </a:solidFill>
+                <a:latin typeface="Calibri"/>
+              </a:rPr>
+              <a:t>What is a uniformly distributed load?</a:t>
+            </a:r>
+          </a:p>
+        </p:txBody>
+      </p:sp>
+      <p:sp>
+        <p:nvSpPr>
+          <p:cNvPr id="8" name="Oval 7"/>
           <p:cNvSpPr/>
           <p:nvPr/>
         </p:nvSpPr>
         <p:spPr>
           <a:xfrm>
-            <a:off x="548640" y="2377440"/>
-            <a:ext cx="5364327" cy="3794760"/>
-          </a:xfrm>
-          <a:prstGeom prst="roundRect">
-            <a:avLst>
-              <a:gd name="adj" fmla="val 4000"/>
-            </a:avLst>
+            <a:off x="548640" y="3108960"/>
+            <a:ext cx="502920" cy="502920"/>
+          </a:xfrm>
+          <a:prstGeom prst="ellipse">
+            <a:avLst/>
           </a:prstGeom>
           <a:solidFill>
-            <a:srgbClr val="EAF3FF"/>
+            <a:srgbClr val="E0463A"/>
           </a:solidFill>
           <a:ln>
             <a:noFill/>
@@ -6739,9 +8867,20 @@
           </a:fontRef>
         </p:style>
         <p:txBody>
-          <a:bodyPr rtlCol="0" anchor="ctr"/>
-          <a:lstStyle/>
-          <a:p/>
+          <a:bodyPr rtlCol="0" anchor="ctr" lIns="0" rIns="0" tIns="0" bIns="0"/>
+          <a:lstStyle/>
+          <a:p>
+            <a:pPr algn="ctr"/>
+            <a:r>
+              <a:rPr sz="1600" b="1">
+                <a:solidFill>
+                  <a:srgbClr val="FFFFFF"/>
+                </a:solidFill>
+                <a:latin typeface="Calibri"/>
+              </a:rPr>
+              <a:t>2</a:t>
+            </a:r>
+          </a:p>
         </p:txBody>
       </p:sp>
       <p:sp>
@@ -6752,8 +8891,8 @@
         </p:nvSpPr>
         <p:spPr>
           <a:xfrm>
-            <a:off x="822959" y="2606040"/>
-            <a:ext cx="4815687" cy="3337560"/>
+            <a:off x="1371600" y="3063240"/>
+            <a:ext cx="10271455" cy="1188720"/>
           </a:xfrm>
           <a:prstGeom prst="rect">
             <a:avLst/>
@@ -6761,150 +8900,38 @@
           <a:noFill/>
         </p:spPr>
         <p:txBody>
-          <a:bodyPr wrap="square" lIns="0" rIns="0" tIns="0" bIns="0">
-            <a:spAutoFit/>
-          </a:bodyPr>
-          <a:lstStyle/>
-          <a:p>
-            <a:pPr marL="274320" indent="-274320">
-              <a:spcAft>
-                <a:spcPts val="990"/>
-              </a:spcAft>
-              <a:buClr>
-                <a:srgbClr val="0645AD"/>
-              </a:buClr>
-              <a:buFont typeface="Arial"/>
-              <a:buChar char="•"/>
-            </a:pPr>
-            <a:r>
-              <a:rPr sz="2200" b="1">
+          <a:bodyPr wrap="square" anchor="t" lIns="0" rIns="0" tIns="0" bIns="0"/>
+          <a:lstStyle/>
+          <a:p>
+            <a:pPr algn="l"/>
+            <a:r>
+              <a:rPr sz="2400" b="0" i="0">
                 <a:solidFill>
                   <a:srgbClr val="202122"/>
                 </a:solidFill>
                 <a:latin typeface="Calibri"/>
               </a:rPr>
-              <a:t>Laminar:</a:t>
-            </a:r>
-            <a:r>
-              <a:rPr sz="2200" b="0">
-                <a:solidFill>
-                  <a:srgbClr val="202122"/>
-                </a:solidFill>
-                <a:latin typeface="Calibri"/>
-              </a:rPr>
-              <a:t> smooth parallel layers</a:t>
-            </a:r>
-          </a:p>
-          <a:p>
-            <a:pPr marL="274320" indent="-274320">
-              <a:spcAft>
-                <a:spcPts val="990"/>
-              </a:spcAft>
-              <a:buClr>
-                <a:srgbClr val="0645AD"/>
-              </a:buClr>
-              <a:buFont typeface="Arial"/>
-              <a:buChar char="•"/>
-            </a:pPr>
-            <a:r>
-              <a:rPr sz="2200" b="1">
-                <a:solidFill>
-                  <a:srgbClr val="202122"/>
-                </a:solidFill>
-                <a:latin typeface="Calibri"/>
-              </a:rPr>
-              <a:t>Turbulent:</a:t>
-            </a:r>
-            <a:r>
-              <a:rPr sz="2200" b="0">
-                <a:solidFill>
-                  <a:srgbClr val="202122"/>
-                </a:solidFill>
-                <a:latin typeface="Calibri"/>
-              </a:rPr>
-              <a:t> chaotic mixing</a:t>
-            </a:r>
-          </a:p>
-          <a:p>
-            <a:pPr marL="274320" indent="-274320">
-              <a:spcAft>
-                <a:spcPts val="990"/>
-              </a:spcAft>
-              <a:buClr>
-                <a:srgbClr val="0645AD"/>
-              </a:buClr>
-              <a:buFont typeface="Arial"/>
-              <a:buChar char="•"/>
-            </a:pPr>
-            <a:r>
-              <a:rPr sz="2200" b="1">
-                <a:solidFill>
-                  <a:srgbClr val="202122"/>
-                </a:solidFill>
-                <a:latin typeface="Calibri"/>
-              </a:rPr>
-              <a:t>Separation points:</a:t>
-            </a:r>
-            <a:r>
-              <a:rPr sz="2200" b="0">
-                <a:solidFill>
-                  <a:srgbClr val="202122"/>
-                </a:solidFill>
-                <a:latin typeface="Calibri"/>
-              </a:rPr>
-              <a:t> where flow leaves the surface</a:t>
-            </a:r>
-          </a:p>
-          <a:p>
-            <a:pPr marL="274320" indent="-274320">
-              <a:spcAft>
-                <a:spcPts val="990"/>
-              </a:spcAft>
-              <a:buClr>
-                <a:srgbClr val="0645AD"/>
-              </a:buClr>
-              <a:buFont typeface="Arial"/>
-              <a:buChar char="•"/>
-            </a:pPr>
-            <a:r>
-              <a:rPr sz="2200" b="1">
-                <a:solidFill>
-                  <a:srgbClr val="202122"/>
-                </a:solidFill>
-                <a:latin typeface="Calibri"/>
-              </a:rPr>
-              <a:t>Vortices:</a:t>
-            </a:r>
-            <a:r>
-              <a:rPr sz="2200" b="0">
-                <a:solidFill>
-                  <a:srgbClr val="202122"/>
-                </a:solidFill>
-                <a:latin typeface="Calibri"/>
-              </a:rPr>
-              <a:t> swirling flow behind objects</a:t>
-            </a:r>
-          </a:p>
-        </p:txBody>
-      </p:sp>
-      <p:sp>
-        <p:nvSpPr>
-          <p:cNvPr id="10" name="Rounded Rectangle 9"/>
+              <a:t>Why are dynamic loads a fatigue risk?</a:t>
+            </a:r>
+          </a:p>
+        </p:txBody>
+      </p:sp>
+      <p:sp>
+        <p:nvSpPr>
+          <p:cNvPr id="10" name="Oval 9"/>
           <p:cNvSpPr/>
           <p:nvPr/>
         </p:nvSpPr>
         <p:spPr>
           <a:xfrm>
-            <a:off x="6278727" y="1600200"/>
-            <a:ext cx="5364327" cy="640080"/>
-          </a:xfrm>
-          <a:prstGeom prst="roundRect">
-            <a:avLst>
-              <a:gd name="adj" fmla="val 15000"/>
-            </a:avLst>
+            <a:off x="548640" y="4526280"/>
+            <a:ext cx="502920" cy="502920"/>
+          </a:xfrm>
+          <a:prstGeom prst="ellipse">
+            <a:avLst/>
           </a:prstGeom>
           <a:solidFill>
-            <a:srgbClr val="0645AD"/>
+            <a:srgbClr val="E0463A"/>
           </a:solidFill>
           <a:ln>
             <a:noFill/>
@@ -6926,9 +8953,20 @@
           </a:fontRef>
         </p:style>
         <p:txBody>
-          <a:bodyPr rtlCol="0" anchor="ctr"/>
-          <a:lstStyle/>
-          <a:p/>
+          <a:bodyPr rtlCol="0" anchor="ctr" lIns="0" rIns="0" tIns="0" bIns="0"/>
+          <a:lstStyle/>
+          <a:p>
+            <a:pPr algn="ctr"/>
+            <a:r>
+              <a:rPr sz="1600" b="1">
+                <a:solidFill>
+                  <a:srgbClr val="FFFFFF"/>
+                </a:solidFill>
+                <a:latin typeface="Calibri"/>
+              </a:rPr>
+              <a:t>3</a:t>
+            </a:r>
+          </a:p>
         </p:txBody>
       </p:sp>
       <p:sp>
@@ -6939,8 +8977,8 @@
         </p:nvSpPr>
         <p:spPr>
           <a:xfrm>
-            <a:off x="6507327" y="1600200"/>
-            <a:ext cx="4907127" cy="640080"/>
+            <a:off x="1371600" y="4480560"/>
+            <a:ext cx="10271455" cy="1188720"/>
           </a:xfrm>
           <a:prstGeom prst="rect">
             <a:avLst/>
@@ -6948,76 +8986,32 @@
           <a:noFill/>
         </p:spPr>
         <p:txBody>
-          <a:bodyPr wrap="square" anchor="ctr" lIns="0" rIns="0" tIns="0" bIns="0"/>
+          <a:bodyPr wrap="square" anchor="t" lIns="0" rIns="0" tIns="0" bIns="0"/>
           <a:lstStyle/>
           <a:p>
             <a:pPr algn="l"/>
             <a:r>
-              <a:rPr sz="2000" b="1" i="0">
-                <a:solidFill>
-                  <a:srgbClr val="FFFFFF"/>
-                </a:solidFill>
-                <a:latin typeface="Calibri"/>
-              </a:rPr>
-              <a:t>Forces on structures</a:t>
-            </a:r>
-          </a:p>
-        </p:txBody>
-      </p:sp>
-      <p:sp>
-        <p:nvSpPr>
-          <p:cNvPr id="12" name="Rounded Rectangle 11"/>
-          <p:cNvSpPr/>
-          <p:nvPr/>
-        </p:nvSpPr>
-        <p:spPr>
-          <a:xfrm>
-            <a:off x="6278727" y="2377440"/>
-            <a:ext cx="5364327" cy="3794760"/>
-          </a:xfrm>
-          <a:prstGeom prst="roundRect">
-            <a:avLst>
-              <a:gd name="adj" fmla="val 4000"/>
-            </a:avLst>
-          </a:prstGeom>
-          <a:solidFill>
-            <a:srgbClr val="EAF3FF"/>
-          </a:solidFill>
-          <a:ln>
-            <a:noFill/>
-          </a:ln>
-          <a:effectLst/>
-        </p:spPr>
-        <p:style>
-          <a:lnRef idx="1">
-            <a:schemeClr val="accent1"/>
-          </a:lnRef>
-          <a:fillRef idx="3">
-            <a:schemeClr val="accent1"/>
-          </a:fillRef>
-          <a:effectRef idx="2">
-            <a:schemeClr val="accent1"/>
-          </a:effectRef>
-          <a:fontRef idx="minor">
-            <a:schemeClr val="lt1"/>
-          </a:fontRef>
-        </p:style>
-        <p:txBody>
-          <a:bodyPr rtlCol="0" anchor="ctr"/>
-          <a:lstStyle/>
-          <a:p/>
-        </p:txBody>
-      </p:sp>
-      <p:sp>
-        <p:nvSpPr>
-          <p:cNvPr id="13" name="TextBox 12"/>
+              <a:rPr sz="2400" b="0" i="0">
+                <a:solidFill>
+                  <a:srgbClr val="202122"/>
+                </a:solidFill>
+                <a:latin typeface="Calibri"/>
+              </a:rPr>
+              <a:t>What does a bending moment do?</a:t>
+            </a:r>
+          </a:p>
+        </p:txBody>
+      </p:sp>
+      <p:sp>
+        <p:nvSpPr>
+          <p:cNvPr id="12" name="TextBox 11"/>
           <p:cNvSpPr txBox="1"/>
           <p:nvPr/>
         </p:nvSpPr>
         <p:spPr>
           <a:xfrm>
-            <a:off x="6553047" y="2606040"/>
-            <a:ext cx="4815687" cy="3337560"/>
+            <a:off x="548640" y="5852160"/>
+            <a:ext cx="11094415" cy="365760"/>
           </a:xfrm>
           <a:prstGeom prst="rect">
             <a:avLst/>
@@ -7025,128 +9019,18 @@
           <a:noFill/>
         </p:spPr>
         <p:txBody>
-          <a:bodyPr wrap="square" lIns="0" rIns="0" tIns="0" bIns="0">
-            <a:spAutoFit/>
-          </a:bodyPr>
-          <a:lstStyle/>
-          <a:p>
-            <a:pPr marL="274320" indent="-274320">
-              <a:spcAft>
-                <a:spcPts val="990"/>
-              </a:spcAft>
-              <a:buClr>
-                <a:srgbClr val="0645AD"/>
-              </a:buClr>
-              <a:buFont typeface="Arial"/>
-              <a:buChar char="•"/>
-            </a:pPr>
-            <a:r>
-              <a:rPr sz="2200" b="1">
-                <a:solidFill>
-                  <a:srgbClr val="202122"/>
-                </a:solidFill>
-                <a:latin typeface="Calibri"/>
-              </a:rPr>
-              <a:t>Lift:</a:t>
-            </a:r>
-            <a:r>
-              <a:rPr sz="2200" b="0">
-                <a:solidFill>
-                  <a:srgbClr val="202122"/>
-                </a:solidFill>
-                <a:latin typeface="Calibri"/>
-              </a:rPr>
-              <a:t> at right angles to flow</a:t>
-            </a:r>
-          </a:p>
-          <a:p>
-            <a:pPr marL="274320" indent="-274320">
-              <a:spcAft>
-                <a:spcPts val="990"/>
-              </a:spcAft>
-              <a:buClr>
-                <a:srgbClr val="0645AD"/>
-              </a:buClr>
-              <a:buFont typeface="Arial"/>
-              <a:buChar char="•"/>
-            </a:pPr>
-            <a:r>
-              <a:rPr sz="2200" b="1">
-                <a:solidFill>
-                  <a:srgbClr val="202122"/>
-                </a:solidFill>
-                <a:latin typeface="Calibri"/>
-              </a:rPr>
-              <a:t>Drag:</a:t>
-            </a:r>
-            <a:r>
-              <a:rPr sz="2200" b="0">
-                <a:solidFill>
-                  <a:srgbClr val="202122"/>
-                </a:solidFill>
-                <a:latin typeface="Calibri"/>
-              </a:rPr>
-              <a:t> opposes motion</a:t>
-            </a:r>
-          </a:p>
-          <a:p>
-            <a:pPr marL="274320" indent="-274320">
-              <a:spcAft>
-                <a:spcPts val="990"/>
-              </a:spcAft>
-              <a:buClr>
-                <a:srgbClr val="0645AD"/>
-              </a:buClr>
-              <a:buFont typeface="Arial"/>
-              <a:buChar char="•"/>
-            </a:pPr>
-            <a:r>
-              <a:rPr sz="2200" b="1">
-                <a:solidFill>
-                  <a:srgbClr val="202122"/>
-                </a:solidFill>
-                <a:latin typeface="Calibri"/>
-              </a:rPr>
-              <a:t>Thrust:</a:t>
-            </a:r>
-            <a:r>
-              <a:rPr sz="2200" b="0">
-                <a:solidFill>
-                  <a:srgbClr val="202122"/>
-                </a:solidFill>
-                <a:latin typeface="Calibri"/>
-              </a:rPr>
-              <a:t> drives forward</a:t>
-            </a:r>
-          </a:p>
-          <a:p>
-            <a:pPr marL="274320" indent="-274320">
-              <a:spcAft>
-                <a:spcPts val="990"/>
-              </a:spcAft>
-              <a:buClr>
-                <a:srgbClr val="0645AD"/>
-              </a:buClr>
-              <a:buFont typeface="Arial"/>
-              <a:buChar char="•"/>
-            </a:pPr>
-            <a:r>
-              <a:rPr sz="2200" b="1">
-                <a:solidFill>
-                  <a:srgbClr val="202122"/>
-                </a:solidFill>
-                <a:latin typeface="Calibri"/>
-              </a:rPr>
-              <a:t>Turbulence:</a:t>
-            </a:r>
-            <a:r>
-              <a:rPr sz="2200" b="0">
-                <a:solidFill>
-                  <a:srgbClr val="202122"/>
-                </a:solidFill>
-                <a:latin typeface="Calibri"/>
-              </a:rPr>
-              <a:t> fluctuating loads that can cause fatigue</a:t>
+          <a:bodyPr wrap="square" anchor="t" lIns="0" rIns="0" tIns="0" bIns="0"/>
+          <a:lstStyle/>
+          <a:p>
+            <a:pPr algn="l"/>
+            <a:r>
+              <a:rPr sz="1300" b="0" i="1">
+                <a:solidFill>
+                  <a:srgbClr val="54595D"/>
+                </a:solidFill>
+                <a:latin typeface="Calibri"/>
+              </a:rPr>
+              <a:t>Answer on mini whiteboards or in your book. Answers are in the speaker notes.</a:t>
             </a:r>
           </a:p>
         </p:txBody>
@@ -7238,7 +9122,7 @@
                 </a:solidFill>
                 <a:latin typeface="Cambria"/>
               </a:rPr>
-              <a:t>Check your understanding</a:t>
+              <a:t>Service and environmental conditions</a:t>
             </a:r>
           </a:p>
         </p:txBody>
@@ -7311,14 +9195,58 @@
       </p:sp>
       <p:sp>
         <p:nvSpPr>
-          <p:cNvPr id="6" name="Oval 5"/>
+          <p:cNvPr id="6" name="Rounded Rectangle 5"/>
           <p:cNvSpPr/>
           <p:nvPr/>
         </p:nvSpPr>
         <p:spPr>
           <a:xfrm>
-            <a:off x="548640" y="1618488"/>
-            <a:ext cx="411480" cy="411480"/>
+            <a:off x="548640" y="1600200"/>
+            <a:ext cx="5410047" cy="2148840"/>
+          </a:xfrm>
+          <a:prstGeom prst="roundRect">
+            <a:avLst>
+              <a:gd name="adj" fmla="val 6000"/>
+            </a:avLst>
+          </a:prstGeom>
+          <a:solidFill>
+            <a:srgbClr val="EAF3FF"/>
+          </a:solidFill>
+          <a:ln>
+            <a:noFill/>
+          </a:ln>
+          <a:effectLst/>
+        </p:spPr>
+        <p:style>
+          <a:lnRef idx="1">
+            <a:schemeClr val="accent1"/>
+          </a:lnRef>
+          <a:fillRef idx="3">
+            <a:schemeClr val="accent1"/>
+          </a:fillRef>
+          <a:effectRef idx="2">
+            <a:schemeClr val="accent1"/>
+          </a:effectRef>
+          <a:fontRef idx="minor">
+            <a:schemeClr val="lt1"/>
+          </a:fontRef>
+        </p:style>
+        <p:txBody>
+          <a:bodyPr rtlCol="0" anchor="ctr"/>
+          <a:lstStyle/>
+          <a:p/>
+        </p:txBody>
+      </p:sp>
+      <p:sp>
+        <p:nvSpPr>
+          <p:cNvPr id="7" name="Oval 6"/>
+          <p:cNvSpPr/>
+          <p:nvPr/>
+        </p:nvSpPr>
+        <p:spPr>
+          <a:xfrm>
+            <a:off x="777240" y="1828800"/>
+            <a:ext cx="457200" cy="457200"/>
           </a:xfrm>
           <a:prstGeom prst="ellipse">
             <a:avLst/>
@@ -7351,7 +9279,7 @@
           <a:p>
             <a:pPr algn="ctr"/>
             <a:r>
-              <a:rPr sz="1400" b="1">
+              <a:rPr sz="1500" b="1">
                 <a:solidFill>
                   <a:srgbClr val="FFFFFF"/>
                 </a:solidFill>
@@ -7364,14 +9292,14 @@
       </p:sp>
       <p:sp>
         <p:nvSpPr>
-          <p:cNvPr id="7" name="TextBox 6"/>
+          <p:cNvPr id="8" name="TextBox 7"/>
           <p:cNvSpPr txBox="1"/>
           <p:nvPr/>
         </p:nvSpPr>
         <p:spPr>
           <a:xfrm>
-            <a:off x="1234440" y="1600200"/>
-            <a:ext cx="10408615" cy="1030986"/>
+            <a:off x="1371600" y="1801368"/>
+            <a:ext cx="4404207" cy="512064"/>
           </a:xfrm>
           <a:prstGeom prst="rect">
             <a:avLst/>
@@ -7379,32 +9307,109 @@
           <a:noFill/>
         </p:spPr>
         <p:txBody>
+          <a:bodyPr wrap="square" anchor="ctr" lIns="0" rIns="0" tIns="0" bIns="0"/>
+          <a:lstStyle/>
+          <a:p>
+            <a:pPr algn="l"/>
+            <a:r>
+              <a:rPr sz="1900" b="1" i="0">
+                <a:solidFill>
+                  <a:srgbClr val="03306E"/>
+                </a:solidFill>
+                <a:latin typeface="Calibri"/>
+              </a:rPr>
+              <a:t>Chemical attack</a:t>
+            </a:r>
+          </a:p>
+        </p:txBody>
+      </p:sp>
+      <p:sp>
+        <p:nvSpPr>
+          <p:cNvPr id="9" name="TextBox 8"/>
+          <p:cNvSpPr txBox="1"/>
+          <p:nvPr/>
+        </p:nvSpPr>
+        <p:spPr>
+          <a:xfrm>
+            <a:off x="777240" y="2468880"/>
+            <a:ext cx="4952847" cy="1143000"/>
+          </a:xfrm>
+          <a:prstGeom prst="rect">
+            <a:avLst/>
+          </a:prstGeom>
+          <a:noFill/>
+        </p:spPr>
+        <p:txBody>
           <a:bodyPr wrap="square" anchor="t" lIns="0" rIns="0" tIns="0" bIns="0"/>
           <a:lstStyle/>
           <a:p>
             <a:pPr algn="l"/>
             <a:r>
-              <a:rPr sz="2200" b="0" i="0">
+              <a:rPr sz="2000" b="0" i="0">
                 <a:solidFill>
                   <a:srgbClr val="202122"/>
                 </a:solidFill>
                 <a:latin typeface="Calibri"/>
               </a:rPr>
-              <a:t>What is a uniformly distributed load?</a:t>
-            </a:r>
-          </a:p>
-        </p:txBody>
-      </p:sp>
-      <p:sp>
-        <p:nvSpPr>
-          <p:cNvPr id="8" name="Oval 7"/>
+              <a:t>Corrosion reduces strength over time.</a:t>
+            </a:r>
+          </a:p>
+        </p:txBody>
+      </p:sp>
+      <p:sp>
+        <p:nvSpPr>
+          <p:cNvPr id="10" name="Rounded Rectangle 9"/>
           <p:cNvSpPr/>
           <p:nvPr/>
         </p:nvSpPr>
         <p:spPr>
           <a:xfrm>
-            <a:off x="548640" y="2814066"/>
-            <a:ext cx="411480" cy="411480"/>
+            <a:off x="6233007" y="1600200"/>
+            <a:ext cx="5410047" cy="2148840"/>
+          </a:xfrm>
+          <a:prstGeom prst="roundRect">
+            <a:avLst>
+              <a:gd name="adj" fmla="val 6000"/>
+            </a:avLst>
+          </a:prstGeom>
+          <a:solidFill>
+            <a:srgbClr val="EAF3FF"/>
+          </a:solidFill>
+          <a:ln>
+            <a:noFill/>
+          </a:ln>
+          <a:effectLst/>
+        </p:spPr>
+        <p:style>
+          <a:lnRef idx="1">
+            <a:schemeClr val="accent1"/>
+          </a:lnRef>
+          <a:fillRef idx="3">
+            <a:schemeClr val="accent1"/>
+          </a:fillRef>
+          <a:effectRef idx="2">
+            <a:schemeClr val="accent1"/>
+          </a:effectRef>
+          <a:fontRef idx="minor">
+            <a:schemeClr val="lt1"/>
+          </a:fontRef>
+        </p:style>
+        <p:txBody>
+          <a:bodyPr rtlCol="0" anchor="ctr"/>
+          <a:lstStyle/>
+          <a:p/>
+        </p:txBody>
+      </p:sp>
+      <p:sp>
+        <p:nvSpPr>
+          <p:cNvPr id="11" name="Oval 10"/>
+          <p:cNvSpPr/>
+          <p:nvPr/>
+        </p:nvSpPr>
+        <p:spPr>
+          <a:xfrm>
+            <a:off x="6461607" y="1828800"/>
+            <a:ext cx="457200" cy="457200"/>
           </a:xfrm>
           <a:prstGeom prst="ellipse">
             <a:avLst/>
@@ -7437,7 +9442,7 @@
           <a:p>
             <a:pPr algn="ctr"/>
             <a:r>
-              <a:rPr sz="1400" b="1">
+              <a:rPr sz="1500" b="1">
                 <a:solidFill>
                   <a:srgbClr val="FFFFFF"/>
                 </a:solidFill>
@@ -7450,14 +9455,14 @@
       </p:sp>
       <p:sp>
         <p:nvSpPr>
-          <p:cNvPr id="9" name="TextBox 8"/>
+          <p:cNvPr id="12" name="TextBox 11"/>
           <p:cNvSpPr txBox="1"/>
           <p:nvPr/>
         </p:nvSpPr>
         <p:spPr>
           <a:xfrm>
-            <a:off x="1234440" y="2795778"/>
-            <a:ext cx="10408615" cy="1030986"/>
+            <a:off x="7055967" y="1801368"/>
+            <a:ext cx="4404207" cy="512064"/>
           </a:xfrm>
           <a:prstGeom prst="rect">
             <a:avLst/>
@@ -7465,32 +9470,109 @@
           <a:noFill/>
         </p:spPr>
         <p:txBody>
+          <a:bodyPr wrap="square" anchor="ctr" lIns="0" rIns="0" tIns="0" bIns="0"/>
+          <a:lstStyle/>
+          <a:p>
+            <a:pPr algn="l"/>
+            <a:r>
+              <a:rPr sz="1900" b="1" i="0">
+                <a:solidFill>
+                  <a:srgbClr val="03306E"/>
+                </a:solidFill>
+                <a:latin typeface="Calibri"/>
+              </a:rPr>
+              <a:t>Temperature</a:t>
+            </a:r>
+          </a:p>
+        </p:txBody>
+      </p:sp>
+      <p:sp>
+        <p:nvSpPr>
+          <p:cNvPr id="13" name="TextBox 12"/>
+          <p:cNvSpPr txBox="1"/>
+          <p:nvPr/>
+        </p:nvSpPr>
+        <p:spPr>
+          <a:xfrm>
+            <a:off x="6461607" y="2468880"/>
+            <a:ext cx="4952847" cy="1143000"/>
+          </a:xfrm>
+          <a:prstGeom prst="rect">
+            <a:avLst/>
+          </a:prstGeom>
+          <a:noFill/>
+        </p:spPr>
+        <p:txBody>
           <a:bodyPr wrap="square" anchor="t" lIns="0" rIns="0" tIns="0" bIns="0"/>
           <a:lstStyle/>
           <a:p>
             <a:pPr algn="l"/>
             <a:r>
-              <a:rPr sz="2200" b="0" i="0">
+              <a:rPr sz="2000" b="0" i="0">
                 <a:solidFill>
                   <a:srgbClr val="202122"/>
                 </a:solidFill>
                 <a:latin typeface="Calibri"/>
               </a:rPr>
-              <a:t>What causes fatigue?</a:t>
-            </a:r>
-          </a:p>
-        </p:txBody>
-      </p:sp>
-      <p:sp>
-        <p:nvSpPr>
-          <p:cNvPr id="10" name="Oval 9"/>
+              <a:t>Heat softens and expands; cold makes some materials brittle.</a:t>
+            </a:r>
+          </a:p>
+        </p:txBody>
+      </p:sp>
+      <p:sp>
+        <p:nvSpPr>
+          <p:cNvPr id="14" name="Rounded Rectangle 13"/>
           <p:cNvSpPr/>
           <p:nvPr/>
         </p:nvSpPr>
         <p:spPr>
           <a:xfrm>
-            <a:off x="548640" y="4009644"/>
-            <a:ext cx="411480" cy="411480"/>
+            <a:off x="548640" y="4023360"/>
+            <a:ext cx="5410047" cy="2148840"/>
+          </a:xfrm>
+          <a:prstGeom prst="roundRect">
+            <a:avLst>
+              <a:gd name="adj" fmla="val 6000"/>
+            </a:avLst>
+          </a:prstGeom>
+          <a:solidFill>
+            <a:srgbClr val="EAF3FF"/>
+          </a:solidFill>
+          <a:ln>
+            <a:noFill/>
+          </a:ln>
+          <a:effectLst/>
+        </p:spPr>
+        <p:style>
+          <a:lnRef idx="1">
+            <a:schemeClr val="accent1"/>
+          </a:lnRef>
+          <a:fillRef idx="3">
+            <a:schemeClr val="accent1"/>
+          </a:fillRef>
+          <a:effectRef idx="2">
+            <a:schemeClr val="accent1"/>
+          </a:effectRef>
+          <a:fontRef idx="minor">
+            <a:schemeClr val="lt1"/>
+          </a:fontRef>
+        </p:style>
+        <p:txBody>
+          <a:bodyPr rtlCol="0" anchor="ctr"/>
+          <a:lstStyle/>
+          <a:p/>
+        </p:txBody>
+      </p:sp>
+      <p:sp>
+        <p:nvSpPr>
+          <p:cNvPr id="15" name="Oval 14"/>
+          <p:cNvSpPr/>
+          <p:nvPr/>
+        </p:nvSpPr>
+        <p:spPr>
+          <a:xfrm>
+            <a:off x="777240" y="4251960"/>
+            <a:ext cx="457200" cy="457200"/>
           </a:xfrm>
           <a:prstGeom prst="ellipse">
             <a:avLst/>
@@ -7523,7 +9605,7 @@
           <a:p>
             <a:pPr algn="ctr"/>
             <a:r>
-              <a:rPr sz="1400" b="1">
+              <a:rPr sz="1500" b="1">
                 <a:solidFill>
                   <a:srgbClr val="FFFFFF"/>
                 </a:solidFill>
@@ -7536,14 +9618,14 @@
       </p:sp>
       <p:sp>
         <p:nvSpPr>
-          <p:cNvPr id="11" name="TextBox 10"/>
+          <p:cNvPr id="16" name="TextBox 15"/>
           <p:cNvSpPr txBox="1"/>
           <p:nvPr/>
         </p:nvSpPr>
         <p:spPr>
           <a:xfrm>
-            <a:off x="1234440" y="3991356"/>
-            <a:ext cx="10408615" cy="1030986"/>
+            <a:off x="1371600" y="4224528"/>
+            <a:ext cx="4404207" cy="512064"/>
           </a:xfrm>
           <a:prstGeom prst="rect">
             <a:avLst/>
@@ -7551,32 +9633,109 @@
           <a:noFill/>
         </p:spPr>
         <p:txBody>
+          <a:bodyPr wrap="square" anchor="ctr" lIns="0" rIns="0" tIns="0" bIns="0"/>
+          <a:lstStyle/>
+          <a:p>
+            <a:pPr algn="l"/>
+            <a:r>
+              <a:rPr sz="1900" b="1" i="0">
+                <a:solidFill>
+                  <a:srgbClr val="03306E"/>
+                </a:solidFill>
+                <a:latin typeface="Calibri"/>
+              </a:rPr>
+              <a:t>Functional properties</a:t>
+            </a:r>
+          </a:p>
+        </p:txBody>
+      </p:sp>
+      <p:sp>
+        <p:nvSpPr>
+          <p:cNvPr id="17" name="TextBox 16"/>
+          <p:cNvSpPr txBox="1"/>
+          <p:nvPr/>
+        </p:nvSpPr>
+        <p:spPr>
+          <a:xfrm>
+            <a:off x="777240" y="4892040"/>
+            <a:ext cx="4952847" cy="1143000"/>
+          </a:xfrm>
+          <a:prstGeom prst="rect">
+            <a:avLst/>
+          </a:prstGeom>
+          <a:noFill/>
+        </p:spPr>
+        <p:txBody>
           <a:bodyPr wrap="square" anchor="t" lIns="0" rIns="0" tIns="0" bIns="0"/>
           <a:lstStyle/>
           <a:p>
             <a:pPr algn="l"/>
             <a:r>
-              <a:rPr sz="2200" b="0" i="0">
+              <a:rPr sz="2000" b="0" i="0">
                 <a:solidFill>
                   <a:srgbClr val="202122"/>
                 </a:solidFill>
                 <a:latin typeface="Calibri"/>
               </a:rPr>
-              <a:t>Where does turbulent flow usually start on a blunt object?</a:t>
-            </a:r>
-          </a:p>
-        </p:txBody>
-      </p:sp>
-      <p:sp>
-        <p:nvSpPr>
-          <p:cNvPr id="12" name="Oval 11"/>
+              <a:t>The design must keep working in its environment.</a:t>
+            </a:r>
+          </a:p>
+        </p:txBody>
+      </p:sp>
+      <p:sp>
+        <p:nvSpPr>
+          <p:cNvPr id="18" name="Rounded Rectangle 17"/>
           <p:cNvSpPr/>
           <p:nvPr/>
         </p:nvSpPr>
         <p:spPr>
           <a:xfrm>
-            <a:off x="548640" y="5205221"/>
-            <a:ext cx="411480" cy="411480"/>
+            <a:off x="6233007" y="4023360"/>
+            <a:ext cx="5410047" cy="2148840"/>
+          </a:xfrm>
+          <a:prstGeom prst="roundRect">
+            <a:avLst>
+              <a:gd name="adj" fmla="val 6000"/>
+            </a:avLst>
+          </a:prstGeom>
+          <a:solidFill>
+            <a:srgbClr val="EAF3FF"/>
+          </a:solidFill>
+          <a:ln>
+            <a:noFill/>
+          </a:ln>
+          <a:effectLst/>
+        </p:spPr>
+        <p:style>
+          <a:lnRef idx="1">
+            <a:schemeClr val="accent1"/>
+          </a:lnRef>
+          <a:fillRef idx="3">
+            <a:schemeClr val="accent1"/>
+          </a:fillRef>
+          <a:effectRef idx="2">
+            <a:schemeClr val="accent1"/>
+          </a:effectRef>
+          <a:fontRef idx="minor">
+            <a:schemeClr val="lt1"/>
+          </a:fontRef>
+        </p:style>
+        <p:txBody>
+          <a:bodyPr rtlCol="0" anchor="ctr"/>
+          <a:lstStyle/>
+          <a:p/>
+        </p:txBody>
+      </p:sp>
+      <p:sp>
+        <p:nvSpPr>
+          <p:cNvPr id="19" name="Oval 18"/>
+          <p:cNvSpPr/>
+          <p:nvPr/>
+        </p:nvSpPr>
+        <p:spPr>
+          <a:xfrm>
+            <a:off x="6461607" y="4251960"/>
+            <a:ext cx="457200" cy="457200"/>
           </a:xfrm>
           <a:prstGeom prst="ellipse">
             <a:avLst/>
@@ -7609,7 +9768,7 @@
           <a:p>
             <a:pPr algn="ctr"/>
             <a:r>
-              <a:rPr sz="1400" b="1">
+              <a:rPr sz="1500" b="1">
                 <a:solidFill>
                   <a:srgbClr val="FFFFFF"/>
                 </a:solidFill>
@@ -7622,14 +9781,14 @@
       </p:sp>
       <p:sp>
         <p:nvSpPr>
-          <p:cNvPr id="13" name="TextBox 12"/>
+          <p:cNvPr id="20" name="TextBox 19"/>
           <p:cNvSpPr txBox="1"/>
           <p:nvPr/>
         </p:nvSpPr>
         <p:spPr>
           <a:xfrm>
-            <a:off x="1234440" y="5186933"/>
-            <a:ext cx="10408615" cy="1030986"/>
+            <a:off x="7055967" y="4224528"/>
+            <a:ext cx="4404207" cy="512064"/>
           </a:xfrm>
           <a:prstGeom prst="rect">
             <a:avLst/>
@@ -7637,18 +9796,51 @@
           <a:noFill/>
         </p:spPr>
         <p:txBody>
+          <a:bodyPr wrap="square" anchor="ctr" lIns="0" rIns="0" tIns="0" bIns="0"/>
+          <a:lstStyle/>
+          <a:p>
+            <a:pPr algn="l"/>
+            <a:r>
+              <a:rPr sz="1900" b="1" i="0">
+                <a:solidFill>
+                  <a:srgbClr val="03306E"/>
+                </a:solidFill>
+                <a:latin typeface="Calibri"/>
+              </a:rPr>
+              <a:t>Other factors</a:t>
+            </a:r>
+          </a:p>
+        </p:txBody>
+      </p:sp>
+      <p:sp>
+        <p:nvSpPr>
+          <p:cNvPr id="21" name="TextBox 20"/>
+          <p:cNvSpPr txBox="1"/>
+          <p:nvPr/>
+        </p:nvSpPr>
+        <p:spPr>
+          <a:xfrm>
+            <a:off x="6461607" y="4892040"/>
+            <a:ext cx="4952847" cy="1143000"/>
+          </a:xfrm>
+          <a:prstGeom prst="rect">
+            <a:avLst/>
+          </a:prstGeom>
+          <a:noFill/>
+        </p:spPr>
+        <p:txBody>
           <a:bodyPr wrap="square" anchor="t" lIns="0" rIns="0" tIns="0" bIns="0"/>
           <a:lstStyle/>
           <a:p>
             <a:pPr algn="l"/>
             <a:r>
-              <a:rPr sz="2200" b="0" i="0">
+              <a:rPr sz="2000" b="0" i="0">
                 <a:solidFill>
                   <a:srgbClr val="202122"/>
                 </a:solidFill>
                 <a:latin typeface="Calibri"/>
               </a:rPr>
-              <a:t>Why can vortices damage structures?</a:t>
+              <a:t>Manufacturing method and material choice shape the outcome.</a:t>
             </a:r>
           </a:p>
         </p:txBody>
@@ -7740,7 +9932,7 @@
                 </a:solidFill>
                 <a:latin typeface="Cambria"/>
               </a:rPr>
-              <a:t>Answers</a:t>
+              <a:t>Aerodynamics</a:t>
             </a:r>
           </a:p>
         </p:txBody>
@@ -7813,14 +10005,129 @@
       </p:sp>
       <p:sp>
         <p:nvSpPr>
-          <p:cNvPr id="6" name="Oval 5"/>
+          <p:cNvPr id="6" name="TextBox 5"/>
+          <p:cNvSpPr txBox="1"/>
+          <p:nvPr/>
+        </p:nvSpPr>
+        <p:spPr>
+          <a:xfrm>
+            <a:off x="548640" y="1554480"/>
+            <a:ext cx="6720840" cy="4617720"/>
+          </a:xfrm>
+          <a:prstGeom prst="rect">
+            <a:avLst/>
+          </a:prstGeom>
+          <a:noFill/>
+        </p:spPr>
+        <p:txBody>
+          <a:bodyPr wrap="square" lIns="0" rIns="0" tIns="0" bIns="0">
+            <a:spAutoFit/>
+          </a:bodyPr>
+          <a:lstStyle/>
+          <a:p>
+            <a:pPr>
+              <a:spcAft>
+                <a:spcPts val="1320"/>
+              </a:spcAft>
+            </a:pPr>
+            <a:r>
+              <a:rPr sz="2200" b="0">
+                <a:solidFill>
+                  <a:srgbClr val="202122"/>
+                </a:solidFill>
+                <a:latin typeface="Calibri"/>
+              </a:rPr>
+              <a:t>Laminar flow moves in smooth, parallel layers. Turbulent flow is chaotic. Where flow can't follow a surface it separates, creating vortices behind the object.</a:t>
+            </a:r>
+          </a:p>
+          <a:p>
+            <a:pPr>
+              <a:spcAft>
+                <a:spcPts val="1320"/>
+              </a:spcAft>
+            </a:pPr>
+            <a:r>
+              <a:rPr sz="2200" b="0">
+                <a:solidFill>
+                  <a:srgbClr val="202122"/>
+                </a:solidFill>
+                <a:latin typeface="Calibri"/>
+              </a:rPr>
+              <a:t>Lift acts at right angles to the flow, created by pressure differences. Drag opposes motion. Thrust drives an object forward. Turbulence creates fluctuating loads that can cause vibration and fatigue.</a:t>
+            </a:r>
+          </a:p>
+          <a:p>
+            <a:pPr>
+              <a:spcAft>
+                <a:spcPts val="1320"/>
+              </a:spcAft>
+            </a:pPr>
+            <a:r>
+              <a:rPr sz="2200" b="0">
+                <a:solidFill>
+                  <a:srgbClr val="202122"/>
+                </a:solidFill>
+                <a:latin typeface="Calibri"/>
+              </a:rPr>
+              <a:t>Designers read 2D flow diagrams around shapes to predict these forces on structures such as masts, bridges, vehicles and wind turbines.</a:t>
+            </a:r>
+          </a:p>
+        </p:txBody>
+      </p:sp>
+      <p:sp>
+        <p:nvSpPr>
+          <p:cNvPr id="7" name="Rounded Rectangle 6"/>
           <p:cNvSpPr/>
           <p:nvPr/>
         </p:nvSpPr>
         <p:spPr>
           <a:xfrm>
-            <a:off x="548640" y="1618488"/>
-            <a:ext cx="411480" cy="411480"/>
+            <a:off x="7772400" y="1554480"/>
+            <a:ext cx="3867912" cy="4526280"/>
+          </a:xfrm>
+          <a:prstGeom prst="roundRect">
+            <a:avLst>
+              <a:gd name="adj" fmla="val 8000"/>
+            </a:avLst>
+          </a:prstGeom>
+          <a:solidFill>
+            <a:srgbClr val="03306E"/>
+          </a:solidFill>
+          <a:ln>
+            <a:noFill/>
+          </a:ln>
+          <a:effectLst/>
+        </p:spPr>
+        <p:style>
+          <a:lnRef idx="1">
+            <a:schemeClr val="accent1"/>
+          </a:lnRef>
+          <a:fillRef idx="3">
+            <a:schemeClr val="accent1"/>
+          </a:fillRef>
+          <a:effectRef idx="2">
+            <a:schemeClr val="accent1"/>
+          </a:effectRef>
+          <a:fontRef idx="minor">
+            <a:schemeClr val="lt1"/>
+          </a:fontRef>
+        </p:style>
+        <p:txBody>
+          <a:bodyPr rtlCol="0" anchor="ctr"/>
+          <a:lstStyle/>
+          <a:p/>
+        </p:txBody>
+      </p:sp>
+      <p:sp>
+        <p:nvSpPr>
+          <p:cNvPr id="8" name="Oval 7"/>
+          <p:cNvSpPr/>
+          <p:nvPr/>
+        </p:nvSpPr>
+        <p:spPr>
+          <a:xfrm>
+            <a:off x="8046720" y="1828800"/>
+            <a:ext cx="548640" cy="548640"/>
           </a:xfrm>
           <a:prstGeom prst="ellipse">
             <a:avLst/>
@@ -7853,110 +10160,13 @@
           <a:p>
             <a:pPr algn="ctr"/>
             <a:r>
-              <a:rPr sz="1400" b="1">
+              <a:rPr sz="1300" b="1">
                 <a:solidFill>
                   <a:srgbClr val="FFFFFF"/>
                 </a:solidFill>
                 <a:latin typeface="Calibri"/>
               </a:rPr>
-              <a:t>1</a:t>
-            </a:r>
-          </a:p>
-        </p:txBody>
-      </p:sp>
-      <p:sp>
-        <p:nvSpPr>
-          <p:cNvPr id="7" name="TextBox 6"/>
-          <p:cNvSpPr txBox="1"/>
-          <p:nvPr/>
-        </p:nvSpPr>
-        <p:spPr>
-          <a:xfrm>
-            <a:off x="1234440" y="1600200"/>
-            <a:ext cx="10408615" cy="1030986"/>
-          </a:xfrm>
-          <a:prstGeom prst="rect">
-            <a:avLst/>
-          </a:prstGeom>
-          <a:noFill/>
-        </p:spPr>
-        <p:txBody>
-          <a:bodyPr wrap="square" anchor="t" lIns="0" rIns="0" tIns="0" bIns="0"/>
-          <a:lstStyle/>
-          <a:p>
-            <a:pPr algn="l"/>
-            <a:r>
-              <a:rPr sz="1800" b="0" i="0">
-                <a:solidFill>
-                  <a:srgbClr val="54595D"/>
-                </a:solidFill>
-                <a:latin typeface="Calibri"/>
-              </a:rPr>
-              <a:t>What is a uniformly distributed load?</a:t>
-            </a:r>
-          </a:p>
-          <a:p>
-            <a:r>
-              <a:rPr sz="1800" b="1">
-                <a:solidFill>
-                  <a:srgbClr val="03306E"/>
-                </a:solidFill>
-                <a:latin typeface="Calibri"/>
-              </a:rPr>
-              <a:t>A load spread evenly along a length.</a:t>
-            </a:r>
-          </a:p>
-        </p:txBody>
-      </p:sp>
-      <p:sp>
-        <p:nvSpPr>
-          <p:cNvPr id="8" name="Oval 7"/>
-          <p:cNvSpPr/>
-          <p:nvPr/>
-        </p:nvSpPr>
-        <p:spPr>
-          <a:xfrm>
-            <a:off x="548640" y="2814066"/>
-            <a:ext cx="411480" cy="411480"/>
-          </a:xfrm>
-          <a:prstGeom prst="ellipse">
-            <a:avLst/>
-          </a:prstGeom>
-          <a:solidFill>
-            <a:srgbClr val="E0463A"/>
-          </a:solidFill>
-          <a:ln>
-            <a:noFill/>
-          </a:ln>
-          <a:effectLst/>
-        </p:spPr>
-        <p:style>
-          <a:lnRef idx="1">
-            <a:schemeClr val="accent1"/>
-          </a:lnRef>
-          <a:fillRef idx="3">
-            <a:schemeClr val="accent1"/>
-          </a:fillRef>
-          <a:effectRef idx="2">
-            <a:schemeClr val="accent1"/>
-          </a:effectRef>
-          <a:fontRef idx="minor">
-            <a:schemeClr val="lt1"/>
-          </a:fontRef>
-        </p:style>
-        <p:txBody>
-          <a:bodyPr rtlCol="0" anchor="ctr" lIns="0" rIns="0" tIns="0" bIns="0"/>
-          <a:lstStyle/>
-          <a:p>
-            <a:pPr algn="ctr"/>
-            <a:r>
-              <a:rPr sz="1400" b="1">
-                <a:solidFill>
-                  <a:srgbClr val="FFFFFF"/>
-                </a:solidFill>
-                <a:latin typeface="Calibri"/>
-              </a:rPr>
-              <a:t>2</a:t>
+              <a:t>e.g.</a:t>
             </a:r>
           </a:p>
         </p:txBody>
@@ -7969,8 +10179,8 @@
         </p:nvSpPr>
         <p:spPr>
           <a:xfrm>
-            <a:off x="1234440" y="2795778"/>
-            <a:ext cx="10408615" cy="1030986"/>
+            <a:off x="8046720" y="2560320"/>
+            <a:ext cx="3291840" cy="365760"/>
           </a:xfrm>
           <a:prstGeom prst="rect">
             <a:avLst/>
@@ -7983,218 +10193,46 @@
           <a:p>
             <a:pPr algn="l"/>
             <a:r>
-              <a:rPr sz="1800" b="0" i="0">
-                <a:solidFill>
-                  <a:srgbClr val="54595D"/>
-                </a:solidFill>
-                <a:latin typeface="Calibri"/>
-              </a:rPr>
-              <a:t>What causes fatigue?</a:t>
-            </a:r>
-          </a:p>
-          <a:p>
-            <a:r>
-              <a:rPr sz="1800" b="1">
-                <a:solidFill>
-                  <a:srgbClr val="03306E"/>
-                </a:solidFill>
-                <a:latin typeface="Calibri"/>
-              </a:rPr>
-              <a:t>Repeated or cyclic loading.</a:t>
-            </a:r>
-          </a:p>
-        </p:txBody>
-      </p:sp>
-      <p:sp>
-        <p:nvSpPr>
-          <p:cNvPr id="10" name="Oval 9"/>
-          <p:cNvSpPr/>
-          <p:nvPr/>
-        </p:nvSpPr>
-        <p:spPr>
-          <a:xfrm>
-            <a:off x="548640" y="4009644"/>
-            <a:ext cx="411480" cy="411480"/>
-          </a:xfrm>
-          <a:prstGeom prst="ellipse">
-            <a:avLst/>
-          </a:prstGeom>
-          <a:solidFill>
-            <a:srgbClr val="E0463A"/>
-          </a:solidFill>
-          <a:ln>
-            <a:noFill/>
-          </a:ln>
-          <a:effectLst/>
-        </p:spPr>
-        <p:style>
-          <a:lnRef idx="1">
-            <a:schemeClr val="accent1"/>
-          </a:lnRef>
-          <a:fillRef idx="3">
-            <a:schemeClr val="accent1"/>
-          </a:fillRef>
-          <a:effectRef idx="2">
-            <a:schemeClr val="accent1"/>
-          </a:effectRef>
-          <a:fontRef idx="minor">
-            <a:schemeClr val="lt1"/>
-          </a:fontRef>
-        </p:style>
-        <p:txBody>
-          <a:bodyPr rtlCol="0" anchor="ctr" lIns="0" rIns="0" tIns="0" bIns="0"/>
-          <a:lstStyle/>
-          <a:p>
-            <a:pPr algn="ctr"/>
-            <a:r>
-              <a:rPr sz="1400" b="1">
+              <a:rPr sz="1300" b="1" i="0">
+                <a:solidFill>
+                  <a:srgbClr val="A9C8F0"/>
+                </a:solidFill>
+                <a:latin typeface="Calibri"/>
+              </a:rPr>
+              <a:t>EXAMPLE</a:t>
+            </a:r>
+          </a:p>
+        </p:txBody>
+      </p:sp>
+      <p:sp>
+        <p:nvSpPr>
+          <p:cNvPr id="10" name="TextBox 9"/>
+          <p:cNvSpPr txBox="1"/>
+          <p:nvPr/>
+        </p:nvSpPr>
+        <p:spPr>
+          <a:xfrm>
+            <a:off x="8046720" y="2971800"/>
+            <a:ext cx="3291840" cy="2971800"/>
+          </a:xfrm>
+          <a:prstGeom prst="rect">
+            <a:avLst/>
+          </a:prstGeom>
+          <a:noFill/>
+        </p:spPr>
+        <p:txBody>
+          <a:bodyPr wrap="square" anchor="t" lIns="0" rIns="0" tIns="0" bIns="0"/>
+          <a:lstStyle/>
+          <a:p>
+            <a:pPr algn="l"/>
+            <a:r>
+              <a:rPr sz="1900" b="0" i="0">
                 <a:solidFill>
                   <a:srgbClr val="FFFFFF"/>
                 </a:solidFill>
-                <a:latin typeface="Calibri"/>
-              </a:rPr>
-              <a:t>3</a:t>
-            </a:r>
-          </a:p>
-        </p:txBody>
-      </p:sp>
-      <p:sp>
-        <p:nvSpPr>
-          <p:cNvPr id="11" name="TextBox 10"/>
-          <p:cNvSpPr txBox="1"/>
-          <p:nvPr/>
-        </p:nvSpPr>
-        <p:spPr>
-          <a:xfrm>
-            <a:off x="1234440" y="3991356"/>
-            <a:ext cx="10408615" cy="1030986"/>
-          </a:xfrm>
-          <a:prstGeom prst="rect">
-            <a:avLst/>
-          </a:prstGeom>
-          <a:noFill/>
-        </p:spPr>
-        <p:txBody>
-          <a:bodyPr wrap="square" anchor="t" lIns="0" rIns="0" tIns="0" bIns="0"/>
-          <a:lstStyle/>
-          <a:p>
-            <a:pPr algn="l"/>
-            <a:r>
-              <a:rPr sz="1800" b="0" i="0">
-                <a:solidFill>
-                  <a:srgbClr val="54595D"/>
-                </a:solidFill>
-                <a:latin typeface="Calibri"/>
-              </a:rPr>
-              <a:t>Where does turbulent flow usually start on a blunt object?</a:t>
-            </a:r>
-          </a:p>
-          <a:p>
-            <a:r>
-              <a:rPr sz="1800" b="1">
-                <a:solidFill>
-                  <a:srgbClr val="03306E"/>
-                </a:solidFill>
-                <a:latin typeface="Calibri"/>
-              </a:rPr>
-              <a:t>At the separation point.</a:t>
-            </a:r>
-          </a:p>
-        </p:txBody>
-      </p:sp>
-      <p:sp>
-        <p:nvSpPr>
-          <p:cNvPr id="12" name="Oval 11"/>
-          <p:cNvSpPr/>
-          <p:nvPr/>
-        </p:nvSpPr>
-        <p:spPr>
-          <a:xfrm>
-            <a:off x="548640" y="5205221"/>
-            <a:ext cx="411480" cy="411480"/>
-          </a:xfrm>
-          <a:prstGeom prst="ellipse">
-            <a:avLst/>
-          </a:prstGeom>
-          <a:solidFill>
-            <a:srgbClr val="E0463A"/>
-          </a:solidFill>
-          <a:ln>
-            <a:noFill/>
-          </a:ln>
-          <a:effectLst/>
-        </p:spPr>
-        <p:style>
-          <a:lnRef idx="1">
-            <a:schemeClr val="accent1"/>
-          </a:lnRef>
-          <a:fillRef idx="3">
-            <a:schemeClr val="accent1"/>
-          </a:fillRef>
-          <a:effectRef idx="2">
-            <a:schemeClr val="accent1"/>
-          </a:effectRef>
-          <a:fontRef idx="minor">
-            <a:schemeClr val="lt1"/>
-          </a:fontRef>
-        </p:style>
-        <p:txBody>
-          <a:bodyPr rtlCol="0" anchor="ctr" lIns="0" rIns="0" tIns="0" bIns="0"/>
-          <a:lstStyle/>
-          <a:p>
-            <a:pPr algn="ctr"/>
-            <a:r>
-              <a:rPr sz="1400" b="1">
-                <a:solidFill>
-                  <a:srgbClr val="FFFFFF"/>
-                </a:solidFill>
-                <a:latin typeface="Calibri"/>
-              </a:rPr>
-              <a:t>4</a:t>
-            </a:r>
-          </a:p>
-        </p:txBody>
-      </p:sp>
-      <p:sp>
-        <p:nvSpPr>
-          <p:cNvPr id="13" name="TextBox 12"/>
-          <p:cNvSpPr txBox="1"/>
-          <p:nvPr/>
-        </p:nvSpPr>
-        <p:spPr>
-          <a:xfrm>
-            <a:off x="1234440" y="5186933"/>
-            <a:ext cx="10408615" cy="1030986"/>
-          </a:xfrm>
-          <a:prstGeom prst="rect">
-            <a:avLst/>
-          </a:prstGeom>
-          <a:noFill/>
-        </p:spPr>
-        <p:txBody>
-          <a:bodyPr wrap="square" anchor="t" lIns="0" rIns="0" tIns="0" bIns="0"/>
-          <a:lstStyle/>
-          <a:p>
-            <a:pPr algn="l"/>
-            <a:r>
-              <a:rPr sz="1800" b="0" i="0">
-                <a:solidFill>
-                  <a:srgbClr val="54595D"/>
-                </a:solidFill>
-                <a:latin typeface="Calibri"/>
-              </a:rPr>
-              <a:t>Why can vortices damage structures?</a:t>
-            </a:r>
-          </a:p>
-          <a:p>
-            <a:r>
-              <a:rPr sz="1800" b="1">
-                <a:solidFill>
-                  <a:srgbClr val="03306E"/>
-                </a:solidFill>
-                <a:latin typeface="Calibri"/>
-              </a:rPr>
-              <a:t>They create fluctuating forces that cause vibration and fatigue.</a:t>
+                <a:latin typeface="Cambria"/>
+              </a:rPr>
+              <a:t>Tall chimneys have a spiral strake that breaks up vortices, stopping wind making them oscillate.</a:t>
             </a:r>
           </a:p>
         </p:txBody>
@@ -8286,7 +10324,7 @@
                 </a:solidFill>
                 <a:latin typeface="Cambria"/>
               </a:rPr>
-              <a:t>Activity: Load a sign post</a:t>
+              <a:t>Aerodynamics</a:t>
             </a:r>
           </a:p>
         </p:txBody>
@@ -8365,16 +10403,16 @@
         </p:nvSpPr>
         <p:spPr>
           <a:xfrm>
-            <a:off x="548640" y="1508760"/>
-            <a:ext cx="2011680" cy="457200"/>
+            <a:off x="548640" y="1600200"/>
+            <a:ext cx="5364327" cy="640080"/>
           </a:xfrm>
           <a:prstGeom prst="roundRect">
             <a:avLst>
-              <a:gd name="adj" fmla="val 50000"/>
+              <a:gd name="adj" fmla="val 15000"/>
             </a:avLst>
           </a:prstGeom>
           <a:solidFill>
-            <a:srgbClr val="E0463A"/>
+            <a:srgbClr val="03306E"/>
           </a:solidFill>
           <a:ln>
             <a:noFill/>
@@ -8409,8 +10447,8 @@
         </p:nvSpPr>
         <p:spPr>
           <a:xfrm>
-            <a:off x="548640" y="1508760"/>
-            <a:ext cx="2011680" cy="457200"/>
+            <a:off x="777240" y="1600200"/>
+            <a:ext cx="4907127" cy="640080"/>
           </a:xfrm>
           <a:prstGeom prst="rect">
             <a:avLst/>
@@ -8421,29 +10459,73 @@
           <a:bodyPr wrap="square" anchor="ctr" lIns="0" rIns="0" tIns="0" bIns="0"/>
           <a:lstStyle/>
           <a:p>
-            <a:pPr algn="ctr"/>
-            <a:r>
-              <a:rPr sz="1400" b="1" i="0">
+            <a:pPr algn="l"/>
+            <a:r>
+              <a:rPr sz="2000" b="1" i="0">
                 <a:solidFill>
                   <a:srgbClr val="FFFFFF"/>
                 </a:solidFill>
                 <a:latin typeface="Calibri"/>
               </a:rPr>
-              <a:t>25 minutes</a:t>
-            </a:r>
-          </a:p>
-        </p:txBody>
-      </p:sp>
-      <p:sp>
-        <p:nvSpPr>
-          <p:cNvPr id="8" name="TextBox 7"/>
+              <a:t>Fluid flow</a:t>
+            </a:r>
+          </a:p>
+        </p:txBody>
+      </p:sp>
+      <p:sp>
+        <p:nvSpPr>
+          <p:cNvPr id="8" name="Rounded Rectangle 7"/>
+          <p:cNvSpPr/>
+          <p:nvPr/>
+        </p:nvSpPr>
+        <p:spPr>
+          <a:xfrm>
+            <a:off x="548640" y="2377440"/>
+            <a:ext cx="5364327" cy="3794760"/>
+          </a:xfrm>
+          <a:prstGeom prst="roundRect">
+            <a:avLst>
+              <a:gd name="adj" fmla="val 4000"/>
+            </a:avLst>
+          </a:prstGeom>
+          <a:solidFill>
+            <a:srgbClr val="EAF3FF"/>
+          </a:solidFill>
+          <a:ln>
+            <a:noFill/>
+          </a:ln>
+          <a:effectLst/>
+        </p:spPr>
+        <p:style>
+          <a:lnRef idx="1">
+            <a:schemeClr val="accent1"/>
+          </a:lnRef>
+          <a:fillRef idx="3">
+            <a:schemeClr val="accent1"/>
+          </a:fillRef>
+          <a:effectRef idx="2">
+            <a:schemeClr val="accent1"/>
+          </a:effectRef>
+          <a:fontRef idx="minor">
+            <a:schemeClr val="lt1"/>
+          </a:fontRef>
+        </p:style>
+        <p:txBody>
+          <a:bodyPr rtlCol="0" anchor="ctr"/>
+          <a:lstStyle/>
+          <a:p/>
+        </p:txBody>
+      </p:sp>
+      <p:sp>
+        <p:nvSpPr>
+          <p:cNvPr id="9" name="TextBox 8"/>
           <p:cNvSpPr txBox="1"/>
           <p:nvPr/>
         </p:nvSpPr>
         <p:spPr>
           <a:xfrm>
-            <a:off x="2743200" y="1508760"/>
-            <a:ext cx="4754880" cy="457200"/>
+            <a:off x="822959" y="2606040"/>
+            <a:ext cx="4815687" cy="3337560"/>
           </a:xfrm>
           <a:prstGeom prst="rect">
             <a:avLst/>
@@ -8451,35 +10533,147 @@
           <a:noFill/>
         </p:spPr>
         <p:txBody>
-          <a:bodyPr wrap="square" anchor="ctr" lIns="0" rIns="0" tIns="0" bIns="0"/>
-          <a:lstStyle/>
-          <a:p>
-            <a:pPr algn="l"/>
-            <a:r>
-              <a:rPr sz="1400" b="0" i="1">
-                <a:solidFill>
-                  <a:srgbClr val="54595D"/>
-                </a:solidFill>
-                <a:latin typeface="Calibri"/>
-              </a:rPr>
-              <a:t>Pairs</a:t>
-            </a:r>
-          </a:p>
-        </p:txBody>
-      </p:sp>
-      <p:sp>
-        <p:nvSpPr>
-          <p:cNvPr id="9" name="Oval 8"/>
+          <a:bodyPr wrap="square" lIns="0" rIns="0" tIns="0" bIns="0">
+            <a:spAutoFit/>
+          </a:bodyPr>
+          <a:lstStyle/>
+          <a:p>
+            <a:pPr marL="274320" indent="-274320">
+              <a:spcAft>
+                <a:spcPts val="990"/>
+              </a:spcAft>
+              <a:buClr>
+                <a:srgbClr val="0645AD"/>
+              </a:buClr>
+              <a:buFont typeface="Arial"/>
+              <a:buChar char="•"/>
+            </a:pPr>
+            <a:r>
+              <a:rPr sz="2200" b="1">
+                <a:solidFill>
+                  <a:srgbClr val="202122"/>
+                </a:solidFill>
+                <a:latin typeface="Calibri"/>
+              </a:rPr>
+              <a:t>Laminar:</a:t>
+            </a:r>
+            <a:r>
+              <a:rPr sz="2200" b="0">
+                <a:solidFill>
+                  <a:srgbClr val="202122"/>
+                </a:solidFill>
+                <a:latin typeface="Calibri"/>
+              </a:rPr>
+              <a:t> smooth parallel layers</a:t>
+            </a:r>
+          </a:p>
+          <a:p>
+            <a:pPr marL="274320" indent="-274320">
+              <a:spcAft>
+                <a:spcPts val="990"/>
+              </a:spcAft>
+              <a:buClr>
+                <a:srgbClr val="0645AD"/>
+              </a:buClr>
+              <a:buFont typeface="Arial"/>
+              <a:buChar char="•"/>
+            </a:pPr>
+            <a:r>
+              <a:rPr sz="2200" b="1">
+                <a:solidFill>
+                  <a:srgbClr val="202122"/>
+                </a:solidFill>
+                <a:latin typeface="Calibri"/>
+              </a:rPr>
+              <a:t>Turbulent:</a:t>
+            </a:r>
+            <a:r>
+              <a:rPr sz="2200" b="0">
+                <a:solidFill>
+                  <a:srgbClr val="202122"/>
+                </a:solidFill>
+                <a:latin typeface="Calibri"/>
+              </a:rPr>
+              <a:t> chaotic mixing</a:t>
+            </a:r>
+          </a:p>
+          <a:p>
+            <a:pPr marL="274320" indent="-274320">
+              <a:spcAft>
+                <a:spcPts val="990"/>
+              </a:spcAft>
+              <a:buClr>
+                <a:srgbClr val="0645AD"/>
+              </a:buClr>
+              <a:buFont typeface="Arial"/>
+              <a:buChar char="•"/>
+            </a:pPr>
+            <a:r>
+              <a:rPr sz="2200" b="1">
+                <a:solidFill>
+                  <a:srgbClr val="202122"/>
+                </a:solidFill>
+                <a:latin typeface="Calibri"/>
+              </a:rPr>
+              <a:t>Separation points:</a:t>
+            </a:r>
+            <a:r>
+              <a:rPr sz="2200" b="0">
+                <a:solidFill>
+                  <a:srgbClr val="202122"/>
+                </a:solidFill>
+                <a:latin typeface="Calibri"/>
+              </a:rPr>
+              <a:t> where flow leaves the surface</a:t>
+            </a:r>
+          </a:p>
+          <a:p>
+            <a:pPr marL="274320" indent="-274320">
+              <a:spcAft>
+                <a:spcPts val="990"/>
+              </a:spcAft>
+              <a:buClr>
+                <a:srgbClr val="0645AD"/>
+              </a:buClr>
+              <a:buFont typeface="Arial"/>
+              <a:buChar char="•"/>
+            </a:pPr>
+            <a:r>
+              <a:rPr sz="2200" b="1">
+                <a:solidFill>
+                  <a:srgbClr val="202122"/>
+                </a:solidFill>
+                <a:latin typeface="Calibri"/>
+              </a:rPr>
+              <a:t>Vortices:</a:t>
+            </a:r>
+            <a:r>
+              <a:rPr sz="2200" b="0">
+                <a:solidFill>
+                  <a:srgbClr val="202122"/>
+                </a:solidFill>
+                <a:latin typeface="Calibri"/>
+              </a:rPr>
+              <a:t> swirling flow behind objects</a:t>
+            </a:r>
+          </a:p>
+        </p:txBody>
+      </p:sp>
+      <p:sp>
+        <p:nvSpPr>
+          <p:cNvPr id="10" name="Rounded Rectangle 9"/>
           <p:cNvSpPr/>
           <p:nvPr/>
         </p:nvSpPr>
         <p:spPr>
           <a:xfrm>
-            <a:off x="548640" y="2482596"/>
-            <a:ext cx="384048" cy="384048"/>
-          </a:xfrm>
-          <a:prstGeom prst="ellipse">
-            <a:avLst/>
+            <a:off x="6278727" y="1600200"/>
+            <a:ext cx="5364327" cy="640080"/>
+          </a:xfrm>
+          <a:prstGeom prst="roundRect">
+            <a:avLst>
+              <a:gd name="adj" fmla="val 15000"/>
+            </a:avLst>
           </a:prstGeom>
           <a:solidFill>
             <a:srgbClr val="0645AD"/>
@@ -8504,327 +10698,58 @@
           </a:fontRef>
         </p:style>
         <p:txBody>
-          <a:bodyPr rtlCol="0" anchor="ctr" lIns="0" rIns="0" tIns="0" bIns="0"/>
-          <a:lstStyle/>
-          <a:p>
-            <a:pPr algn="ctr"/>
-            <a:r>
-              <a:rPr sz="1300" b="1">
+          <a:bodyPr rtlCol="0" anchor="ctr"/>
+          <a:lstStyle/>
+          <a:p/>
+        </p:txBody>
+      </p:sp>
+      <p:sp>
+        <p:nvSpPr>
+          <p:cNvPr id="11" name="TextBox 10"/>
+          <p:cNvSpPr txBox="1"/>
+          <p:nvPr/>
+        </p:nvSpPr>
+        <p:spPr>
+          <a:xfrm>
+            <a:off x="6507327" y="1600200"/>
+            <a:ext cx="4907127" cy="640080"/>
+          </a:xfrm>
+          <a:prstGeom prst="rect">
+            <a:avLst/>
+          </a:prstGeom>
+          <a:noFill/>
+        </p:spPr>
+        <p:txBody>
+          <a:bodyPr wrap="square" anchor="ctr" lIns="0" rIns="0" tIns="0" bIns="0"/>
+          <a:lstStyle/>
+          <a:p>
+            <a:pPr algn="l"/>
+            <a:r>
+              <a:rPr sz="2000" b="1" i="0">
                 <a:solidFill>
                   <a:srgbClr val="FFFFFF"/>
                 </a:solidFill>
                 <a:latin typeface="Calibri"/>
               </a:rPr>
-              <a:t>1</a:t>
-            </a:r>
-          </a:p>
-        </p:txBody>
-      </p:sp>
-      <p:sp>
-        <p:nvSpPr>
-          <p:cNvPr id="10" name="TextBox 9"/>
-          <p:cNvSpPr txBox="1"/>
-          <p:nvPr/>
-        </p:nvSpPr>
-        <p:spPr>
-          <a:xfrm>
-            <a:off x="1143000" y="2240280"/>
-            <a:ext cx="5943600" cy="868680"/>
-          </a:xfrm>
-          <a:prstGeom prst="rect">
-            <a:avLst/>
-          </a:prstGeom>
-          <a:noFill/>
-        </p:spPr>
-        <p:txBody>
-          <a:bodyPr wrap="square" anchor="ctr" lIns="0" rIns="0" tIns="0" bIns="0"/>
-          <a:lstStyle/>
-          <a:p>
-            <a:pPr algn="l"/>
-            <a:r>
-              <a:rPr sz="1700" b="0" i="0">
-                <a:solidFill>
-                  <a:srgbClr val="202122"/>
-                </a:solidFill>
-                <a:latin typeface="Calibri"/>
-              </a:rPr>
-              <a:t>A road sign on a post faces strong winds by the sea.</a:t>
-            </a:r>
-          </a:p>
-        </p:txBody>
-      </p:sp>
-      <p:sp>
-        <p:nvSpPr>
-          <p:cNvPr id="11" name="Oval 10"/>
+              <a:t>Forces on structures</a:t>
+            </a:r>
+          </a:p>
+        </p:txBody>
+      </p:sp>
+      <p:sp>
+        <p:nvSpPr>
+          <p:cNvPr id="12" name="Rounded Rectangle 11"/>
           <p:cNvSpPr/>
           <p:nvPr/>
         </p:nvSpPr>
         <p:spPr>
           <a:xfrm>
-            <a:off x="548640" y="3461004"/>
-            <a:ext cx="384048" cy="384048"/>
-          </a:xfrm>
-          <a:prstGeom prst="ellipse">
-            <a:avLst/>
-          </a:prstGeom>
-          <a:solidFill>
-            <a:srgbClr val="0645AD"/>
-          </a:solidFill>
-          <a:ln>
-            <a:noFill/>
-          </a:ln>
-          <a:effectLst/>
-        </p:spPr>
-        <p:style>
-          <a:lnRef idx="1">
-            <a:schemeClr val="accent1"/>
-          </a:lnRef>
-          <a:fillRef idx="3">
-            <a:schemeClr val="accent1"/>
-          </a:fillRef>
-          <a:effectRef idx="2">
-            <a:schemeClr val="accent1"/>
-          </a:effectRef>
-          <a:fontRef idx="minor">
-            <a:schemeClr val="lt1"/>
-          </a:fontRef>
-        </p:style>
-        <p:txBody>
-          <a:bodyPr rtlCol="0" anchor="ctr" lIns="0" rIns="0" tIns="0" bIns="0"/>
-          <a:lstStyle/>
-          <a:p>
-            <a:pPr algn="ctr"/>
-            <a:r>
-              <a:rPr sz="1300" b="1">
-                <a:solidFill>
-                  <a:srgbClr val="FFFFFF"/>
-                </a:solidFill>
-                <a:latin typeface="Calibri"/>
-              </a:rPr>
-              <a:t>2</a:t>
-            </a:r>
-          </a:p>
-        </p:txBody>
-      </p:sp>
-      <p:sp>
-        <p:nvSpPr>
-          <p:cNvPr id="12" name="TextBox 11"/>
-          <p:cNvSpPr txBox="1"/>
-          <p:nvPr/>
-        </p:nvSpPr>
-        <p:spPr>
-          <a:xfrm>
-            <a:off x="1143000" y="3218688"/>
-            <a:ext cx="5943600" cy="868680"/>
-          </a:xfrm>
-          <a:prstGeom prst="rect">
-            <a:avLst/>
-          </a:prstGeom>
-          <a:noFill/>
-        </p:spPr>
-        <p:txBody>
-          <a:bodyPr wrap="square" anchor="ctr" lIns="0" rIns="0" tIns="0" bIns="0"/>
-          <a:lstStyle/>
-          <a:p>
-            <a:pPr algn="l"/>
-            <a:r>
-              <a:rPr sz="1700" b="0" i="0">
-                <a:solidFill>
-                  <a:srgbClr val="202122"/>
-                </a:solidFill>
-                <a:latin typeface="Calibri"/>
-              </a:rPr>
-              <a:t>Identify every load acting on it.</a:t>
-            </a:r>
-          </a:p>
-        </p:txBody>
-      </p:sp>
-      <p:sp>
-        <p:nvSpPr>
-          <p:cNvPr id="13" name="Oval 12"/>
-          <p:cNvSpPr/>
-          <p:nvPr/>
-        </p:nvSpPr>
-        <p:spPr>
-          <a:xfrm>
-            <a:off x="548640" y="4439412"/>
-            <a:ext cx="384048" cy="384048"/>
-          </a:xfrm>
-          <a:prstGeom prst="ellipse">
-            <a:avLst/>
-          </a:prstGeom>
-          <a:solidFill>
-            <a:srgbClr val="0645AD"/>
-          </a:solidFill>
-          <a:ln>
-            <a:noFill/>
-          </a:ln>
-          <a:effectLst/>
-        </p:spPr>
-        <p:style>
-          <a:lnRef idx="1">
-            <a:schemeClr val="accent1"/>
-          </a:lnRef>
-          <a:fillRef idx="3">
-            <a:schemeClr val="accent1"/>
-          </a:fillRef>
-          <a:effectRef idx="2">
-            <a:schemeClr val="accent1"/>
-          </a:effectRef>
-          <a:fontRef idx="minor">
-            <a:schemeClr val="lt1"/>
-          </a:fontRef>
-        </p:style>
-        <p:txBody>
-          <a:bodyPr rtlCol="0" anchor="ctr" lIns="0" rIns="0" tIns="0" bIns="0"/>
-          <a:lstStyle/>
-          <a:p>
-            <a:pPr algn="ctr"/>
-            <a:r>
-              <a:rPr sz="1300" b="1">
-                <a:solidFill>
-                  <a:srgbClr val="FFFFFF"/>
-                </a:solidFill>
-                <a:latin typeface="Calibri"/>
-              </a:rPr>
-              <a:t>3</a:t>
-            </a:r>
-          </a:p>
-        </p:txBody>
-      </p:sp>
-      <p:sp>
-        <p:nvSpPr>
-          <p:cNvPr id="14" name="TextBox 13"/>
-          <p:cNvSpPr txBox="1"/>
-          <p:nvPr/>
-        </p:nvSpPr>
-        <p:spPr>
-          <a:xfrm>
-            <a:off x="1143000" y="4197096"/>
-            <a:ext cx="5943600" cy="868680"/>
-          </a:xfrm>
-          <a:prstGeom prst="rect">
-            <a:avLst/>
-          </a:prstGeom>
-          <a:noFill/>
-        </p:spPr>
-        <p:txBody>
-          <a:bodyPr wrap="square" anchor="ctr" lIns="0" rIns="0" tIns="0" bIns="0"/>
-          <a:lstStyle/>
-          <a:p>
-            <a:pPr algn="l"/>
-            <a:r>
-              <a:rPr sz="1700" b="0" i="0">
-                <a:solidFill>
-                  <a:srgbClr val="202122"/>
-                </a:solidFill>
-                <a:latin typeface="Calibri"/>
-              </a:rPr>
-              <a:t>Identify the environmental conditions and their effects.</a:t>
-            </a:r>
-          </a:p>
-        </p:txBody>
-      </p:sp>
-      <p:sp>
-        <p:nvSpPr>
-          <p:cNvPr id="15" name="Oval 14"/>
-          <p:cNvSpPr/>
-          <p:nvPr/>
-        </p:nvSpPr>
-        <p:spPr>
-          <a:xfrm>
-            <a:off x="548640" y="5417820"/>
-            <a:ext cx="384048" cy="384048"/>
-          </a:xfrm>
-          <a:prstGeom prst="ellipse">
-            <a:avLst/>
-          </a:prstGeom>
-          <a:solidFill>
-            <a:srgbClr val="0645AD"/>
-          </a:solidFill>
-          <a:ln>
-            <a:noFill/>
-          </a:ln>
-          <a:effectLst/>
-        </p:spPr>
-        <p:style>
-          <a:lnRef idx="1">
-            <a:schemeClr val="accent1"/>
-          </a:lnRef>
-          <a:fillRef idx="3">
-            <a:schemeClr val="accent1"/>
-          </a:fillRef>
-          <a:effectRef idx="2">
-            <a:schemeClr val="accent1"/>
-          </a:effectRef>
-          <a:fontRef idx="minor">
-            <a:schemeClr val="lt1"/>
-          </a:fontRef>
-        </p:style>
-        <p:txBody>
-          <a:bodyPr rtlCol="0" anchor="ctr" lIns="0" rIns="0" tIns="0" bIns="0"/>
-          <a:lstStyle/>
-          <a:p>
-            <a:pPr algn="ctr"/>
-            <a:r>
-              <a:rPr sz="1300" b="1">
-                <a:solidFill>
-                  <a:srgbClr val="FFFFFF"/>
-                </a:solidFill>
-                <a:latin typeface="Calibri"/>
-              </a:rPr>
-              <a:t>4</a:t>
-            </a:r>
-          </a:p>
-        </p:txBody>
-      </p:sp>
-      <p:sp>
-        <p:nvSpPr>
-          <p:cNvPr id="16" name="TextBox 15"/>
-          <p:cNvSpPr txBox="1"/>
-          <p:nvPr/>
-        </p:nvSpPr>
-        <p:spPr>
-          <a:xfrm>
-            <a:off x="1143000" y="5175504"/>
-            <a:ext cx="5943600" cy="868680"/>
-          </a:xfrm>
-          <a:prstGeom prst="rect">
-            <a:avLst/>
-          </a:prstGeom>
-          <a:noFill/>
-        </p:spPr>
-        <p:txBody>
-          <a:bodyPr wrap="square" anchor="ctr" lIns="0" rIns="0" tIns="0" bIns="0"/>
-          <a:lstStyle/>
-          <a:p>
-            <a:pPr algn="l"/>
-            <a:r>
-              <a:rPr sz="1700" b="0" i="0">
-                <a:solidFill>
-                  <a:srgbClr val="202122"/>
-                </a:solidFill>
-                <a:latin typeface="Calibri"/>
-              </a:rPr>
-              <a:t>Suggest two design changes to cope.</a:t>
-            </a:r>
-          </a:p>
-        </p:txBody>
-      </p:sp>
-      <p:sp>
-        <p:nvSpPr>
-          <p:cNvPr id="17" name="Rounded Rectangle 16"/>
-          <p:cNvSpPr/>
-          <p:nvPr/>
-        </p:nvSpPr>
-        <p:spPr>
-          <a:xfrm>
-            <a:off x="7772400" y="1508760"/>
-            <a:ext cx="3867912" cy="4572000"/>
+            <a:off x="6278727" y="2377440"/>
+            <a:ext cx="5364327" cy="3794760"/>
           </a:xfrm>
           <a:prstGeom prst="roundRect">
             <a:avLst>
-              <a:gd name="adj" fmla="val 8000"/>
+              <a:gd name="adj" fmla="val 4000"/>
             </a:avLst>
           </a:prstGeom>
           <a:solidFill>
@@ -8857,47 +10782,14 @@
       </p:sp>
       <p:sp>
         <p:nvSpPr>
-          <p:cNvPr id="18" name="TextBox 17"/>
+          <p:cNvPr id="13" name="TextBox 12"/>
           <p:cNvSpPr txBox="1"/>
           <p:nvPr/>
         </p:nvSpPr>
         <p:spPr>
           <a:xfrm>
-            <a:off x="8046720" y="1737360"/>
-            <a:ext cx="3291840" cy="365760"/>
-          </a:xfrm>
-          <a:prstGeom prst="rect">
-            <a:avLst/>
-          </a:prstGeom>
-          <a:noFill/>
-        </p:spPr>
-        <p:txBody>
-          <a:bodyPr wrap="square" anchor="t" lIns="0" rIns="0" tIns="0" bIns="0"/>
-          <a:lstStyle/>
-          <a:p>
-            <a:pPr algn="l"/>
-            <a:r>
-              <a:rPr sz="1300" b="1" i="0">
-                <a:solidFill>
-                  <a:srgbClr val="0645AD"/>
-                </a:solidFill>
-                <a:latin typeface="Calibri"/>
-              </a:rPr>
-              <a:t>SUCCESS CRITERIA</a:t>
-            </a:r>
-          </a:p>
-        </p:txBody>
-      </p:sp>
-      <p:sp>
-        <p:nvSpPr>
-          <p:cNvPr id="19" name="TextBox 18"/>
-          <p:cNvSpPr txBox="1"/>
-          <p:nvPr/>
-        </p:nvSpPr>
-        <p:spPr>
-          <a:xfrm>
-            <a:off x="8046720" y="2240280"/>
-            <a:ext cx="3337560" cy="3657600"/>
+            <a:off x="6553047" y="2606040"/>
+            <a:ext cx="4815687" cy="3337560"/>
           </a:xfrm>
           <a:prstGeom prst="rect">
             <a:avLst/>
@@ -8912,7 +10804,7 @@
           <a:p>
             <a:pPr marL="274320" indent="-274320">
               <a:spcAft>
-                <a:spcPts val="810"/>
+                <a:spcPts val="990"/>
               </a:spcAft>
               <a:buClr>
                 <a:srgbClr val="0645AD"/>
@@ -8921,19 +10813,28 @@
               <a:buChar char="•"/>
             </a:pPr>
             <a:r>
-              <a:rPr sz="1800" b="0">
+              <a:rPr sz="2200" b="1">
                 <a:solidFill>
                   <a:srgbClr val="202122"/>
                 </a:solidFill>
                 <a:latin typeface="Calibri"/>
               </a:rPr>
-              <a:t>Wind, weight and fatigue loads identified</a:t>
+              <a:t>Lift:</a:t>
+            </a:r>
+            <a:r>
+              <a:rPr sz="2200" b="0">
+                <a:solidFill>
+                  <a:srgbClr val="202122"/>
+                </a:solidFill>
+                <a:latin typeface="Calibri"/>
+              </a:rPr>
+              <a:t> at right angles to flow</a:t>
             </a:r>
           </a:p>
           <a:p>
             <a:pPr marL="274320" indent="-274320">
               <a:spcAft>
-                <a:spcPts val="810"/>
+                <a:spcPts val="990"/>
               </a:spcAft>
               <a:buClr>
                 <a:srgbClr val="0645AD"/>
@@ -8942,19 +10843,28 @@
               <a:buChar char="•"/>
             </a:pPr>
             <a:r>
-              <a:rPr sz="1800" b="0">
+              <a:rPr sz="2200" b="1">
                 <a:solidFill>
                   <a:srgbClr val="202122"/>
                 </a:solidFill>
                 <a:latin typeface="Calibri"/>
               </a:rPr>
-              <a:t>Corrosion considered</a:t>
+              <a:t>Drag:</a:t>
+            </a:r>
+            <a:r>
+              <a:rPr sz="2200" b="0">
+                <a:solidFill>
+                  <a:srgbClr val="202122"/>
+                </a:solidFill>
+                <a:latin typeface="Calibri"/>
+              </a:rPr>
+              <a:t> opposes motion</a:t>
             </a:r>
           </a:p>
           <a:p>
             <a:pPr marL="274320" indent="-274320">
               <a:spcAft>
-                <a:spcPts val="810"/>
+                <a:spcPts val="990"/>
               </a:spcAft>
               <a:buClr>
                 <a:srgbClr val="0645AD"/>
@@ -8963,13 +10873,52 @@
               <a:buChar char="•"/>
             </a:pPr>
             <a:r>
-              <a:rPr sz="1800" b="0">
+              <a:rPr sz="2200" b="1">
                 <a:solidFill>
                   <a:srgbClr val="202122"/>
                 </a:solidFill>
                 <a:latin typeface="Calibri"/>
               </a:rPr>
-              <a:t>Changes justified</a:t>
+              <a:t>Thrust:</a:t>
+            </a:r>
+            <a:r>
+              <a:rPr sz="2200" b="0">
+                <a:solidFill>
+                  <a:srgbClr val="202122"/>
+                </a:solidFill>
+                <a:latin typeface="Calibri"/>
+              </a:rPr>
+              <a:t> drives forward</a:t>
+            </a:r>
+          </a:p>
+          <a:p>
+            <a:pPr marL="274320" indent="-274320">
+              <a:spcAft>
+                <a:spcPts val="990"/>
+              </a:spcAft>
+              <a:buClr>
+                <a:srgbClr val="0645AD"/>
+              </a:buClr>
+              <a:buFont typeface="Arial"/>
+              <a:buChar char="•"/>
+            </a:pPr>
+            <a:r>
+              <a:rPr sz="2200" b="1">
+                <a:solidFill>
+                  <a:srgbClr val="202122"/>
+                </a:solidFill>
+                <a:latin typeface="Calibri"/>
+              </a:rPr>
+              <a:t>Turbulence:</a:t>
+            </a:r>
+            <a:r>
+              <a:rPr sz="2200" b="0">
+                <a:solidFill>
+                  <a:srgbClr val="202122"/>
+                </a:solidFill>
+                <a:latin typeface="Calibri"/>
+              </a:rPr>
+              <a:t> fluctuating loads that can cause fatigue</a:t>
             </a:r>
           </a:p>
         </p:txBody>
@@ -8988,7 +10937,7 @@
     <p:bg>
       <p:bgPr>
         <a:solidFill>
-          <a:srgbClr val="03306E"/>
+          <a:srgbClr val="FFFFFF"/>
         </a:solidFill>
         <a:effectLst/>
       </p:bgPr>
@@ -9024,7 +10973,7 @@
             <a:r>
               <a:rPr sz="1100" b="1" i="0">
                 <a:solidFill>
-                  <a:srgbClr val="A9C8F0"/>
+                  <a:srgbClr val="54595D"/>
                 </a:solidFill>
                 <a:latin typeface="Calibri"/>
               </a:rPr>
@@ -9057,24 +11006,90 @@
             <a:r>
               <a:rPr sz="3200" b="1" i="0">
                 <a:solidFill>
-                  <a:srgbClr val="FFFFFF"/>
+                  <a:srgbClr val="03306E"/>
                 </a:solidFill>
                 <a:latin typeface="Cambria"/>
               </a:rPr>
-              <a:t>Exit ticket</a:t>
-            </a:r>
-          </a:p>
-        </p:txBody>
-      </p:sp>
-      <p:sp>
-        <p:nvSpPr>
-          <p:cNvPr id="4" name="Oval 3"/>
+              <a:t>Quick check: Aerodynamics</a:t>
+            </a:r>
+          </a:p>
+        </p:txBody>
+      </p:sp>
+      <p:sp>
+        <p:nvSpPr>
+          <p:cNvPr id="4" name="TextBox 3"/>
+          <p:cNvSpPr txBox="1"/>
+          <p:nvPr/>
+        </p:nvSpPr>
+        <p:spPr>
+          <a:xfrm>
+            <a:off x="548640" y="6446520"/>
+            <a:ext cx="8229600" cy="274320"/>
+          </a:xfrm>
+          <a:prstGeom prst="rect">
+            <a:avLst/>
+          </a:prstGeom>
+          <a:noFill/>
+        </p:spPr>
+        <p:txBody>
+          <a:bodyPr wrap="square" anchor="t" lIns="0" rIns="0" tIns="0" bIns="0"/>
+          <a:lstStyle/>
+          <a:p>
+            <a:pPr algn="l"/>
+            <a:r>
+              <a:rPr sz="1000" b="0" i="0">
+                <a:solidFill>
+                  <a:srgbClr val="54595D"/>
+                </a:solidFill>
+                <a:latin typeface="Calibri"/>
+              </a:rPr>
+              <a:t>Design and Development for Engineering and Manufacturing T Level  ·  Loads, Environment and Aerodynamics in Design</a:t>
+            </a:r>
+          </a:p>
+        </p:txBody>
+      </p:sp>
+      <p:sp>
+        <p:nvSpPr>
+          <p:cNvPr id="5" name="TextBox 4"/>
+          <p:cNvSpPr txBox="1"/>
+          <p:nvPr/>
+        </p:nvSpPr>
+        <p:spPr>
+          <a:xfrm>
+            <a:off x="10728655" y="6446520"/>
+            <a:ext cx="914400" cy="274320"/>
+          </a:xfrm>
+          <a:prstGeom prst="rect">
+            <a:avLst/>
+          </a:prstGeom>
+          <a:noFill/>
+        </p:spPr>
+        <p:txBody>
+          <a:bodyPr wrap="square" anchor="t" lIns="0" rIns="0" tIns="0" bIns="0"/>
+          <a:lstStyle/>
+          <a:p>
+            <a:pPr algn="r"/>
+            <a:r>
+              <a:rPr sz="1000" b="0" i="0">
+                <a:solidFill>
+                  <a:srgbClr val="54595D"/>
+                </a:solidFill>
+                <a:latin typeface="Calibri"/>
+              </a:rPr>
+              <a:t>9</a:t>
+            </a:r>
+          </a:p>
+        </p:txBody>
+      </p:sp>
+      <p:sp>
+        <p:nvSpPr>
+          <p:cNvPr id="6" name="Oval 5"/>
           <p:cNvSpPr/>
           <p:nvPr/>
         </p:nvSpPr>
         <p:spPr>
           <a:xfrm>
-            <a:off x="548640" y="1737360"/>
+            <a:off x="548640" y="1691640"/>
             <a:ext cx="502920" cy="502920"/>
           </a:xfrm>
           <a:prstGeom prst="ellipse">
@@ -9108,7 +11123,7 @@
           <a:p>
             <a:pPr algn="ctr"/>
             <a:r>
-              <a:rPr sz="1700" b="1">
+              <a:rPr sz="1600" b="1">
                 <a:solidFill>
                   <a:srgbClr val="FFFFFF"/>
                 </a:solidFill>
@@ -9121,14 +11136,14 @@
       </p:sp>
       <p:sp>
         <p:nvSpPr>
-          <p:cNvPr id="5" name="TextBox 4"/>
+          <p:cNvPr id="7" name="TextBox 6"/>
           <p:cNvSpPr txBox="1"/>
           <p:nvPr/>
         </p:nvSpPr>
         <p:spPr>
           <a:xfrm>
-            <a:off x="1325880" y="1645920"/>
-            <a:ext cx="6583680" cy="822960"/>
+            <a:off x="1371600" y="1645920"/>
+            <a:ext cx="10271455" cy="1188720"/>
           </a:xfrm>
           <a:prstGeom prst="rect">
             <a:avLst/>
@@ -9136,31 +11151,31 @@
           <a:noFill/>
         </p:spPr>
         <p:txBody>
-          <a:bodyPr wrap="square" anchor="ctr" lIns="0" rIns="0" tIns="0" bIns="0"/>
+          <a:bodyPr wrap="square" anchor="t" lIns="0" rIns="0" tIns="0" bIns="0"/>
           <a:lstStyle/>
           <a:p>
             <a:pPr algn="l"/>
             <a:r>
-              <a:rPr sz="2000" b="0" i="0">
-                <a:solidFill>
-                  <a:srgbClr val="FFFFFF"/>
-                </a:solidFill>
-                <a:latin typeface="Calibri"/>
-              </a:rPr>
-              <a:t>Give an example of a dynamic load.</a:t>
-            </a:r>
-          </a:p>
-        </p:txBody>
-      </p:sp>
-      <p:sp>
-        <p:nvSpPr>
-          <p:cNvPr id="6" name="Oval 5"/>
+              <a:rPr sz="2400" b="0" i="0">
+                <a:solidFill>
+                  <a:srgbClr val="202122"/>
+                </a:solidFill>
+                <a:latin typeface="Calibri"/>
+              </a:rPr>
+              <a:t>What is a separation point?</a:t>
+            </a:r>
+          </a:p>
+        </p:txBody>
+      </p:sp>
+      <p:sp>
+        <p:nvSpPr>
+          <p:cNvPr id="8" name="Oval 7"/>
           <p:cNvSpPr/>
           <p:nvPr/>
         </p:nvSpPr>
         <p:spPr>
           <a:xfrm>
-            <a:off x="548640" y="2697480"/>
+            <a:off x="548640" y="3108960"/>
             <a:ext cx="502920" cy="502920"/>
           </a:xfrm>
           <a:prstGeom prst="ellipse">
@@ -9194,7 +11209,7 @@
           <a:p>
             <a:pPr algn="ctr"/>
             <a:r>
-              <a:rPr sz="1700" b="1">
+              <a:rPr sz="1600" b="1">
                 <a:solidFill>
                   <a:srgbClr val="FFFFFF"/>
                 </a:solidFill>
@@ -9207,14 +11222,14 @@
       </p:sp>
       <p:sp>
         <p:nvSpPr>
-          <p:cNvPr id="7" name="TextBox 6"/>
+          <p:cNvPr id="9" name="TextBox 8"/>
           <p:cNvSpPr txBox="1"/>
           <p:nvPr/>
         </p:nvSpPr>
         <p:spPr>
           <a:xfrm>
-            <a:off x="1325880" y="2606040"/>
-            <a:ext cx="6583680" cy="822960"/>
+            <a:off x="1371600" y="3063240"/>
+            <a:ext cx="10271455" cy="1188720"/>
           </a:xfrm>
           <a:prstGeom prst="rect">
             <a:avLst/>
@@ -9222,31 +11237,31 @@
           <a:noFill/>
         </p:spPr>
         <p:txBody>
-          <a:bodyPr wrap="square" anchor="ctr" lIns="0" rIns="0" tIns="0" bIns="0"/>
+          <a:bodyPr wrap="square" anchor="t" lIns="0" rIns="0" tIns="0" bIns="0"/>
           <a:lstStyle/>
           <a:p>
             <a:pPr algn="l"/>
             <a:r>
-              <a:rPr sz="2000" b="0" i="0">
-                <a:solidFill>
-                  <a:srgbClr val="FFFFFF"/>
-                </a:solidFill>
-                <a:latin typeface="Calibri"/>
-              </a:rPr>
-              <a:t>How does temperature affect a polymer?</a:t>
-            </a:r>
-          </a:p>
-        </p:txBody>
-      </p:sp>
-      <p:sp>
-        <p:nvSpPr>
-          <p:cNvPr id="8" name="Oval 7"/>
+              <a:rPr sz="2400" b="0" i="0">
+                <a:solidFill>
+                  <a:srgbClr val="202122"/>
+                </a:solidFill>
+                <a:latin typeface="Calibri"/>
+              </a:rPr>
+              <a:t>What direction does lift act?</a:t>
+            </a:r>
+          </a:p>
+        </p:txBody>
+      </p:sp>
+      <p:sp>
+        <p:nvSpPr>
+          <p:cNvPr id="10" name="Oval 9"/>
           <p:cNvSpPr/>
           <p:nvPr/>
         </p:nvSpPr>
         <p:spPr>
           <a:xfrm>
-            <a:off x="548640" y="3657600"/>
+            <a:off x="548640" y="4526280"/>
             <a:ext cx="502920" cy="502920"/>
           </a:xfrm>
           <a:prstGeom prst="ellipse">
@@ -9280,7 +11295,7 @@
           <a:p>
             <a:pPr algn="ctr"/>
             <a:r>
-              <a:rPr sz="1700" b="1">
+              <a:rPr sz="1600" b="1">
                 <a:solidFill>
                   <a:srgbClr val="FFFFFF"/>
                 </a:solidFill>
@@ -9289,83 +11304,6 @@
               <a:t>3</a:t>
             </a:r>
           </a:p>
-        </p:txBody>
-      </p:sp>
-      <p:sp>
-        <p:nvSpPr>
-          <p:cNvPr id="9" name="TextBox 8"/>
-          <p:cNvSpPr txBox="1"/>
-          <p:nvPr/>
-        </p:nvSpPr>
-        <p:spPr>
-          <a:xfrm>
-            <a:off x="1325880" y="3566160"/>
-            <a:ext cx="6583680" cy="822960"/>
-          </a:xfrm>
-          <a:prstGeom prst="rect">
-            <a:avLst/>
-          </a:prstGeom>
-          <a:noFill/>
-        </p:spPr>
-        <p:txBody>
-          <a:bodyPr wrap="square" anchor="ctr" lIns="0" rIns="0" tIns="0" bIns="0"/>
-          <a:lstStyle/>
-          <a:p>
-            <a:pPr algn="l"/>
-            <a:r>
-              <a:rPr sz="2000" b="0" i="0">
-                <a:solidFill>
-                  <a:srgbClr val="FFFFFF"/>
-                </a:solidFill>
-                <a:latin typeface="Calibri"/>
-              </a:rPr>
-              <a:t>Why do racing cars have wings?</a:t>
-            </a:r>
-          </a:p>
-        </p:txBody>
-      </p:sp>
-      <p:sp>
-        <p:nvSpPr>
-          <p:cNvPr id="10" name="Rounded Rectangle 9"/>
-          <p:cNvSpPr/>
-          <p:nvPr/>
-        </p:nvSpPr>
-        <p:spPr>
-          <a:xfrm>
-            <a:off x="8229600" y="1645920"/>
-            <a:ext cx="3410712" cy="2926080"/>
-          </a:xfrm>
-          <a:prstGeom prst="roundRect">
-            <a:avLst>
-              <a:gd name="adj" fmla="val 8000"/>
-            </a:avLst>
-          </a:prstGeom>
-          <a:solidFill>
-            <a:srgbClr val="0645AD"/>
-          </a:solidFill>
-          <a:ln>
-            <a:noFill/>
-          </a:ln>
-          <a:effectLst/>
-        </p:spPr>
-        <p:style>
-          <a:lnRef idx="1">
-            <a:schemeClr val="accent1"/>
-          </a:lnRef>
-          <a:fillRef idx="3">
-            <a:schemeClr val="accent1"/>
-          </a:fillRef>
-          <a:effectRef idx="2">
-            <a:schemeClr val="accent1"/>
-          </a:effectRef>
-          <a:fontRef idx="minor">
-            <a:schemeClr val="lt1"/>
-          </a:fontRef>
-        </p:style>
-        <p:txBody>
-          <a:bodyPr rtlCol="0" anchor="ctr"/>
-          <a:lstStyle/>
-          <a:p/>
         </p:txBody>
       </p:sp>
       <p:sp>
@@ -9376,8 +11314,8 @@
         </p:nvSpPr>
         <p:spPr>
           <a:xfrm>
-            <a:off x="8503920" y="1874519"/>
-            <a:ext cx="2926080" cy="365760"/>
+            <a:off x="1371600" y="4480560"/>
+            <a:ext cx="10271455" cy="1188720"/>
           </a:xfrm>
           <a:prstGeom prst="rect">
             <a:avLst/>
@@ -9390,13 +11328,13 @@
           <a:p>
             <a:pPr algn="l"/>
             <a:r>
-              <a:rPr sz="1300" b="1" i="0">
-                <a:solidFill>
-                  <a:srgbClr val="A9C8F0"/>
-                </a:solidFill>
-                <a:latin typeface="Calibri"/>
-              </a:rPr>
-              <a:t>REVISE THIS TOPIC</a:t>
+              <a:rPr sz="2400" b="0" i="0">
+                <a:solidFill>
+                  <a:srgbClr val="202122"/>
+                </a:solidFill>
+                <a:latin typeface="Calibri"/>
+              </a:rPr>
+              <a:t>Why can turbulence damage structures?</a:t>
             </a:r>
           </a:p>
         </p:txBody>
@@ -9409,8 +11347,8 @@
         </p:nvSpPr>
         <p:spPr>
           <a:xfrm>
-            <a:off x="8503920" y="2286000"/>
-            <a:ext cx="2926080" cy="548640"/>
+            <a:off x="548640" y="5852160"/>
+            <a:ext cx="11094415" cy="365760"/>
           </a:xfrm>
           <a:prstGeom prst="rect">
             <a:avLst/>
@@ -9423,79 +11361,13 @@
           <a:p>
             <a:pPr algn="l"/>
             <a:r>
-              <a:rPr sz="1400" b="0" i="0">
-                <a:solidFill>
-                  <a:srgbClr val="FFFFFF"/>
-                </a:solidFill>
-                <a:latin typeface="Calibri"/>
-              </a:rPr>
-              <a:t>Revision notes for this lesson are on the study wiki:</a:t>
-            </a:r>
-          </a:p>
-        </p:txBody>
-      </p:sp>
-      <p:sp>
-        <p:nvSpPr>
-          <p:cNvPr id="13" name="TextBox 12"/>
-          <p:cNvSpPr txBox="1"/>
-          <p:nvPr/>
-        </p:nvSpPr>
-        <p:spPr>
-          <a:xfrm>
-            <a:off x="8503920" y="2926080"/>
-            <a:ext cx="2926080" cy="1463040"/>
-          </a:xfrm>
-          <a:prstGeom prst="rect">
-            <a:avLst/>
-          </a:prstGeom>
-          <a:noFill/>
-        </p:spPr>
-        <p:txBody>
-          <a:bodyPr wrap="square" anchor="t" lIns="0" rIns="0" tIns="0" bIns="0"/>
-          <a:lstStyle/>
-          <a:p>
-            <a:pPr algn="l"/>
-            <a:r>
-              <a:rPr sz="2000" b="1" i="0">
-                <a:solidFill>
-                  <a:srgbClr val="FFFFFF"/>
-                </a:solidFill>
-                <a:latin typeface="Cambria"/>
-              </a:rPr>
-              <a:t>Knowledge Criteria</a:t>
-            </a:r>
-          </a:p>
-        </p:txBody>
-      </p:sp>
-      <p:sp>
-        <p:nvSpPr>
-          <p:cNvPr id="14" name="TextBox 13"/>
-          <p:cNvSpPr txBox="1"/>
-          <p:nvPr/>
-        </p:nvSpPr>
-        <p:spPr>
-          <a:xfrm>
-            <a:off x="548640" y="5669280"/>
-            <a:ext cx="11094415" cy="548640"/>
-          </a:xfrm>
-          <a:prstGeom prst="rect">
-            <a:avLst/>
-          </a:prstGeom>
-          <a:noFill/>
-        </p:spPr>
-        <p:txBody>
-          <a:bodyPr wrap="square" anchor="t" lIns="0" rIns="0" tIns="0" bIns="0"/>
-          <a:lstStyle/>
-          <a:p>
-            <a:pPr algn="l"/>
-            <a:r>
-              <a:rPr sz="1200" b="0" i="0">
-                <a:solidFill>
-                  <a:srgbClr val="A9C8F0"/>
-                </a:solidFill>
-                <a:latin typeface="Calibri"/>
-              </a:rPr>
-              <a:t>https://lana6478.github.io/T-level-Design-Development-Engineering-Manufacturing/#/02-occupational-specialism/01-knowledge-criteria.md</a:t>
+              <a:rPr sz="1300" b="0" i="1">
+                <a:solidFill>
+                  <a:srgbClr val="54595D"/>
+                </a:solidFill>
+                <a:latin typeface="Calibri"/>
+              </a:rPr>
+              <a:t>Answer on mini whiteboards or in your book. Answers are in the speaker notes.</a:t>
             </a:r>
           </a:p>
         </p:txBody>
